--- a/LabBook_20.pptx
+++ b/LabBook_20.pptx
@@ -817,7 +817,7 @@
           <a:p>
             <a:fld id="{8438F8DC-35B0-48E6-A86E-42F1F08DD00F}" type="datetimeFigureOut">
               <a:rPr lang="es-ES" smtClean="0"/>
-              <a:t>01/03/2026</a:t>
+              <a:t>02/03/2026</a:t>
             </a:fld>
             <a:endParaRPr lang="es-ES"/>
           </a:p>
@@ -895,7 +895,7 @@
           <a:p>
             <a:fld id="{4116A549-763A-4A89-A454-A94BAF51395E}" type="slidenum">
               <a:rPr lang="es-ES" smtClean="0"/>
-              <a:t>‹Nº›</a:t>
+              <a:t>‹#›</a:t>
             </a:fld>
             <a:endParaRPr lang="es-ES"/>
           </a:p>
@@ -994,7 +994,7 @@
           <a:p>
             <a:fld id="{FACBDC12-F39B-4B97-8F4D-6734F9D366FF}" type="datetimeFigureOut">
               <a:rPr lang="es-ES" smtClean="0"/>
-              <a:t>01/03/2026</a:t>
+              <a:t>02/03/2026</a:t>
             </a:fld>
             <a:endParaRPr lang="es-ES"/>
           </a:p>
@@ -1152,7 +1152,7 @@
           <a:p>
             <a:fld id="{676223B9-C868-4436-87D9-1A3152E1157A}" type="slidenum">
               <a:rPr lang="es-ES" smtClean="0"/>
-              <a:t>‹Nº›</a:t>
+              <a:t>‹#›</a:t>
             </a:fld>
             <a:endParaRPr lang="es-ES"/>
           </a:p>
@@ -2604,7 +2604,7 @@
           </a:lstStyle>
           <a:p>
             <a:fld id="{B6F15528-21DE-4FAA-801E-634DDDAF4B2B}" type="slidenum">
-              <a:t>‹Nº›</a:t>
+              <a:t>‹#›</a:t>
             </a:fld>
             <a:endParaRPr/>
           </a:p>
@@ -2771,7 +2771,7 @@
           </a:lstStyle>
           <a:p>
             <a:fld id="{B6F15528-21DE-4FAA-801E-634DDDAF4B2B}" type="slidenum">
-              <a:t>‹Nº›</a:t>
+              <a:t>‹#›</a:t>
             </a:fld>
             <a:endParaRPr/>
           </a:p>
@@ -2993,7 +2993,7 @@
           </a:lstStyle>
           <a:p>
             <a:fld id="{B6F15528-21DE-4FAA-801E-634DDDAF4B2B}" type="slidenum">
-              <a:t>‹Nº›</a:t>
+              <a:t>‹#›</a:t>
             </a:fld>
             <a:endParaRPr/>
           </a:p>
@@ -3200,7 +3200,7 @@
           </a:lstStyle>
           <a:p>
             <a:fld id="{B6F15528-21DE-4FAA-801E-634DDDAF4B2B}" type="slidenum">
-              <a:t>‹Nº›</a:t>
+              <a:t>‹#›</a:t>
             </a:fld>
             <a:endParaRPr/>
           </a:p>
@@ -3364,7 +3364,7 @@
           </a:lstStyle>
           <a:p>
             <a:fld id="{B6F15528-21DE-4FAA-801E-634DDDAF4B2B}" type="slidenum">
-              <a:t>‹Nº›</a:t>
+              <a:t>‹#›</a:t>
             </a:fld>
             <a:endParaRPr/>
           </a:p>
@@ -3666,7 +3666,7 @@
           </a:lstStyle>
           <a:p>
             <a:fld id="{B6F15528-21DE-4FAA-801E-634DDDAF4B2B}" type="slidenum">
-              <a:t>‹Nº›</a:t>
+              <a:t>‹#›</a:t>
             </a:fld>
             <a:endParaRPr/>
           </a:p>
@@ -10221,31 +10221,89 @@
           </a:p>
           <a:p>
             <a:pPr algn="just"/>
-            <a:endParaRPr lang="en-US" sz="1200" dirty="0">
-              <a:latin typeface="Arial" panose="020B0604020202020204" pitchFamily="34" charset="0"/>
-              <a:cs typeface="Arial" panose="020B0604020202020204" pitchFamily="34" charset="0"/>
-            </a:endParaRPr>
+            <a:r>
+              <a:rPr lang="en-US" sz="1200" dirty="0">
+                <a:latin typeface="Arial" panose="020B0604020202020204" pitchFamily="34" charset="0"/>
+                <a:cs typeface="Arial" panose="020B0604020202020204" pitchFamily="34" charset="0"/>
+              </a:rPr>
+              <a:t>In the following the coupling coefficient in terms of the proportion L/</a:t>
+            </a:r>
+            <a:r>
+              <a:rPr lang="en-US" sz="1200" dirty="0" err="1">
+                <a:latin typeface="Arial" panose="020B0604020202020204" pitchFamily="34" charset="0"/>
+                <a:cs typeface="Arial" panose="020B0604020202020204" pitchFamily="34" charset="0"/>
+              </a:rPr>
+              <a:t>L_pi</a:t>
+            </a:r>
+            <a:r>
+              <a:rPr lang="en-US" sz="1200" dirty="0">
+                <a:latin typeface="Arial" panose="020B0604020202020204" pitchFamily="34" charset="0"/>
+                <a:cs typeface="Arial" panose="020B0604020202020204" pitchFamily="34" charset="0"/>
+              </a:rPr>
+              <a:t> is represented. This parameter indicates the proportion of energy transferred from one port to another depending on the distance of the directional coupler.</a:t>
+            </a:r>
           </a:p>
           <a:p>
             <a:pPr algn="just"/>
-            <a:endParaRPr lang="en-US" sz="1200" dirty="0">
-              <a:latin typeface="Arial" panose="020B0604020202020204" pitchFamily="34" charset="0"/>
-              <a:cs typeface="Arial" panose="020B0604020202020204" pitchFamily="34" charset="0"/>
-            </a:endParaRPr>
+            <a:r>
+              <a:rPr lang="en-US" sz="1200" dirty="0">
+                <a:latin typeface="Arial" panose="020B0604020202020204" pitchFamily="34" charset="0"/>
+                <a:cs typeface="Arial" panose="020B0604020202020204" pitchFamily="34" charset="0"/>
+              </a:rPr>
+              <a:t>For a complete energy transfer, a distance of </a:t>
+            </a:r>
+            <a:r>
+              <a:rPr lang="en-US" sz="1200" dirty="0" err="1">
+                <a:latin typeface="Arial" panose="020B0604020202020204" pitchFamily="34" charset="0"/>
+                <a:cs typeface="Arial" panose="020B0604020202020204" pitchFamily="34" charset="0"/>
+              </a:rPr>
+              <a:t>L_pi</a:t>
+            </a:r>
+            <a:r>
+              <a:rPr lang="en-US" sz="1200" dirty="0">
+                <a:latin typeface="Arial" panose="020B0604020202020204" pitchFamily="34" charset="0"/>
+                <a:cs typeface="Arial" panose="020B0604020202020204" pitchFamily="34" charset="0"/>
+              </a:rPr>
+              <a:t> is required, obtaining a value k=1.0.</a:t>
+            </a:r>
           </a:p>
           <a:p>
             <a:pPr algn="just"/>
-            <a:endParaRPr lang="en-US" sz="1200" dirty="0">
-              <a:latin typeface="Arial" panose="020B0604020202020204" pitchFamily="34" charset="0"/>
-              <a:cs typeface="Arial" panose="020B0604020202020204" pitchFamily="34" charset="0"/>
-            </a:endParaRPr>
-          </a:p>
-          <a:p>
-            <a:pPr algn="just"/>
-            <a:endParaRPr lang="en-US" sz="1200" dirty="0">
-              <a:latin typeface="Arial" panose="020B0604020202020204" pitchFamily="34" charset="0"/>
-              <a:cs typeface="Arial" panose="020B0604020202020204" pitchFamily="34" charset="0"/>
-            </a:endParaRPr>
+            <a:r>
+              <a:rPr lang="en-US" sz="1200" dirty="0">
+                <a:latin typeface="Arial" panose="020B0604020202020204" pitchFamily="34" charset="0"/>
+                <a:cs typeface="Arial" panose="020B0604020202020204" pitchFamily="34" charset="0"/>
+              </a:rPr>
+              <a:t>If we required a half power splitting, then the coupling coefficient needs to be k=0.5, which is found for L/</a:t>
+            </a:r>
+            <a:r>
+              <a:rPr lang="en-US" sz="1200" dirty="0" err="1">
+                <a:latin typeface="Arial" panose="020B0604020202020204" pitchFamily="34" charset="0"/>
+                <a:cs typeface="Arial" panose="020B0604020202020204" pitchFamily="34" charset="0"/>
+              </a:rPr>
+              <a:t>L_pi</a:t>
+            </a:r>
+            <a:r>
+              <a:rPr lang="en-US" sz="1200" dirty="0">
+                <a:latin typeface="Arial" panose="020B0604020202020204" pitchFamily="34" charset="0"/>
+                <a:cs typeface="Arial" panose="020B0604020202020204" pitchFamily="34" charset="0"/>
+              </a:rPr>
+              <a:t>=1.5, which means a distance of 1.5 times </a:t>
+            </a:r>
+            <a:r>
+              <a:rPr lang="en-US" sz="1200" dirty="0" err="1">
+                <a:latin typeface="Arial" panose="020B0604020202020204" pitchFamily="34" charset="0"/>
+                <a:cs typeface="Arial" panose="020B0604020202020204" pitchFamily="34" charset="0"/>
+              </a:rPr>
+              <a:t>L_pi</a:t>
+            </a:r>
+            <a:r>
+              <a:rPr lang="en-US" sz="1200" dirty="0">
+                <a:latin typeface="Arial" panose="020B0604020202020204" pitchFamily="34" charset="0"/>
+                <a:cs typeface="Arial" panose="020B0604020202020204" pitchFamily="34" charset="0"/>
+              </a:rPr>
+              <a:t>.</a:t>
+            </a:r>
           </a:p>
           <a:p>
             <a:pPr algn="just"/>
@@ -10397,6 +10455,36 @@
           <a:xfrm>
             <a:off x="382588" y="1626040"/>
             <a:ext cx="3383313" cy="983682"/>
+          </a:xfrm>
+          <a:prstGeom prst="rect">
+            <a:avLst/>
+          </a:prstGeom>
+        </p:spPr>
+      </p:pic>
+      <p:pic>
+        <p:nvPicPr>
+          <p:cNvPr id="12" name="Picture 11" descr="A graph with blue lines&#10;&#10;AI-generated content may be incorrect.">
+            <a:extLst>
+              <a:ext uri="{FF2B5EF4-FFF2-40B4-BE49-F238E27FC236}">
+                <a16:creationId xmlns:a16="http://schemas.microsoft.com/office/drawing/2014/main" id="{C4FD822E-F47A-D7C3-F6FF-2227E61FDFC2}"/>
+              </a:ext>
+            </a:extLst>
+          </p:cNvPr>
+          <p:cNvPicPr>
+            <a:picLocks noChangeAspect="1"/>
+          </p:cNvPicPr>
+          <p:nvPr/>
+        </p:nvPicPr>
+        <p:blipFill>
+          <a:blip r:embed="rId6"/>
+          <a:stretch>
+            <a:fillRect/>
+          </a:stretch>
+        </p:blipFill>
+        <p:spPr>
+          <a:xfrm>
+            <a:off x="4343400" y="1475952"/>
+            <a:ext cx="5075046" cy="3216494"/>
           </a:xfrm>
           <a:prstGeom prst="rect">
             <a:avLst/>

--- a/LabBook_20.pptx
+++ b/LabBook_20.pptx
@@ -5,10 +5,10 @@
     <p:sldMasterId id="2147483648" r:id="rId1"/>
   </p:sldMasterIdLst>
   <p:notesMasterIdLst>
-    <p:notesMasterId r:id="rId18"/>
+    <p:notesMasterId r:id="rId21"/>
   </p:notesMasterIdLst>
   <p:handoutMasterIdLst>
-    <p:handoutMasterId r:id="rId19"/>
+    <p:handoutMasterId r:id="rId22"/>
   </p:handoutMasterIdLst>
   <p:sldIdLst>
     <p:sldId id="256" r:id="rId2"/>
@@ -16,17 +16,20 @@
     <p:sldId id="295" r:id="rId4"/>
     <p:sldId id="302" r:id="rId5"/>
     <p:sldId id="303" r:id="rId6"/>
-    <p:sldId id="291" r:id="rId7"/>
-    <p:sldId id="296" r:id="rId8"/>
-    <p:sldId id="294" r:id="rId9"/>
-    <p:sldId id="299" r:id="rId10"/>
-    <p:sldId id="300" r:id="rId11"/>
-    <p:sldId id="301" r:id="rId12"/>
-    <p:sldId id="297" r:id="rId13"/>
-    <p:sldId id="290" r:id="rId14"/>
-    <p:sldId id="292" r:id="rId15"/>
-    <p:sldId id="298" r:id="rId16"/>
-    <p:sldId id="288" r:id="rId17"/>
+    <p:sldId id="305" r:id="rId7"/>
+    <p:sldId id="306" r:id="rId8"/>
+    <p:sldId id="291" r:id="rId9"/>
+    <p:sldId id="304" r:id="rId10"/>
+    <p:sldId id="296" r:id="rId11"/>
+    <p:sldId id="294" r:id="rId12"/>
+    <p:sldId id="299" r:id="rId13"/>
+    <p:sldId id="300" r:id="rId14"/>
+    <p:sldId id="301" r:id="rId15"/>
+    <p:sldId id="297" r:id="rId16"/>
+    <p:sldId id="290" r:id="rId17"/>
+    <p:sldId id="292" r:id="rId18"/>
+    <p:sldId id="298" r:id="rId19"/>
+    <p:sldId id="288" r:id="rId20"/>
   </p:sldIdLst>
   <p:sldSz cx="12192000" cy="6858000"/>
   <p:notesSz cx="12192000" cy="6858000"/>
@@ -817,7 +820,7 @@
           <a:p>
             <a:fld id="{8438F8DC-35B0-48E6-A86E-42F1F08DD00F}" type="datetimeFigureOut">
               <a:rPr lang="es-ES" smtClean="0"/>
-              <a:t>02/03/2026</a:t>
+              <a:t>09/03/2026</a:t>
             </a:fld>
             <a:endParaRPr lang="es-ES"/>
           </a:p>
@@ -994,7 +997,7 @@
           <a:p>
             <a:fld id="{FACBDC12-F39B-4B97-8F4D-6734F9D366FF}" type="datetimeFigureOut">
               <a:rPr lang="es-ES" smtClean="0"/>
-              <a:t>02/03/2026</a:t>
+              <a:t>09/03/2026</a:t>
             </a:fld>
             <a:endParaRPr lang="es-ES"/>
           </a:p>
@@ -1377,6 +1380,306 @@
         <p:cNvPr id="1" name="">
           <a:extLst>
             <a:ext uri="{FF2B5EF4-FFF2-40B4-BE49-F238E27FC236}">
+              <a16:creationId xmlns:a16="http://schemas.microsoft.com/office/drawing/2014/main" id="{6F918B0B-1527-F1CE-B7C6-3A4EEEE44FB1}"/>
+            </a:ext>
+          </a:extLst>
+        </p:cNvPr>
+        <p:cNvGrpSpPr/>
+        <p:nvPr/>
+      </p:nvGrpSpPr>
+      <p:grpSpPr>
+        <a:xfrm>
+          <a:off x="0" y="0"/>
+          <a:ext cx="0" cy="0"/>
+          <a:chOff x="0" y="0"/>
+          <a:chExt cx="0" cy="0"/>
+        </a:xfrm>
+      </p:grpSpPr>
+      <p:sp>
+        <p:nvSpPr>
+          <p:cNvPr id="2" name="Marcador de imagen de diapositiva 1">
+            <a:extLst>
+              <a:ext uri="{FF2B5EF4-FFF2-40B4-BE49-F238E27FC236}">
+                <a16:creationId xmlns:a16="http://schemas.microsoft.com/office/drawing/2014/main" id="{BD26890C-BFDE-EB57-C86A-5199A0D96212}"/>
+              </a:ext>
+            </a:extLst>
+          </p:cNvPr>
+          <p:cNvSpPr>
+            <a:spLocks noGrp="1" noRot="1" noChangeAspect="1"/>
+          </p:cNvSpPr>
+          <p:nvPr>
+            <p:ph type="sldImg"/>
+          </p:nvPr>
+        </p:nvSpPr>
+        <p:spPr/>
+      </p:sp>
+      <p:sp>
+        <p:nvSpPr>
+          <p:cNvPr id="3" name="Marcador de notas 2">
+            <a:extLst>
+              <a:ext uri="{FF2B5EF4-FFF2-40B4-BE49-F238E27FC236}">
+                <a16:creationId xmlns:a16="http://schemas.microsoft.com/office/drawing/2014/main" id="{2EEF1C62-7FB2-EC14-4109-CC2B3204CEBD}"/>
+              </a:ext>
+            </a:extLst>
+          </p:cNvPr>
+          <p:cNvSpPr>
+            <a:spLocks noGrp="1"/>
+          </p:cNvSpPr>
+          <p:nvPr>
+            <p:ph type="body" idx="1"/>
+          </p:nvPr>
+        </p:nvSpPr>
+        <p:spPr/>
+        <p:txBody>
+          <a:bodyPr/>
+          <a:lstStyle/>
+          <a:p>
+            <a:endParaRPr lang="es-ES" dirty="0"/>
+          </a:p>
+        </p:txBody>
+      </p:sp>
+      <p:sp>
+        <p:nvSpPr>
+          <p:cNvPr id="4" name="Marcador de número de diapositiva 3">
+            <a:extLst>
+              <a:ext uri="{FF2B5EF4-FFF2-40B4-BE49-F238E27FC236}">
+                <a16:creationId xmlns:a16="http://schemas.microsoft.com/office/drawing/2014/main" id="{388CFB6A-4B50-8F81-53B5-44C94D279BC8}"/>
+              </a:ext>
+            </a:extLst>
+          </p:cNvPr>
+          <p:cNvSpPr>
+            <a:spLocks noGrp="1"/>
+          </p:cNvSpPr>
+          <p:nvPr>
+            <p:ph type="sldNum" sz="quarter" idx="5"/>
+          </p:nvPr>
+        </p:nvSpPr>
+        <p:spPr/>
+        <p:txBody>
+          <a:bodyPr/>
+          <a:lstStyle/>
+          <a:p>
+            <a:fld id="{676223B9-C868-4436-87D9-1A3152E1157A}" type="slidenum">
+              <a:rPr lang="es-ES" smtClean="0"/>
+              <a:t>14</a:t>
+            </a:fld>
+            <a:endParaRPr lang="es-ES"/>
+          </a:p>
+        </p:txBody>
+      </p:sp>
+    </p:spTree>
+    <p:extLst>
+      <p:ext uri="{BB962C8B-B14F-4D97-AF65-F5344CB8AC3E}">
+        <p14:creationId xmlns:p14="http://schemas.microsoft.com/office/powerpoint/2010/main" val="915560842"/>
+      </p:ext>
+    </p:extLst>
+  </p:cSld>
+  <p:clrMapOvr>
+    <a:masterClrMapping/>
+  </p:clrMapOvr>
+</p:notes>
+</file>
+
+<file path=ppt/notesSlides/notesSlide11.xml><?xml version="1.0" encoding="utf-8"?>
+<p:notes xmlns:a="http://schemas.openxmlformats.org/drawingml/2006/main" xmlns:r="http://schemas.openxmlformats.org/officeDocument/2006/relationships" xmlns:p="http://schemas.openxmlformats.org/presentationml/2006/main">
+  <p:cSld>
+    <p:spTree>
+      <p:nvGrpSpPr>
+        <p:cNvPr id="1" name="">
+          <a:extLst>
+            <a:ext uri="{FF2B5EF4-FFF2-40B4-BE49-F238E27FC236}">
+              <a16:creationId xmlns:a16="http://schemas.microsoft.com/office/drawing/2014/main" id="{1AC9112F-7FB7-4F49-F4F6-C1D0DC6ADBEE}"/>
+            </a:ext>
+          </a:extLst>
+        </p:cNvPr>
+        <p:cNvGrpSpPr/>
+        <p:nvPr/>
+      </p:nvGrpSpPr>
+      <p:grpSpPr>
+        <a:xfrm>
+          <a:off x="0" y="0"/>
+          <a:ext cx="0" cy="0"/>
+          <a:chOff x="0" y="0"/>
+          <a:chExt cx="0" cy="0"/>
+        </a:xfrm>
+      </p:grpSpPr>
+      <p:sp>
+        <p:nvSpPr>
+          <p:cNvPr id="2" name="Marcador de imagen de diapositiva 1">
+            <a:extLst>
+              <a:ext uri="{FF2B5EF4-FFF2-40B4-BE49-F238E27FC236}">
+                <a16:creationId xmlns:a16="http://schemas.microsoft.com/office/drawing/2014/main" id="{5190F532-536D-B583-3561-FD0C56234D42}"/>
+              </a:ext>
+            </a:extLst>
+          </p:cNvPr>
+          <p:cNvSpPr>
+            <a:spLocks noGrp="1" noRot="1" noChangeAspect="1"/>
+          </p:cNvSpPr>
+          <p:nvPr>
+            <p:ph type="sldImg"/>
+          </p:nvPr>
+        </p:nvSpPr>
+        <p:spPr/>
+      </p:sp>
+      <p:sp>
+        <p:nvSpPr>
+          <p:cNvPr id="3" name="Marcador de notas 2">
+            <a:extLst>
+              <a:ext uri="{FF2B5EF4-FFF2-40B4-BE49-F238E27FC236}">
+                <a16:creationId xmlns:a16="http://schemas.microsoft.com/office/drawing/2014/main" id="{CC233B1A-142E-BC7B-FE19-6D22CE4082B2}"/>
+              </a:ext>
+            </a:extLst>
+          </p:cNvPr>
+          <p:cNvSpPr>
+            <a:spLocks noGrp="1"/>
+          </p:cNvSpPr>
+          <p:nvPr>
+            <p:ph type="body" idx="1"/>
+          </p:nvPr>
+        </p:nvSpPr>
+        <p:spPr/>
+        <p:txBody>
+          <a:bodyPr/>
+          <a:lstStyle/>
+          <a:p>
+            <a:endParaRPr lang="es-ES" dirty="0"/>
+          </a:p>
+        </p:txBody>
+      </p:sp>
+      <p:sp>
+        <p:nvSpPr>
+          <p:cNvPr id="4" name="Marcador de número de diapositiva 3">
+            <a:extLst>
+              <a:ext uri="{FF2B5EF4-FFF2-40B4-BE49-F238E27FC236}">
+                <a16:creationId xmlns:a16="http://schemas.microsoft.com/office/drawing/2014/main" id="{685087E6-8FC6-B2E3-2D74-B3C5168F5568}"/>
+              </a:ext>
+            </a:extLst>
+          </p:cNvPr>
+          <p:cNvSpPr>
+            <a:spLocks noGrp="1"/>
+          </p:cNvSpPr>
+          <p:nvPr>
+            <p:ph type="sldNum" sz="quarter" idx="5"/>
+          </p:nvPr>
+        </p:nvSpPr>
+        <p:spPr/>
+        <p:txBody>
+          <a:bodyPr/>
+          <a:lstStyle/>
+          <a:p>
+            <a:fld id="{676223B9-C868-4436-87D9-1A3152E1157A}" type="slidenum">
+              <a:rPr lang="es-ES" smtClean="0"/>
+              <a:t>15</a:t>
+            </a:fld>
+            <a:endParaRPr lang="es-ES"/>
+          </a:p>
+        </p:txBody>
+      </p:sp>
+    </p:spTree>
+    <p:extLst>
+      <p:ext uri="{BB962C8B-B14F-4D97-AF65-F5344CB8AC3E}">
+        <p14:creationId xmlns:p14="http://schemas.microsoft.com/office/powerpoint/2010/main" val="1581859005"/>
+      </p:ext>
+    </p:extLst>
+  </p:cSld>
+  <p:clrMapOvr>
+    <a:masterClrMapping/>
+  </p:clrMapOvr>
+</p:notes>
+</file>
+
+<file path=ppt/notesSlides/notesSlide12.xml><?xml version="1.0" encoding="utf-8"?>
+<p:notes xmlns:a="http://schemas.openxmlformats.org/drawingml/2006/main" xmlns:r="http://schemas.openxmlformats.org/officeDocument/2006/relationships" xmlns:p="http://schemas.openxmlformats.org/presentationml/2006/main">
+  <p:cSld>
+    <p:spTree>
+      <p:nvGrpSpPr>
+        <p:cNvPr id="1" name=""/>
+        <p:cNvGrpSpPr/>
+        <p:nvPr/>
+      </p:nvGrpSpPr>
+      <p:grpSpPr>
+        <a:xfrm>
+          <a:off x="0" y="0"/>
+          <a:ext cx="0" cy="0"/>
+          <a:chOff x="0" y="0"/>
+          <a:chExt cx="0" cy="0"/>
+        </a:xfrm>
+      </p:grpSpPr>
+      <p:sp>
+        <p:nvSpPr>
+          <p:cNvPr id="2" name="Marcador de imagen de diapositiva 1"/>
+          <p:cNvSpPr>
+            <a:spLocks noGrp="1" noRot="1" noChangeAspect="1"/>
+          </p:cNvSpPr>
+          <p:nvPr>
+            <p:ph type="sldImg"/>
+          </p:nvPr>
+        </p:nvSpPr>
+        <p:spPr/>
+      </p:sp>
+      <p:sp>
+        <p:nvSpPr>
+          <p:cNvPr id="3" name="Marcador de notas 2"/>
+          <p:cNvSpPr>
+            <a:spLocks noGrp="1"/>
+          </p:cNvSpPr>
+          <p:nvPr>
+            <p:ph type="body" idx="1"/>
+          </p:nvPr>
+        </p:nvSpPr>
+        <p:spPr/>
+        <p:txBody>
+          <a:bodyPr/>
+          <a:lstStyle/>
+          <a:p>
+            <a:endParaRPr lang="es-ES" dirty="0"/>
+          </a:p>
+        </p:txBody>
+      </p:sp>
+      <p:sp>
+        <p:nvSpPr>
+          <p:cNvPr id="4" name="Marcador de número de diapositiva 3"/>
+          <p:cNvSpPr>
+            <a:spLocks noGrp="1"/>
+          </p:cNvSpPr>
+          <p:nvPr>
+            <p:ph type="sldNum" sz="quarter" idx="5"/>
+          </p:nvPr>
+        </p:nvSpPr>
+        <p:spPr/>
+        <p:txBody>
+          <a:bodyPr/>
+          <a:lstStyle/>
+          <a:p>
+            <a:fld id="{676223B9-C868-4436-87D9-1A3152E1157A}" type="slidenum">
+              <a:rPr lang="es-ES" smtClean="0"/>
+              <a:t>16</a:t>
+            </a:fld>
+            <a:endParaRPr lang="es-ES"/>
+          </a:p>
+        </p:txBody>
+      </p:sp>
+    </p:spTree>
+    <p:extLst>
+      <p:ext uri="{BB962C8B-B14F-4D97-AF65-F5344CB8AC3E}">
+        <p14:creationId xmlns:p14="http://schemas.microsoft.com/office/powerpoint/2010/main" val="942232946"/>
+      </p:ext>
+    </p:extLst>
+  </p:cSld>
+  <p:clrMapOvr>
+    <a:masterClrMapping/>
+  </p:clrMapOvr>
+</p:notes>
+</file>
+
+<file path=ppt/notesSlides/notesSlide13.xml><?xml version="1.0" encoding="utf-8"?>
+<p:notes xmlns:a="http://schemas.openxmlformats.org/drawingml/2006/main" xmlns:r="http://schemas.openxmlformats.org/officeDocument/2006/relationships" xmlns:p="http://schemas.openxmlformats.org/presentationml/2006/main">
+  <p:cSld>
+    <p:spTree>
+      <p:nvGrpSpPr>
+        <p:cNvPr id="1" name="">
+          <a:extLst>
+            <a:ext uri="{FF2B5EF4-FFF2-40B4-BE49-F238E27FC236}">
               <a16:creationId xmlns:a16="http://schemas.microsoft.com/office/drawing/2014/main" id="{95993BBE-3704-D894-1C10-5488EE611F08}"/>
             </a:ext>
           </a:extLst>
@@ -1458,7 +1761,7 @@
           <a:p>
             <a:fld id="{676223B9-C868-4436-87D9-1A3152E1157A}" type="slidenum">
               <a:rPr lang="es-ES" smtClean="0"/>
-              <a:t>14</a:t>
+              <a:t>17</a:t>
             </a:fld>
             <a:endParaRPr lang="es-ES"/>
           </a:p>
@@ -1477,7 +1780,7 @@
 </p:notes>
 </file>
 
-<file path=ppt/notesSlides/notesSlide11.xml><?xml version="1.0" encoding="utf-8"?>
+<file path=ppt/notesSlides/notesSlide14.xml><?xml version="1.0" encoding="utf-8"?>
 <p:notes xmlns:a="http://schemas.openxmlformats.org/drawingml/2006/main" xmlns:r="http://schemas.openxmlformats.org/officeDocument/2006/relationships" xmlns:p="http://schemas.openxmlformats.org/presentationml/2006/main">
   <p:cSld>
     <p:spTree>
@@ -1566,7 +1869,7 @@
           <a:p>
             <a:fld id="{676223B9-C868-4436-87D9-1A3152E1157A}" type="slidenum">
               <a:rPr lang="es-ES" smtClean="0"/>
-              <a:t>15</a:t>
+              <a:t>18</a:t>
             </a:fld>
             <a:endParaRPr lang="es-ES"/>
           </a:p>
@@ -1701,6 +2004,222 @@
         <p:cNvPr id="1" name="">
           <a:extLst>
             <a:ext uri="{FF2B5EF4-FFF2-40B4-BE49-F238E27FC236}">
+              <a16:creationId xmlns:a16="http://schemas.microsoft.com/office/drawing/2014/main" id="{BC7916C8-5B29-7D3D-F8FD-EAA14A5029B6}"/>
+            </a:ext>
+          </a:extLst>
+        </p:cNvPr>
+        <p:cNvGrpSpPr/>
+        <p:nvPr/>
+      </p:nvGrpSpPr>
+      <p:grpSpPr>
+        <a:xfrm>
+          <a:off x="0" y="0"/>
+          <a:ext cx="0" cy="0"/>
+          <a:chOff x="0" y="0"/>
+          <a:chExt cx="0" cy="0"/>
+        </a:xfrm>
+      </p:grpSpPr>
+      <p:sp>
+        <p:nvSpPr>
+          <p:cNvPr id="2" name="Marcador de imagen de diapositiva 1">
+            <a:extLst>
+              <a:ext uri="{FF2B5EF4-FFF2-40B4-BE49-F238E27FC236}">
+                <a16:creationId xmlns:a16="http://schemas.microsoft.com/office/drawing/2014/main" id="{1092C7B2-D1CF-685C-0FE2-86D02C0252F0}"/>
+              </a:ext>
+            </a:extLst>
+          </p:cNvPr>
+          <p:cNvSpPr>
+            <a:spLocks noGrp="1" noRot="1" noChangeAspect="1"/>
+          </p:cNvSpPr>
+          <p:nvPr>
+            <p:ph type="sldImg"/>
+          </p:nvPr>
+        </p:nvSpPr>
+        <p:spPr/>
+      </p:sp>
+      <p:sp>
+        <p:nvSpPr>
+          <p:cNvPr id="3" name="Marcador de notas 2">
+            <a:extLst>
+              <a:ext uri="{FF2B5EF4-FFF2-40B4-BE49-F238E27FC236}">
+                <a16:creationId xmlns:a16="http://schemas.microsoft.com/office/drawing/2014/main" id="{03B982F2-AB38-0F46-30D8-5E6F3AEC9798}"/>
+              </a:ext>
+            </a:extLst>
+          </p:cNvPr>
+          <p:cNvSpPr>
+            <a:spLocks noGrp="1"/>
+          </p:cNvSpPr>
+          <p:nvPr>
+            <p:ph type="body" idx="1"/>
+          </p:nvPr>
+        </p:nvSpPr>
+        <p:spPr/>
+        <p:txBody>
+          <a:bodyPr/>
+          <a:lstStyle/>
+          <a:p>
+            <a:endParaRPr lang="es-ES" dirty="0"/>
+          </a:p>
+        </p:txBody>
+      </p:sp>
+      <p:sp>
+        <p:nvSpPr>
+          <p:cNvPr id="4" name="Marcador de número de diapositiva 3">
+            <a:extLst>
+              <a:ext uri="{FF2B5EF4-FFF2-40B4-BE49-F238E27FC236}">
+                <a16:creationId xmlns:a16="http://schemas.microsoft.com/office/drawing/2014/main" id="{EA8D9170-8E50-5136-6BF9-5D7D0FFB54DB}"/>
+              </a:ext>
+            </a:extLst>
+          </p:cNvPr>
+          <p:cNvSpPr>
+            <a:spLocks noGrp="1"/>
+          </p:cNvSpPr>
+          <p:nvPr>
+            <p:ph type="sldNum" sz="quarter" idx="5"/>
+          </p:nvPr>
+        </p:nvSpPr>
+        <p:spPr/>
+        <p:txBody>
+          <a:bodyPr/>
+          <a:lstStyle/>
+          <a:p>
+            <a:fld id="{676223B9-C868-4436-87D9-1A3152E1157A}" type="slidenum">
+              <a:rPr lang="es-ES" smtClean="0"/>
+              <a:t>6</a:t>
+            </a:fld>
+            <a:endParaRPr lang="es-ES"/>
+          </a:p>
+        </p:txBody>
+      </p:sp>
+    </p:spTree>
+    <p:extLst>
+      <p:ext uri="{BB962C8B-B14F-4D97-AF65-F5344CB8AC3E}">
+        <p14:creationId xmlns:p14="http://schemas.microsoft.com/office/powerpoint/2010/main" val="2826699257"/>
+      </p:ext>
+    </p:extLst>
+  </p:cSld>
+  <p:clrMapOvr>
+    <a:masterClrMapping/>
+  </p:clrMapOvr>
+</p:notes>
+</file>
+
+<file path=ppt/notesSlides/notesSlide4.xml><?xml version="1.0" encoding="utf-8"?>
+<p:notes xmlns:a="http://schemas.openxmlformats.org/drawingml/2006/main" xmlns:r="http://schemas.openxmlformats.org/officeDocument/2006/relationships" xmlns:p="http://schemas.openxmlformats.org/presentationml/2006/main">
+  <p:cSld>
+    <p:spTree>
+      <p:nvGrpSpPr>
+        <p:cNvPr id="1" name="">
+          <a:extLst>
+            <a:ext uri="{FF2B5EF4-FFF2-40B4-BE49-F238E27FC236}">
+              <a16:creationId xmlns:a16="http://schemas.microsoft.com/office/drawing/2014/main" id="{ECE5433C-0147-2981-F821-D670A13241DE}"/>
+            </a:ext>
+          </a:extLst>
+        </p:cNvPr>
+        <p:cNvGrpSpPr/>
+        <p:nvPr/>
+      </p:nvGrpSpPr>
+      <p:grpSpPr>
+        <a:xfrm>
+          <a:off x="0" y="0"/>
+          <a:ext cx="0" cy="0"/>
+          <a:chOff x="0" y="0"/>
+          <a:chExt cx="0" cy="0"/>
+        </a:xfrm>
+      </p:grpSpPr>
+      <p:sp>
+        <p:nvSpPr>
+          <p:cNvPr id="2" name="Marcador de imagen de diapositiva 1">
+            <a:extLst>
+              <a:ext uri="{FF2B5EF4-FFF2-40B4-BE49-F238E27FC236}">
+                <a16:creationId xmlns:a16="http://schemas.microsoft.com/office/drawing/2014/main" id="{10E2EDD1-57BF-F66C-9963-0621E0F545D2}"/>
+              </a:ext>
+            </a:extLst>
+          </p:cNvPr>
+          <p:cNvSpPr>
+            <a:spLocks noGrp="1" noRot="1" noChangeAspect="1"/>
+          </p:cNvSpPr>
+          <p:nvPr>
+            <p:ph type="sldImg"/>
+          </p:nvPr>
+        </p:nvSpPr>
+        <p:spPr/>
+      </p:sp>
+      <p:sp>
+        <p:nvSpPr>
+          <p:cNvPr id="3" name="Marcador de notas 2">
+            <a:extLst>
+              <a:ext uri="{FF2B5EF4-FFF2-40B4-BE49-F238E27FC236}">
+                <a16:creationId xmlns:a16="http://schemas.microsoft.com/office/drawing/2014/main" id="{32B7737E-5482-C9D4-C181-040CBD422511}"/>
+              </a:ext>
+            </a:extLst>
+          </p:cNvPr>
+          <p:cNvSpPr>
+            <a:spLocks noGrp="1"/>
+          </p:cNvSpPr>
+          <p:nvPr>
+            <p:ph type="body" idx="1"/>
+          </p:nvPr>
+        </p:nvSpPr>
+        <p:spPr/>
+        <p:txBody>
+          <a:bodyPr/>
+          <a:lstStyle/>
+          <a:p>
+            <a:endParaRPr lang="es-ES" dirty="0"/>
+          </a:p>
+        </p:txBody>
+      </p:sp>
+      <p:sp>
+        <p:nvSpPr>
+          <p:cNvPr id="4" name="Marcador de número de diapositiva 3">
+            <a:extLst>
+              <a:ext uri="{FF2B5EF4-FFF2-40B4-BE49-F238E27FC236}">
+                <a16:creationId xmlns:a16="http://schemas.microsoft.com/office/drawing/2014/main" id="{1A079DA3-DC8C-4F3F-105A-2DB67FE9AD60}"/>
+              </a:ext>
+            </a:extLst>
+          </p:cNvPr>
+          <p:cNvSpPr>
+            <a:spLocks noGrp="1"/>
+          </p:cNvSpPr>
+          <p:nvPr>
+            <p:ph type="sldNum" sz="quarter" idx="5"/>
+          </p:nvPr>
+        </p:nvSpPr>
+        <p:spPr/>
+        <p:txBody>
+          <a:bodyPr/>
+          <a:lstStyle/>
+          <a:p>
+            <a:fld id="{676223B9-C868-4436-87D9-1A3152E1157A}" type="slidenum">
+              <a:rPr lang="es-ES" smtClean="0"/>
+              <a:t>7</a:t>
+            </a:fld>
+            <a:endParaRPr lang="es-ES"/>
+          </a:p>
+        </p:txBody>
+      </p:sp>
+    </p:spTree>
+    <p:extLst>
+      <p:ext uri="{BB962C8B-B14F-4D97-AF65-F5344CB8AC3E}">
+        <p14:creationId xmlns:p14="http://schemas.microsoft.com/office/powerpoint/2010/main" val="2006142712"/>
+      </p:ext>
+    </p:extLst>
+  </p:cSld>
+  <p:clrMapOvr>
+    <a:masterClrMapping/>
+  </p:clrMapOvr>
+</p:notes>
+</file>
+
+<file path=ppt/notesSlides/notesSlide5.xml><?xml version="1.0" encoding="utf-8"?>
+<p:notes xmlns:a="http://schemas.openxmlformats.org/drawingml/2006/main" xmlns:r="http://schemas.openxmlformats.org/officeDocument/2006/relationships" xmlns:p="http://schemas.openxmlformats.org/presentationml/2006/main">
+  <p:cSld>
+    <p:spTree>
+      <p:nvGrpSpPr>
+        <p:cNvPr id="1" name="">
+          <a:extLst>
+            <a:ext uri="{FF2B5EF4-FFF2-40B4-BE49-F238E27FC236}">
               <a16:creationId xmlns:a16="http://schemas.microsoft.com/office/drawing/2014/main" id="{4E3C5711-C157-AA5E-1EA1-9F4C3F40B90E}"/>
             </a:ext>
           </a:extLst>
@@ -1782,7 +2301,7 @@
           <a:p>
             <a:fld id="{676223B9-C868-4436-87D9-1A3152E1157A}" type="slidenum">
               <a:rPr lang="es-ES" smtClean="0"/>
-              <a:t>6</a:t>
+              <a:t>8</a:t>
             </a:fld>
             <a:endParaRPr lang="es-ES"/>
           </a:p>
@@ -1801,7 +2320,115 @@
 </p:notes>
 </file>
 
-<file path=ppt/notesSlides/notesSlide4.xml><?xml version="1.0" encoding="utf-8"?>
+<file path=ppt/notesSlides/notesSlide6.xml><?xml version="1.0" encoding="utf-8"?>
+<p:notes xmlns:a="http://schemas.openxmlformats.org/drawingml/2006/main" xmlns:r="http://schemas.openxmlformats.org/officeDocument/2006/relationships" xmlns:p="http://schemas.openxmlformats.org/presentationml/2006/main">
+  <p:cSld>
+    <p:spTree>
+      <p:nvGrpSpPr>
+        <p:cNvPr id="1" name="">
+          <a:extLst>
+            <a:ext uri="{FF2B5EF4-FFF2-40B4-BE49-F238E27FC236}">
+              <a16:creationId xmlns:a16="http://schemas.microsoft.com/office/drawing/2014/main" id="{B8813AB0-266F-DF08-D919-B88FFCEB1358}"/>
+            </a:ext>
+          </a:extLst>
+        </p:cNvPr>
+        <p:cNvGrpSpPr/>
+        <p:nvPr/>
+      </p:nvGrpSpPr>
+      <p:grpSpPr>
+        <a:xfrm>
+          <a:off x="0" y="0"/>
+          <a:ext cx="0" cy="0"/>
+          <a:chOff x="0" y="0"/>
+          <a:chExt cx="0" cy="0"/>
+        </a:xfrm>
+      </p:grpSpPr>
+      <p:sp>
+        <p:nvSpPr>
+          <p:cNvPr id="2" name="Marcador de imagen de diapositiva 1">
+            <a:extLst>
+              <a:ext uri="{FF2B5EF4-FFF2-40B4-BE49-F238E27FC236}">
+                <a16:creationId xmlns:a16="http://schemas.microsoft.com/office/drawing/2014/main" id="{14037761-C3AA-DFD2-0719-F39A1F484D42}"/>
+              </a:ext>
+            </a:extLst>
+          </p:cNvPr>
+          <p:cNvSpPr>
+            <a:spLocks noGrp="1" noRot="1" noChangeAspect="1"/>
+          </p:cNvSpPr>
+          <p:nvPr>
+            <p:ph type="sldImg"/>
+          </p:nvPr>
+        </p:nvSpPr>
+        <p:spPr/>
+      </p:sp>
+      <p:sp>
+        <p:nvSpPr>
+          <p:cNvPr id="3" name="Marcador de notas 2">
+            <a:extLst>
+              <a:ext uri="{FF2B5EF4-FFF2-40B4-BE49-F238E27FC236}">
+                <a16:creationId xmlns:a16="http://schemas.microsoft.com/office/drawing/2014/main" id="{D79C8F57-8A24-8145-69AC-9C54F5967A77}"/>
+              </a:ext>
+            </a:extLst>
+          </p:cNvPr>
+          <p:cNvSpPr>
+            <a:spLocks noGrp="1"/>
+          </p:cNvSpPr>
+          <p:nvPr>
+            <p:ph type="body" idx="1"/>
+          </p:nvPr>
+        </p:nvSpPr>
+        <p:spPr/>
+        <p:txBody>
+          <a:bodyPr/>
+          <a:lstStyle/>
+          <a:p>
+            <a:endParaRPr lang="es-ES" dirty="0"/>
+          </a:p>
+        </p:txBody>
+      </p:sp>
+      <p:sp>
+        <p:nvSpPr>
+          <p:cNvPr id="4" name="Marcador de número de diapositiva 3">
+            <a:extLst>
+              <a:ext uri="{FF2B5EF4-FFF2-40B4-BE49-F238E27FC236}">
+                <a16:creationId xmlns:a16="http://schemas.microsoft.com/office/drawing/2014/main" id="{30D72B7F-C26E-4235-15AE-A706CA7D10CB}"/>
+              </a:ext>
+            </a:extLst>
+          </p:cNvPr>
+          <p:cNvSpPr>
+            <a:spLocks noGrp="1"/>
+          </p:cNvSpPr>
+          <p:nvPr>
+            <p:ph type="sldNum" sz="quarter" idx="5"/>
+          </p:nvPr>
+        </p:nvSpPr>
+        <p:spPr/>
+        <p:txBody>
+          <a:bodyPr/>
+          <a:lstStyle/>
+          <a:p>
+            <a:fld id="{676223B9-C868-4436-87D9-1A3152E1157A}" type="slidenum">
+              <a:rPr lang="es-ES" smtClean="0"/>
+              <a:t>9</a:t>
+            </a:fld>
+            <a:endParaRPr lang="es-ES"/>
+          </a:p>
+        </p:txBody>
+      </p:sp>
+    </p:spTree>
+    <p:extLst>
+      <p:ext uri="{BB962C8B-B14F-4D97-AF65-F5344CB8AC3E}">
+        <p14:creationId xmlns:p14="http://schemas.microsoft.com/office/powerpoint/2010/main" val="1060674410"/>
+      </p:ext>
+    </p:extLst>
+  </p:cSld>
+  <p:clrMapOvr>
+    <a:masterClrMapping/>
+  </p:clrMapOvr>
+</p:notes>
+</file>
+
+<file path=ppt/notesSlides/notesSlide7.xml><?xml version="1.0" encoding="utf-8"?>
 <p:notes xmlns:a="http://schemas.openxmlformats.org/drawingml/2006/main" xmlns:r="http://schemas.openxmlformats.org/officeDocument/2006/relationships" xmlns:p="http://schemas.openxmlformats.org/presentationml/2006/main">
   <p:cSld>
     <p:spTree>
@@ -1890,7 +2517,7 @@
           <a:p>
             <a:fld id="{676223B9-C868-4436-87D9-1A3152E1157A}" type="slidenum">
               <a:rPr lang="es-ES" smtClean="0"/>
-              <a:t>8</a:t>
+              <a:t>11</a:t>
             </a:fld>
             <a:endParaRPr lang="es-ES"/>
           </a:p>
@@ -1909,7 +2536,7 @@
 </p:notes>
 </file>
 
-<file path=ppt/notesSlides/notesSlide5.xml><?xml version="1.0" encoding="utf-8"?>
+<file path=ppt/notesSlides/notesSlide8.xml><?xml version="1.0" encoding="utf-8"?>
 <p:notes xmlns:a="http://schemas.openxmlformats.org/drawingml/2006/main" xmlns:r="http://schemas.openxmlformats.org/officeDocument/2006/relationships" xmlns:p="http://schemas.openxmlformats.org/presentationml/2006/main">
   <p:cSld>
     <p:spTree>
@@ -1998,7 +2625,7 @@
           <a:p>
             <a:fld id="{676223B9-C868-4436-87D9-1A3152E1157A}" type="slidenum">
               <a:rPr lang="es-ES" smtClean="0"/>
-              <a:t>9</a:t>
+              <a:t>12</a:t>
             </a:fld>
             <a:endParaRPr lang="es-ES"/>
           </a:p>
@@ -2017,7 +2644,7 @@
 </p:notes>
 </file>
 
-<file path=ppt/notesSlides/notesSlide6.xml><?xml version="1.0" encoding="utf-8"?>
+<file path=ppt/notesSlides/notesSlide9.xml><?xml version="1.0" encoding="utf-8"?>
 <p:notes xmlns:a="http://schemas.openxmlformats.org/drawingml/2006/main" xmlns:r="http://schemas.openxmlformats.org/officeDocument/2006/relationships" xmlns:p="http://schemas.openxmlformats.org/presentationml/2006/main">
   <p:cSld>
     <p:spTree>
@@ -2106,7 +2733,7 @@
           <a:p>
             <a:fld id="{676223B9-C868-4436-87D9-1A3152E1157A}" type="slidenum">
               <a:rPr lang="es-ES" smtClean="0"/>
-              <a:t>10</a:t>
+              <a:t>13</a:t>
             </a:fld>
             <a:endParaRPr lang="es-ES"/>
           </a:p>
@@ -2116,306 +2743,6 @@
     <p:extLst>
       <p:ext uri="{BB962C8B-B14F-4D97-AF65-F5344CB8AC3E}">
         <p14:creationId xmlns:p14="http://schemas.microsoft.com/office/powerpoint/2010/main" val="714953061"/>
-      </p:ext>
-    </p:extLst>
-  </p:cSld>
-  <p:clrMapOvr>
-    <a:masterClrMapping/>
-  </p:clrMapOvr>
-</p:notes>
-</file>
-
-<file path=ppt/notesSlides/notesSlide7.xml><?xml version="1.0" encoding="utf-8"?>
-<p:notes xmlns:a="http://schemas.openxmlformats.org/drawingml/2006/main" xmlns:r="http://schemas.openxmlformats.org/officeDocument/2006/relationships" xmlns:p="http://schemas.openxmlformats.org/presentationml/2006/main">
-  <p:cSld>
-    <p:spTree>
-      <p:nvGrpSpPr>
-        <p:cNvPr id="1" name="">
-          <a:extLst>
-            <a:ext uri="{FF2B5EF4-FFF2-40B4-BE49-F238E27FC236}">
-              <a16:creationId xmlns:a16="http://schemas.microsoft.com/office/drawing/2014/main" id="{6F918B0B-1527-F1CE-B7C6-3A4EEEE44FB1}"/>
-            </a:ext>
-          </a:extLst>
-        </p:cNvPr>
-        <p:cNvGrpSpPr/>
-        <p:nvPr/>
-      </p:nvGrpSpPr>
-      <p:grpSpPr>
-        <a:xfrm>
-          <a:off x="0" y="0"/>
-          <a:ext cx="0" cy="0"/>
-          <a:chOff x="0" y="0"/>
-          <a:chExt cx="0" cy="0"/>
-        </a:xfrm>
-      </p:grpSpPr>
-      <p:sp>
-        <p:nvSpPr>
-          <p:cNvPr id="2" name="Marcador de imagen de diapositiva 1">
-            <a:extLst>
-              <a:ext uri="{FF2B5EF4-FFF2-40B4-BE49-F238E27FC236}">
-                <a16:creationId xmlns:a16="http://schemas.microsoft.com/office/drawing/2014/main" id="{BD26890C-BFDE-EB57-C86A-5199A0D96212}"/>
-              </a:ext>
-            </a:extLst>
-          </p:cNvPr>
-          <p:cNvSpPr>
-            <a:spLocks noGrp="1" noRot="1" noChangeAspect="1"/>
-          </p:cNvSpPr>
-          <p:nvPr>
-            <p:ph type="sldImg"/>
-          </p:nvPr>
-        </p:nvSpPr>
-        <p:spPr/>
-      </p:sp>
-      <p:sp>
-        <p:nvSpPr>
-          <p:cNvPr id="3" name="Marcador de notas 2">
-            <a:extLst>
-              <a:ext uri="{FF2B5EF4-FFF2-40B4-BE49-F238E27FC236}">
-                <a16:creationId xmlns:a16="http://schemas.microsoft.com/office/drawing/2014/main" id="{2EEF1C62-7FB2-EC14-4109-CC2B3204CEBD}"/>
-              </a:ext>
-            </a:extLst>
-          </p:cNvPr>
-          <p:cNvSpPr>
-            <a:spLocks noGrp="1"/>
-          </p:cNvSpPr>
-          <p:nvPr>
-            <p:ph type="body" idx="1"/>
-          </p:nvPr>
-        </p:nvSpPr>
-        <p:spPr/>
-        <p:txBody>
-          <a:bodyPr/>
-          <a:lstStyle/>
-          <a:p>
-            <a:endParaRPr lang="es-ES" dirty="0"/>
-          </a:p>
-        </p:txBody>
-      </p:sp>
-      <p:sp>
-        <p:nvSpPr>
-          <p:cNvPr id="4" name="Marcador de número de diapositiva 3">
-            <a:extLst>
-              <a:ext uri="{FF2B5EF4-FFF2-40B4-BE49-F238E27FC236}">
-                <a16:creationId xmlns:a16="http://schemas.microsoft.com/office/drawing/2014/main" id="{388CFB6A-4B50-8F81-53B5-44C94D279BC8}"/>
-              </a:ext>
-            </a:extLst>
-          </p:cNvPr>
-          <p:cNvSpPr>
-            <a:spLocks noGrp="1"/>
-          </p:cNvSpPr>
-          <p:nvPr>
-            <p:ph type="sldNum" sz="quarter" idx="5"/>
-          </p:nvPr>
-        </p:nvSpPr>
-        <p:spPr/>
-        <p:txBody>
-          <a:bodyPr/>
-          <a:lstStyle/>
-          <a:p>
-            <a:fld id="{676223B9-C868-4436-87D9-1A3152E1157A}" type="slidenum">
-              <a:rPr lang="es-ES" smtClean="0"/>
-              <a:t>11</a:t>
-            </a:fld>
-            <a:endParaRPr lang="es-ES"/>
-          </a:p>
-        </p:txBody>
-      </p:sp>
-    </p:spTree>
-    <p:extLst>
-      <p:ext uri="{BB962C8B-B14F-4D97-AF65-F5344CB8AC3E}">
-        <p14:creationId xmlns:p14="http://schemas.microsoft.com/office/powerpoint/2010/main" val="915560842"/>
-      </p:ext>
-    </p:extLst>
-  </p:cSld>
-  <p:clrMapOvr>
-    <a:masterClrMapping/>
-  </p:clrMapOvr>
-</p:notes>
-</file>
-
-<file path=ppt/notesSlides/notesSlide8.xml><?xml version="1.0" encoding="utf-8"?>
-<p:notes xmlns:a="http://schemas.openxmlformats.org/drawingml/2006/main" xmlns:r="http://schemas.openxmlformats.org/officeDocument/2006/relationships" xmlns:p="http://schemas.openxmlformats.org/presentationml/2006/main">
-  <p:cSld>
-    <p:spTree>
-      <p:nvGrpSpPr>
-        <p:cNvPr id="1" name="">
-          <a:extLst>
-            <a:ext uri="{FF2B5EF4-FFF2-40B4-BE49-F238E27FC236}">
-              <a16:creationId xmlns:a16="http://schemas.microsoft.com/office/drawing/2014/main" id="{1AC9112F-7FB7-4F49-F4F6-C1D0DC6ADBEE}"/>
-            </a:ext>
-          </a:extLst>
-        </p:cNvPr>
-        <p:cNvGrpSpPr/>
-        <p:nvPr/>
-      </p:nvGrpSpPr>
-      <p:grpSpPr>
-        <a:xfrm>
-          <a:off x="0" y="0"/>
-          <a:ext cx="0" cy="0"/>
-          <a:chOff x="0" y="0"/>
-          <a:chExt cx="0" cy="0"/>
-        </a:xfrm>
-      </p:grpSpPr>
-      <p:sp>
-        <p:nvSpPr>
-          <p:cNvPr id="2" name="Marcador de imagen de diapositiva 1">
-            <a:extLst>
-              <a:ext uri="{FF2B5EF4-FFF2-40B4-BE49-F238E27FC236}">
-                <a16:creationId xmlns:a16="http://schemas.microsoft.com/office/drawing/2014/main" id="{5190F532-536D-B583-3561-FD0C56234D42}"/>
-              </a:ext>
-            </a:extLst>
-          </p:cNvPr>
-          <p:cNvSpPr>
-            <a:spLocks noGrp="1" noRot="1" noChangeAspect="1"/>
-          </p:cNvSpPr>
-          <p:nvPr>
-            <p:ph type="sldImg"/>
-          </p:nvPr>
-        </p:nvSpPr>
-        <p:spPr/>
-      </p:sp>
-      <p:sp>
-        <p:nvSpPr>
-          <p:cNvPr id="3" name="Marcador de notas 2">
-            <a:extLst>
-              <a:ext uri="{FF2B5EF4-FFF2-40B4-BE49-F238E27FC236}">
-                <a16:creationId xmlns:a16="http://schemas.microsoft.com/office/drawing/2014/main" id="{CC233B1A-142E-BC7B-FE19-6D22CE4082B2}"/>
-              </a:ext>
-            </a:extLst>
-          </p:cNvPr>
-          <p:cNvSpPr>
-            <a:spLocks noGrp="1"/>
-          </p:cNvSpPr>
-          <p:nvPr>
-            <p:ph type="body" idx="1"/>
-          </p:nvPr>
-        </p:nvSpPr>
-        <p:spPr/>
-        <p:txBody>
-          <a:bodyPr/>
-          <a:lstStyle/>
-          <a:p>
-            <a:endParaRPr lang="es-ES" dirty="0"/>
-          </a:p>
-        </p:txBody>
-      </p:sp>
-      <p:sp>
-        <p:nvSpPr>
-          <p:cNvPr id="4" name="Marcador de número de diapositiva 3">
-            <a:extLst>
-              <a:ext uri="{FF2B5EF4-FFF2-40B4-BE49-F238E27FC236}">
-                <a16:creationId xmlns:a16="http://schemas.microsoft.com/office/drawing/2014/main" id="{685087E6-8FC6-B2E3-2D74-B3C5168F5568}"/>
-              </a:ext>
-            </a:extLst>
-          </p:cNvPr>
-          <p:cNvSpPr>
-            <a:spLocks noGrp="1"/>
-          </p:cNvSpPr>
-          <p:nvPr>
-            <p:ph type="sldNum" sz="quarter" idx="5"/>
-          </p:nvPr>
-        </p:nvSpPr>
-        <p:spPr/>
-        <p:txBody>
-          <a:bodyPr/>
-          <a:lstStyle/>
-          <a:p>
-            <a:fld id="{676223B9-C868-4436-87D9-1A3152E1157A}" type="slidenum">
-              <a:rPr lang="es-ES" smtClean="0"/>
-              <a:t>12</a:t>
-            </a:fld>
-            <a:endParaRPr lang="es-ES"/>
-          </a:p>
-        </p:txBody>
-      </p:sp>
-    </p:spTree>
-    <p:extLst>
-      <p:ext uri="{BB962C8B-B14F-4D97-AF65-F5344CB8AC3E}">
-        <p14:creationId xmlns:p14="http://schemas.microsoft.com/office/powerpoint/2010/main" val="1581859005"/>
-      </p:ext>
-    </p:extLst>
-  </p:cSld>
-  <p:clrMapOvr>
-    <a:masterClrMapping/>
-  </p:clrMapOvr>
-</p:notes>
-</file>
-
-<file path=ppt/notesSlides/notesSlide9.xml><?xml version="1.0" encoding="utf-8"?>
-<p:notes xmlns:a="http://schemas.openxmlformats.org/drawingml/2006/main" xmlns:r="http://schemas.openxmlformats.org/officeDocument/2006/relationships" xmlns:p="http://schemas.openxmlformats.org/presentationml/2006/main">
-  <p:cSld>
-    <p:spTree>
-      <p:nvGrpSpPr>
-        <p:cNvPr id="1" name=""/>
-        <p:cNvGrpSpPr/>
-        <p:nvPr/>
-      </p:nvGrpSpPr>
-      <p:grpSpPr>
-        <a:xfrm>
-          <a:off x="0" y="0"/>
-          <a:ext cx="0" cy="0"/>
-          <a:chOff x="0" y="0"/>
-          <a:chExt cx="0" cy="0"/>
-        </a:xfrm>
-      </p:grpSpPr>
-      <p:sp>
-        <p:nvSpPr>
-          <p:cNvPr id="2" name="Marcador de imagen de diapositiva 1"/>
-          <p:cNvSpPr>
-            <a:spLocks noGrp="1" noRot="1" noChangeAspect="1"/>
-          </p:cNvSpPr>
-          <p:nvPr>
-            <p:ph type="sldImg"/>
-          </p:nvPr>
-        </p:nvSpPr>
-        <p:spPr/>
-      </p:sp>
-      <p:sp>
-        <p:nvSpPr>
-          <p:cNvPr id="3" name="Marcador de notas 2"/>
-          <p:cNvSpPr>
-            <a:spLocks noGrp="1"/>
-          </p:cNvSpPr>
-          <p:nvPr>
-            <p:ph type="body" idx="1"/>
-          </p:nvPr>
-        </p:nvSpPr>
-        <p:spPr/>
-        <p:txBody>
-          <a:bodyPr/>
-          <a:lstStyle/>
-          <a:p>
-            <a:endParaRPr lang="es-ES" dirty="0"/>
-          </a:p>
-        </p:txBody>
-      </p:sp>
-      <p:sp>
-        <p:nvSpPr>
-          <p:cNvPr id="4" name="Marcador de número de diapositiva 3"/>
-          <p:cNvSpPr>
-            <a:spLocks noGrp="1"/>
-          </p:cNvSpPr>
-          <p:nvPr>
-            <p:ph type="sldNum" sz="quarter" idx="5"/>
-          </p:nvPr>
-        </p:nvSpPr>
-        <p:spPr/>
-        <p:txBody>
-          <a:bodyPr/>
-          <a:lstStyle/>
-          <a:p>
-            <a:fld id="{676223B9-C868-4436-87D9-1A3152E1157A}" type="slidenum">
-              <a:rPr lang="es-ES" smtClean="0"/>
-              <a:t>13</a:t>
-            </a:fld>
-            <a:endParaRPr lang="es-ES"/>
-          </a:p>
-        </p:txBody>
-      </p:sp>
-    </p:spTree>
-    <p:extLst>
-      <p:ext uri="{BB962C8B-B14F-4D97-AF65-F5344CB8AC3E}">
-        <p14:creationId xmlns:p14="http://schemas.microsoft.com/office/powerpoint/2010/main" val="942232946"/>
       </p:ext>
     </p:extLst>
   </p:cSld>
@@ -4025,7 +4352,7 @@
         <p:cNvPr id="1" name="">
           <a:extLst>
             <a:ext uri="{FF2B5EF4-FFF2-40B4-BE49-F238E27FC236}">
-              <a16:creationId xmlns:a16="http://schemas.microsoft.com/office/drawing/2014/main" id="{F32A9819-E058-DC4F-FB99-88F20442D9F4}"/>
+              <a16:creationId xmlns:a16="http://schemas.microsoft.com/office/drawing/2014/main" id="{E43D4982-2E99-3EE0-CEBE-CEF54821C335}"/>
             </a:ext>
           </a:extLst>
         </p:cNvPr>
@@ -4042,10 +4369,151 @@
       </p:grpSpPr>
       <p:sp>
         <p:nvSpPr>
+          <p:cNvPr id="4" name="Marcador de pie de página 3">
+            <a:extLst>
+              <a:ext uri="{FF2B5EF4-FFF2-40B4-BE49-F238E27FC236}">
+                <a16:creationId xmlns:a16="http://schemas.microsoft.com/office/drawing/2014/main" id="{A60D29C4-F13C-8947-EF1D-2CBDDD14AC5C}"/>
+              </a:ext>
+            </a:extLst>
+          </p:cNvPr>
+          <p:cNvSpPr>
+            <a:spLocks noGrp="1"/>
+          </p:cNvSpPr>
+          <p:nvPr>
+            <p:ph type="ftr" sz="quarter" idx="5"/>
+          </p:nvPr>
+        </p:nvSpPr>
+        <p:spPr/>
+        <p:txBody>
+          <a:bodyPr/>
+          <a:lstStyle/>
+          <a:p>
+            <a:pPr marL="12700">
+              <a:spcBef>
+                <a:spcPts val="15"/>
+              </a:spcBef>
+            </a:pPr>
+            <a:r>
+              <a:rPr lang="es-ES" spc="-5"/>
+              <a:t>LAB 2.0. COUPLERS</a:t>
+            </a:r>
+            <a:endParaRPr lang="es-ES" spc="-5" dirty="0"/>
+          </a:p>
+        </p:txBody>
+      </p:sp>
+      <p:sp>
+        <p:nvSpPr>
+          <p:cNvPr id="5" name="Marcador de número de diapositiva 4">
+            <a:extLst>
+              <a:ext uri="{FF2B5EF4-FFF2-40B4-BE49-F238E27FC236}">
+                <a16:creationId xmlns:a16="http://schemas.microsoft.com/office/drawing/2014/main" id="{28A4EFD1-1AF6-F17D-1B27-5115800F99B0}"/>
+              </a:ext>
+            </a:extLst>
+          </p:cNvPr>
+          <p:cNvSpPr>
+            <a:spLocks noGrp="1"/>
+          </p:cNvSpPr>
+          <p:nvPr>
+            <p:ph type="sldNum" sz="quarter" idx="7"/>
+          </p:nvPr>
+        </p:nvSpPr>
+        <p:spPr/>
+        <p:txBody>
+          <a:bodyPr/>
+          <a:lstStyle/>
+          <a:p>
+            <a:fld id="{B6F15528-21DE-4FAA-801E-634DDDAF4B2B}" type="slidenum">
+              <a:rPr lang="es-ES" smtClean="0"/>
+              <a:t>10</a:t>
+            </a:fld>
+            <a:endParaRPr lang="es-ES"/>
+          </a:p>
+        </p:txBody>
+      </p:sp>
+      <p:sp>
+        <p:nvSpPr>
+          <p:cNvPr id="6" name="Título 4">
+            <a:extLst>
+              <a:ext uri="{FF2B5EF4-FFF2-40B4-BE49-F238E27FC236}">
+                <a16:creationId xmlns:a16="http://schemas.microsoft.com/office/drawing/2014/main" id="{8111062F-F9A0-241E-6CCB-6E8BE4D8C60A}"/>
+              </a:ext>
+            </a:extLst>
+          </p:cNvPr>
+          <p:cNvSpPr>
+            <a:spLocks noGrp="1"/>
+          </p:cNvSpPr>
+          <p:nvPr>
+            <p:ph type="body" idx="1"/>
+          </p:nvPr>
+        </p:nvSpPr>
+        <p:spPr>
+          <a:xfrm>
+            <a:off x="609600" y="2152650"/>
+            <a:ext cx="10972800" cy="430887"/>
+          </a:xfrm>
+        </p:spPr>
+        <p:txBody>
+          <a:bodyPr/>
+          <a:lstStyle/>
+          <a:p>
+            <a:pPr algn="ctr"/>
+            <a:r>
+              <a:rPr lang="en-US" sz="2800" b="1" dirty="0">
+                <a:effectLst>
+                  <a:outerShdw blurRad="38100" dist="38100" dir="2700000" algn="tl">
+                    <a:srgbClr val="000000">
+                      <a:alpha val="43137"/>
+                    </a:srgbClr>
+                  </a:outerShdw>
+                </a:effectLst>
+              </a:rPr>
+              <a:t>Multimode Interferometer (MMI) Coupler</a:t>
+            </a:r>
+          </a:p>
+        </p:txBody>
+      </p:sp>
+    </p:spTree>
+    <p:extLst>
+      <p:ext uri="{BB962C8B-B14F-4D97-AF65-F5344CB8AC3E}">
+        <p14:creationId xmlns:p14="http://schemas.microsoft.com/office/powerpoint/2010/main" val="3873318961"/>
+      </p:ext>
+    </p:extLst>
+  </p:cSld>
+  <p:clrMapOvr>
+    <a:masterClrMapping/>
+  </p:clrMapOvr>
+</p:sld>
+</file>
+
+<file path=ppt/slides/slide11.xml><?xml version="1.0" encoding="utf-8"?>
+<p:sld xmlns:a="http://schemas.openxmlformats.org/drawingml/2006/main" xmlns:r="http://schemas.openxmlformats.org/officeDocument/2006/relationships" xmlns:p="http://schemas.openxmlformats.org/presentationml/2006/main">
+  <p:cSld>
+    <p:spTree>
+      <p:nvGrpSpPr>
+        <p:cNvPr id="1" name="">
+          <a:extLst>
+            <a:ext uri="{FF2B5EF4-FFF2-40B4-BE49-F238E27FC236}">
+              <a16:creationId xmlns:a16="http://schemas.microsoft.com/office/drawing/2014/main" id="{91BF7C0E-2677-BADF-D636-6F9B71E665FA}"/>
+            </a:ext>
+          </a:extLst>
+        </p:cNvPr>
+        <p:cNvGrpSpPr/>
+        <p:nvPr/>
+      </p:nvGrpSpPr>
+      <p:grpSpPr>
+        <a:xfrm>
+          <a:off x="0" y="0"/>
+          <a:ext cx="0" cy="0"/>
+          <a:chOff x="0" y="0"/>
+          <a:chExt cx="0" cy="0"/>
+        </a:xfrm>
+      </p:grpSpPr>
+      <p:sp>
+        <p:nvSpPr>
           <p:cNvPr id="16" name="object 16">
             <a:extLst>
               <a:ext uri="{FF2B5EF4-FFF2-40B4-BE49-F238E27FC236}">
-                <a16:creationId xmlns:a16="http://schemas.microsoft.com/office/drawing/2014/main" id="{E1662E38-DE72-ADF3-A38E-08ED40DCC2AD}"/>
+                <a16:creationId xmlns:a16="http://schemas.microsoft.com/office/drawing/2014/main" id="{2B8D44BF-A3B5-6BED-C39C-FA8260E83536}"/>
               </a:ext>
             </a:extLst>
           </p:cNvPr>
@@ -4081,7 +4549,7 @@
             </a:pPr>
             <a:r>
               <a:rPr lang="en-US" sz="2500" dirty="0"/>
-              <a:t>Learning outcome #4.3 – 2x2 Multimode Interference Coupler – Optimization (II)</a:t>
+              <a:t>Learning outcome #4 – 4.1 2x2 Multimode Interference Coupler </a:t>
             </a:r>
             <a:br>
               <a:rPr lang="en-US" sz="2500" dirty="0"/>
@@ -4110,7 +4578,7 @@
           <p:cNvPr id="83" name="Gráfico 82">
             <a:extLst>
               <a:ext uri="{FF2B5EF4-FFF2-40B4-BE49-F238E27FC236}">
-                <a16:creationId xmlns:a16="http://schemas.microsoft.com/office/drawing/2014/main" id="{1CD4B005-DA76-DF7C-8A51-CA16DFD2CA3A}"/>
+                <a16:creationId xmlns:a16="http://schemas.microsoft.com/office/drawing/2014/main" id="{5DFCF1AD-6B06-F914-AC0B-80F0ED838EF9}"/>
               </a:ext>
             </a:extLst>
           </p:cNvPr>
@@ -4146,7 +4614,7 @@
           <p:cNvPr id="84" name="Marcador de número de diapositiva 83">
             <a:extLst>
               <a:ext uri="{FF2B5EF4-FFF2-40B4-BE49-F238E27FC236}">
-                <a16:creationId xmlns:a16="http://schemas.microsoft.com/office/drawing/2014/main" id="{0B06F952-20FD-3223-6AB8-83339507AFE8}"/>
+                <a16:creationId xmlns:a16="http://schemas.microsoft.com/office/drawing/2014/main" id="{4A656CCE-66E0-EAE0-5C63-DF1315DF6299}"/>
               </a:ext>
             </a:extLst>
           </p:cNvPr>
@@ -4164,7 +4632,7 @@
           <a:p>
             <a:fld id="{B6F15528-21DE-4FAA-801E-634DDDAF4B2B}" type="slidenum">
               <a:rPr lang="es-ES" smtClean="0"/>
-              <a:t>10</a:t>
+              <a:t>11</a:t>
             </a:fld>
             <a:endParaRPr lang="es-ES"/>
           </a:p>
@@ -4175,7 +4643,7 @@
           <p:cNvPr id="3" name="Marcador de pie de página 2">
             <a:extLst>
               <a:ext uri="{FF2B5EF4-FFF2-40B4-BE49-F238E27FC236}">
-                <a16:creationId xmlns:a16="http://schemas.microsoft.com/office/drawing/2014/main" id="{8B06152F-2A2C-A19B-581F-494FDFF33752}"/>
+                <a16:creationId xmlns:a16="http://schemas.microsoft.com/office/drawing/2014/main" id="{D3AB6581-C493-80EB-A67F-5289454DAA28}"/>
               </a:ext>
             </a:extLst>
           </p:cNvPr>
@@ -4209,7 +4677,7 @@
           <p:cNvPr id="2" name="CuadroTexto 1">
             <a:extLst>
               <a:ext uri="{FF2B5EF4-FFF2-40B4-BE49-F238E27FC236}">
-                <a16:creationId xmlns:a16="http://schemas.microsoft.com/office/drawing/2014/main" id="{EF5B7948-A25A-9043-7061-DD15A9023924}"/>
+                <a16:creationId xmlns:a16="http://schemas.microsoft.com/office/drawing/2014/main" id="{B5029729-ADF3-3B30-4FF9-83BE1DB82BD7}"/>
               </a:ext>
             </a:extLst>
           </p:cNvPr>
@@ -4219,7 +4687,7 @@
         <p:spPr>
           <a:xfrm>
             <a:off x="609441" y="4819471"/>
-            <a:ext cx="11199971" cy="1384995"/>
+            <a:ext cx="11199971" cy="1200329"/>
           </a:xfrm>
           <a:prstGeom prst="rect">
             <a:avLst/>
@@ -4247,7 +4715,21 @@
                 <a:latin typeface="Arial" panose="020B0604020202020204" pitchFamily="34" charset="0"/>
                 <a:cs typeface="Arial" panose="020B0604020202020204" pitchFamily="34" charset="0"/>
               </a:rPr>
-              <a:t>Comment results</a:t>
+              <a:t>Comment results (Coupling relationship, </a:t>
+            </a:r>
+            <a:r>
+              <a:rPr lang="en-US" sz="1200" dirty="0" err="1">
+                <a:latin typeface="Arial" panose="020B0604020202020204" pitchFamily="34" charset="0"/>
+                <a:cs typeface="Arial" panose="020B0604020202020204" pitchFamily="34" charset="0"/>
+              </a:rPr>
+              <a:t>Lpi</a:t>
+            </a:r>
+            <a:r>
+              <a:rPr lang="en-US" sz="1200" dirty="0">
+                <a:latin typeface="Arial" panose="020B0604020202020204" pitchFamily="34" charset="0"/>
+                <a:cs typeface="Arial" panose="020B0604020202020204" pitchFamily="34" charset="0"/>
+              </a:rPr>
+              <a:t>,  losses, comparison with Directional Coupler… )</a:t>
             </a:r>
           </a:p>
           <a:p>
@@ -4285,13 +4767,6 @@
               <a:cs typeface="Arial" panose="020B0604020202020204" pitchFamily="34" charset="0"/>
             </a:endParaRPr>
           </a:p>
-          <a:p>
-            <a:pPr algn="just"/>
-            <a:endParaRPr lang="en-US" sz="1200" dirty="0">
-              <a:latin typeface="Arial" panose="020B0604020202020204" pitchFamily="34" charset="0"/>
-              <a:cs typeface="Arial" panose="020B0604020202020204" pitchFamily="34" charset="0"/>
-            </a:endParaRPr>
-          </a:p>
         </p:txBody>
       </p:sp>
       <p:sp>
@@ -4299,7 +4774,7 @@
           <p:cNvPr id="7" name="Rectángulo 6">
             <a:extLst>
               <a:ext uri="{FF2B5EF4-FFF2-40B4-BE49-F238E27FC236}">
-                <a16:creationId xmlns:a16="http://schemas.microsoft.com/office/drawing/2014/main" id="{C8036B97-F577-1F3C-3CE2-BD45F7D1FFC2}"/>
+                <a16:creationId xmlns:a16="http://schemas.microsoft.com/office/drawing/2014/main" id="{98DE5FDA-4E91-E843-E84A-1467BFAA9986}"/>
               </a:ext>
             </a:extLst>
           </p:cNvPr>
@@ -4351,7 +4826,7 @@
           <p:cNvPr id="8" name="CuadroTexto 7">
             <a:extLst>
               <a:ext uri="{FF2B5EF4-FFF2-40B4-BE49-F238E27FC236}">
-                <a16:creationId xmlns:a16="http://schemas.microsoft.com/office/drawing/2014/main" id="{B0CFB20A-64F3-A296-71E8-F4FA17D35314}"/>
+                <a16:creationId xmlns:a16="http://schemas.microsoft.com/office/drawing/2014/main" id="{0DA14DBA-172E-DA2C-0573-6A00BF18F4A5}"/>
               </a:ext>
             </a:extLst>
           </p:cNvPr>
@@ -4360,8 +4835,8 @@
         </p:nvSpPr>
         <p:spPr>
           <a:xfrm>
-            <a:off x="640245" y="1942909"/>
-            <a:ext cx="11199972" cy="2708434"/>
+            <a:off x="2286000" y="2630415"/>
+            <a:ext cx="7718580" cy="923330"/>
           </a:xfrm>
           <a:prstGeom prst="rect">
             <a:avLst/>
@@ -4392,62 +4867,7 @@
             <a:pPr algn="ctr"/>
             <a:r>
               <a:rPr lang="en-US" dirty="0"/>
-              <a:t>Paste propagation plot and console results</a:t>
-            </a:r>
-          </a:p>
-          <a:p>
-            <a:pPr algn="ctr"/>
-            <a:endParaRPr lang="en-US" dirty="0"/>
-          </a:p>
-          <a:p>
-            <a:pPr algn="ctr"/>
-            <a:endParaRPr lang="en-US" dirty="0"/>
-          </a:p>
-          <a:p>
-            <a:pPr algn="r"/>
-            <a:r>
-              <a:rPr lang="en-US" sz="1600" b="1" dirty="0"/>
-              <a:t>Target</a:t>
-            </a:r>
-            <a:r>
-              <a:rPr lang="en-US" sz="1600" dirty="0"/>
-              <a:t>: make ratio over outputs 0.5 + excess loss &lt; 0.1 dB</a:t>
-            </a:r>
-          </a:p>
-          <a:p>
-            <a:pPr algn="r"/>
-            <a:r>
-              <a:rPr lang="en-US" sz="1600" dirty="0"/>
-              <a:t>With same settings of previous LO, now modify the notebook so I/O waveguides have a different width. </a:t>
-            </a:r>
-          </a:p>
-          <a:p>
-            <a:pPr algn="r"/>
-            <a:r>
-              <a:rPr lang="en-US" sz="1600" u="sng" dirty="0"/>
-              <a:t>- The nominal I/O waveguide width you have been using is 1.0 µm, increase it.</a:t>
-            </a:r>
-          </a:p>
-          <a:p>
-            <a:pPr algn="r"/>
-            <a:r>
-              <a:rPr lang="en-US" sz="1600" b="1" dirty="0"/>
-              <a:t>(Warning</a:t>
-            </a:r>
-            <a:r>
-              <a:rPr lang="en-US" sz="1600" dirty="0"/>
-              <a:t>! Every time you change the I/O waveguide width you have to re-run modes calculation)</a:t>
-            </a:r>
-          </a:p>
-          <a:p>
-            <a:pPr algn="r"/>
-            <a:r>
-              <a:rPr lang="en-US" sz="1600" b="1" dirty="0"/>
-              <a:t>Hints</a:t>
-            </a:r>
-            <a:r>
-              <a:rPr lang="en-US" sz="1600" dirty="0"/>
-              <a:t>: observe the 2D EME propagation results to guide you to the best settings of a) and b).</a:t>
+              <a:t>Paste propagation plots and console results</a:t>
             </a:r>
           </a:p>
         </p:txBody>
@@ -4455,7 +4875,7 @@
     </p:spTree>
     <p:extLst>
       <p:ext uri="{BB962C8B-B14F-4D97-AF65-F5344CB8AC3E}">
-        <p14:creationId xmlns:p14="http://schemas.microsoft.com/office/powerpoint/2010/main" val="1023731220"/>
+        <p14:creationId xmlns:p14="http://schemas.microsoft.com/office/powerpoint/2010/main" val="2815679427"/>
       </p:ext>
     </p:extLst>
   </p:cSld>
@@ -4465,7 +4885,7 @@
 </p:sld>
 </file>
 
-<file path=ppt/slides/slide11.xml><?xml version="1.0" encoding="utf-8"?>
+<file path=ppt/slides/slide12.xml><?xml version="1.0" encoding="utf-8"?>
 <p:sld xmlns:a="http://schemas.openxmlformats.org/drawingml/2006/main" xmlns:r="http://schemas.openxmlformats.org/officeDocument/2006/relationships" xmlns:p="http://schemas.openxmlformats.org/presentationml/2006/main">
   <p:cSld>
     <p:spTree>
@@ -4473,7 +4893,7 @@
         <p:cNvPr id="1" name="">
           <a:extLst>
             <a:ext uri="{FF2B5EF4-FFF2-40B4-BE49-F238E27FC236}">
-              <a16:creationId xmlns:a16="http://schemas.microsoft.com/office/drawing/2014/main" id="{200A1363-C83E-82B6-7BDE-AD2801F8B66D}"/>
+              <a16:creationId xmlns:a16="http://schemas.microsoft.com/office/drawing/2014/main" id="{D1F11DBE-A482-7036-60B2-70B7E2318F46}"/>
             </a:ext>
           </a:extLst>
         </p:cNvPr>
@@ -4493,7 +4913,7 @@
           <p:cNvPr id="16" name="object 16">
             <a:extLst>
               <a:ext uri="{FF2B5EF4-FFF2-40B4-BE49-F238E27FC236}">
-                <a16:creationId xmlns:a16="http://schemas.microsoft.com/office/drawing/2014/main" id="{1E256546-3103-104D-A87F-78AEBE5D595E}"/>
+                <a16:creationId xmlns:a16="http://schemas.microsoft.com/office/drawing/2014/main" id="{C096193E-AB86-E3CD-BDAC-0F9156C1A3F0}"/>
               </a:ext>
             </a:extLst>
           </p:cNvPr>
@@ -4529,15 +4949,7 @@
             </a:pPr>
             <a:r>
               <a:rPr lang="en-US" sz="2500" dirty="0"/>
-              <a:t>Learning </a:t>
-            </a:r>
-            <a:r>
-              <a:rPr lang="en-US" sz="2500"/>
-              <a:t>outcome #5 </a:t>
-            </a:r>
-            <a:r>
-              <a:rPr lang="en-US" sz="2500" dirty="0"/>
-              <a:t>– 1x4 Multimode Interference Coupler </a:t>
+              <a:t>Learning outcome #4.2 – 2x2 Multimode Interference Coupler - Optimization</a:t>
             </a:r>
             <a:br>
               <a:rPr lang="en-US" sz="2500" dirty="0"/>
@@ -4552,7 +4964,7 @@
             </a:r>
             <a:r>
               <a:rPr lang="en-US" b="0" dirty="0"/>
-              <a:t> = ? µm</a:t>
+              <a:t> = 6.6 µm</a:t>
             </a:r>
             <a:endParaRPr lang="en-US" sz="2500" b="0" dirty="0">
               <a:latin typeface="+mj-lt"/>
@@ -4566,7 +4978,7 @@
           <p:cNvPr id="83" name="Gráfico 82">
             <a:extLst>
               <a:ext uri="{FF2B5EF4-FFF2-40B4-BE49-F238E27FC236}">
-                <a16:creationId xmlns:a16="http://schemas.microsoft.com/office/drawing/2014/main" id="{4BFCA3D8-29F6-7091-7099-77888A9F863B}"/>
+                <a16:creationId xmlns:a16="http://schemas.microsoft.com/office/drawing/2014/main" id="{2D17DCD6-D851-E62D-D95C-A9F9954602DE}"/>
               </a:ext>
             </a:extLst>
           </p:cNvPr>
@@ -4602,7 +5014,7 @@
           <p:cNvPr id="84" name="Marcador de número de diapositiva 83">
             <a:extLst>
               <a:ext uri="{FF2B5EF4-FFF2-40B4-BE49-F238E27FC236}">
-                <a16:creationId xmlns:a16="http://schemas.microsoft.com/office/drawing/2014/main" id="{42E75535-0FBC-4C5F-9AC5-7008914FCF56}"/>
+                <a16:creationId xmlns:a16="http://schemas.microsoft.com/office/drawing/2014/main" id="{4891046F-11DC-B7FC-54F7-9583E688DC0E}"/>
               </a:ext>
             </a:extLst>
           </p:cNvPr>
@@ -4620,7 +5032,7 @@
           <a:p>
             <a:fld id="{B6F15528-21DE-4FAA-801E-634DDDAF4B2B}" type="slidenum">
               <a:rPr lang="es-ES" smtClean="0"/>
-              <a:t>11</a:t>
+              <a:t>12</a:t>
             </a:fld>
             <a:endParaRPr lang="es-ES"/>
           </a:p>
@@ -4631,7 +5043,7 @@
           <p:cNvPr id="3" name="Marcador de pie de página 2">
             <a:extLst>
               <a:ext uri="{FF2B5EF4-FFF2-40B4-BE49-F238E27FC236}">
-                <a16:creationId xmlns:a16="http://schemas.microsoft.com/office/drawing/2014/main" id="{07AC2AFF-A7D9-EBCD-7C5A-6CDF61B69366}"/>
+                <a16:creationId xmlns:a16="http://schemas.microsoft.com/office/drawing/2014/main" id="{4C9BAA39-017F-D602-6705-A6CF44830139}"/>
               </a:ext>
             </a:extLst>
           </p:cNvPr>
@@ -4665,7 +5077,7 @@
           <p:cNvPr id="2" name="CuadroTexto 1">
             <a:extLst>
               <a:ext uri="{FF2B5EF4-FFF2-40B4-BE49-F238E27FC236}">
-                <a16:creationId xmlns:a16="http://schemas.microsoft.com/office/drawing/2014/main" id="{42D73A2E-0E5A-8A39-6B70-F9E94D6DBB70}"/>
+                <a16:creationId xmlns:a16="http://schemas.microsoft.com/office/drawing/2014/main" id="{43D7D9E5-DAC3-2BB8-7377-826863CBAD4E}"/>
               </a:ext>
             </a:extLst>
           </p:cNvPr>
@@ -4675,7 +5087,7 @@
         <p:spPr>
           <a:xfrm>
             <a:off x="609441" y="4819471"/>
-            <a:ext cx="11199971" cy="1200329"/>
+            <a:ext cx="11199971" cy="1384995"/>
           </a:xfrm>
           <a:prstGeom prst="rect">
             <a:avLst/>
@@ -4703,21 +5115,7 @@
                 <a:latin typeface="Arial" panose="020B0604020202020204" pitchFamily="34" charset="0"/>
                 <a:cs typeface="Arial" panose="020B0604020202020204" pitchFamily="34" charset="0"/>
               </a:rPr>
-              <a:t>Repeat all the design </a:t>
-            </a:r>
-            <a:r>
-              <a:rPr lang="en-US" sz="1200">
-                <a:latin typeface="Arial" panose="020B0604020202020204" pitchFamily="34" charset="0"/>
-                <a:cs typeface="Arial" panose="020B0604020202020204" pitchFamily="34" charset="0"/>
-              </a:rPr>
-              <a:t>process for a </a:t>
-            </a:r>
-            <a:r>
-              <a:rPr lang="en-US" sz="1200" dirty="0">
-                <a:latin typeface="Arial" panose="020B0604020202020204" pitchFamily="34" charset="0"/>
-                <a:cs typeface="Arial" panose="020B0604020202020204" pitchFamily="34" charset="0"/>
-              </a:rPr>
-              <a:t>1x4 MMI Coupler.  </a:t>
+              <a:t>Comment results</a:t>
             </a:r>
           </a:p>
           <a:p>
@@ -4755,6 +5153,13 @@
               <a:cs typeface="Arial" panose="020B0604020202020204" pitchFamily="34" charset="0"/>
             </a:endParaRPr>
           </a:p>
+          <a:p>
+            <a:pPr algn="just"/>
+            <a:endParaRPr lang="en-US" sz="1200" dirty="0">
+              <a:latin typeface="Arial" panose="020B0604020202020204" pitchFamily="34" charset="0"/>
+              <a:cs typeface="Arial" panose="020B0604020202020204" pitchFamily="34" charset="0"/>
+            </a:endParaRPr>
+          </a:p>
         </p:txBody>
       </p:sp>
       <p:sp>
@@ -4762,7 +5167,7 @@
           <p:cNvPr id="7" name="Rectángulo 6">
             <a:extLst>
               <a:ext uri="{FF2B5EF4-FFF2-40B4-BE49-F238E27FC236}">
-                <a16:creationId xmlns:a16="http://schemas.microsoft.com/office/drawing/2014/main" id="{AFB86587-21D4-5A33-7D00-DDF170C919BA}"/>
+                <a16:creationId xmlns:a16="http://schemas.microsoft.com/office/drawing/2014/main" id="{9772491E-4FFB-FFC3-C855-72A4B15F3E73}"/>
               </a:ext>
             </a:extLst>
           </p:cNvPr>
@@ -4814,6 +5219,923 @@
           <p:cNvPr id="8" name="CuadroTexto 7">
             <a:extLst>
               <a:ext uri="{FF2B5EF4-FFF2-40B4-BE49-F238E27FC236}">
+                <a16:creationId xmlns:a16="http://schemas.microsoft.com/office/drawing/2014/main" id="{643565A9-7DB6-D6EE-152F-2852C8BA7986}"/>
+              </a:ext>
+            </a:extLst>
+          </p:cNvPr>
+          <p:cNvSpPr txBox="1"/>
+          <p:nvPr/>
+        </p:nvSpPr>
+        <p:spPr>
+          <a:xfrm>
+            <a:off x="640245" y="1942909"/>
+            <a:ext cx="11199972" cy="2708434"/>
+          </a:xfrm>
+          <a:prstGeom prst="rect">
+            <a:avLst/>
+          </a:prstGeom>
+          <a:noFill/>
+        </p:spPr>
+        <p:txBody>
+          <a:bodyPr wrap="square" rtlCol="0">
+            <a:spAutoFit/>
+          </a:bodyPr>
+          <a:lstStyle/>
+          <a:p>
+            <a:pPr algn="ctr"/>
+            <a:r>
+              <a:rPr lang="en-US" b="1" dirty="0"/>
+              <a:t>deep</a:t>
+            </a:r>
+            <a:r>
+              <a:rPr lang="en-US" dirty="0"/>
+              <a:t> waveguide</a:t>
+            </a:r>
+          </a:p>
+          <a:p>
+            <a:pPr algn="ctr"/>
+            <a:endParaRPr lang="en-US" dirty="0"/>
+          </a:p>
+          <a:p>
+            <a:pPr algn="ctr"/>
+            <a:r>
+              <a:rPr lang="en-US" dirty="0"/>
+              <a:t>Paste propagation plot and console results</a:t>
+            </a:r>
+          </a:p>
+          <a:p>
+            <a:pPr algn="ctr"/>
+            <a:endParaRPr lang="en-US" dirty="0"/>
+          </a:p>
+          <a:p>
+            <a:pPr algn="ctr"/>
+            <a:endParaRPr lang="en-US" dirty="0"/>
+          </a:p>
+          <a:p>
+            <a:pPr algn="r"/>
+            <a:r>
+              <a:rPr lang="en-US" sz="1600" b="1" dirty="0"/>
+              <a:t>Target</a:t>
+            </a:r>
+            <a:r>
+              <a:rPr lang="en-US" sz="1600" dirty="0"/>
+              <a:t>: make equal ratio over outputs (even if not 0.5) and minimize excess loss (even if not 0.0 dB)</a:t>
+            </a:r>
+          </a:p>
+          <a:p>
+            <a:pPr algn="r"/>
+            <a:r>
+              <a:rPr lang="en-US" sz="1600" dirty="0"/>
+              <a:t>With same settings of previous LO, now adjust try to manually optimize the MMI by changing iteratively:</a:t>
+            </a:r>
+          </a:p>
+          <a:p>
+            <a:pPr algn="r"/>
+            <a:r>
+              <a:rPr lang="en-US" sz="1600" dirty="0"/>
+              <a:t>- Change </a:t>
+            </a:r>
+            <a:r>
+              <a:rPr lang="en-US" sz="1600" dirty="0" err="1"/>
+              <a:t>dL_MMI</a:t>
+            </a:r>
+            <a:endParaRPr lang="en-US" sz="1600" dirty="0"/>
+          </a:p>
+          <a:p>
+            <a:pPr algn="r"/>
+            <a:r>
+              <a:rPr lang="en-US" sz="1600" dirty="0"/>
+              <a:t>- Change I/O waveguide position +/- </a:t>
+            </a:r>
+            <a:r>
+              <a:rPr lang="en-US" sz="1600" dirty="0" err="1"/>
+              <a:t>dy</a:t>
+            </a:r>
+            <a:endParaRPr lang="en-US" sz="1600" dirty="0"/>
+          </a:p>
+          <a:p>
+            <a:pPr algn="r"/>
+            <a:r>
+              <a:rPr lang="en-US" sz="1600" b="1" dirty="0"/>
+              <a:t>Hints</a:t>
+            </a:r>
+            <a:r>
+              <a:rPr lang="en-US" sz="1600" dirty="0"/>
+              <a:t>: observe the 2D EME propagation results to guide you to the best settings of a) and b).</a:t>
+            </a:r>
+          </a:p>
+        </p:txBody>
+      </p:sp>
+    </p:spTree>
+    <p:extLst>
+      <p:ext uri="{BB962C8B-B14F-4D97-AF65-F5344CB8AC3E}">
+        <p14:creationId xmlns:p14="http://schemas.microsoft.com/office/powerpoint/2010/main" val="2685215753"/>
+      </p:ext>
+    </p:extLst>
+  </p:cSld>
+  <p:clrMapOvr>
+    <a:masterClrMapping/>
+  </p:clrMapOvr>
+</p:sld>
+</file>
+
+<file path=ppt/slides/slide13.xml><?xml version="1.0" encoding="utf-8"?>
+<p:sld xmlns:a="http://schemas.openxmlformats.org/drawingml/2006/main" xmlns:r="http://schemas.openxmlformats.org/officeDocument/2006/relationships" xmlns:p="http://schemas.openxmlformats.org/presentationml/2006/main">
+  <p:cSld>
+    <p:spTree>
+      <p:nvGrpSpPr>
+        <p:cNvPr id="1" name="">
+          <a:extLst>
+            <a:ext uri="{FF2B5EF4-FFF2-40B4-BE49-F238E27FC236}">
+              <a16:creationId xmlns:a16="http://schemas.microsoft.com/office/drawing/2014/main" id="{F32A9819-E058-DC4F-FB99-88F20442D9F4}"/>
+            </a:ext>
+          </a:extLst>
+        </p:cNvPr>
+        <p:cNvGrpSpPr/>
+        <p:nvPr/>
+      </p:nvGrpSpPr>
+      <p:grpSpPr>
+        <a:xfrm>
+          <a:off x="0" y="0"/>
+          <a:ext cx="0" cy="0"/>
+          <a:chOff x="0" y="0"/>
+          <a:chExt cx="0" cy="0"/>
+        </a:xfrm>
+      </p:grpSpPr>
+      <p:sp>
+        <p:nvSpPr>
+          <p:cNvPr id="16" name="object 16">
+            <a:extLst>
+              <a:ext uri="{FF2B5EF4-FFF2-40B4-BE49-F238E27FC236}">
+                <a16:creationId xmlns:a16="http://schemas.microsoft.com/office/drawing/2014/main" id="{E1662E38-DE72-ADF3-A38E-08ED40DCC2AD}"/>
+              </a:ext>
+            </a:extLst>
+          </p:cNvPr>
+          <p:cNvSpPr txBox="1">
+            <a:spLocks noGrp="1"/>
+          </p:cNvSpPr>
+          <p:nvPr>
+            <p:ph type="title"/>
+          </p:nvPr>
+        </p:nvSpPr>
+        <p:spPr>
+          <a:xfrm>
+            <a:off x="685800" y="408883"/>
+            <a:ext cx="10994410" cy="705321"/>
+          </a:xfrm>
+          <a:prstGeom prst="rect">
+            <a:avLst/>
+          </a:prstGeom>
+        </p:spPr>
+        <p:txBody>
+          <a:bodyPr vert="horz" wrap="square" lIns="0" tIns="12700" rIns="0" bIns="0" rtlCol="0">
+            <a:spAutoFit/>
+          </a:bodyPr>
+          <a:lstStyle/>
+          <a:p>
+            <a:pPr marL="12700">
+              <a:lnSpc>
+                <a:spcPct val="100000"/>
+              </a:lnSpc>
+              <a:spcBef>
+                <a:spcPts val="100"/>
+              </a:spcBef>
+            </a:pPr>
+            <a:r>
+              <a:rPr lang="en-US" sz="2500" dirty="0"/>
+              <a:t>Learning outcome #4.3 – 2x2 Multimode Interference Coupler – Optimization (II)</a:t>
+            </a:r>
+            <a:br>
+              <a:rPr lang="en-US" sz="2500" dirty="0"/>
+            </a:br>
+            <a:r>
+              <a:rPr lang="en-US" b="0" dirty="0"/>
+              <a:t>Wavelength 1.55 µm, </a:t>
+            </a:r>
+            <a:r>
+              <a:rPr lang="en-US" b="0" dirty="0" err="1"/>
+              <a:t>wMMI</a:t>
+            </a:r>
+            <a:r>
+              <a:rPr lang="en-US" b="0" dirty="0"/>
+              <a:t> = 6.6 µm</a:t>
+            </a:r>
+            <a:endParaRPr lang="en-US" sz="2500" b="0" dirty="0">
+              <a:latin typeface="+mj-lt"/>
+              <a:cs typeface="Lucida Sans"/>
+            </a:endParaRPr>
+          </a:p>
+        </p:txBody>
+      </p:sp>
+      <p:pic>
+        <p:nvPicPr>
+          <p:cNvPr id="83" name="Gráfico 82">
+            <a:extLst>
+              <a:ext uri="{FF2B5EF4-FFF2-40B4-BE49-F238E27FC236}">
+                <a16:creationId xmlns:a16="http://schemas.microsoft.com/office/drawing/2014/main" id="{1CD4B005-DA76-DF7C-8A51-CA16DFD2CA3A}"/>
+              </a:ext>
+            </a:extLst>
+          </p:cNvPr>
+          <p:cNvPicPr>
+            <a:picLocks noChangeAspect="1"/>
+          </p:cNvPicPr>
+          <p:nvPr/>
+        </p:nvPicPr>
+        <p:blipFill>
+          <a:blip r:embed="rId3">
+            <a:extLst>
+              <a:ext uri="{96DAC541-7B7A-43D3-8B79-37D633B846F1}">
+                <asvg:svgBlip xmlns:asvg="http://schemas.microsoft.com/office/drawing/2016/SVG/main" r:embed="rId4"/>
+              </a:ext>
+            </a:extLst>
+          </a:blip>
+          <a:stretch>
+            <a:fillRect/>
+          </a:stretch>
+        </p:blipFill>
+        <p:spPr>
+          <a:xfrm>
+            <a:off x="5045006" y="6356057"/>
+            <a:ext cx="6409575" cy="363174"/>
+          </a:xfrm>
+          <a:prstGeom prst="rect">
+            <a:avLst/>
+          </a:prstGeom>
+        </p:spPr>
+      </p:pic>
+      <p:sp>
+        <p:nvSpPr>
+          <p:cNvPr id="84" name="Marcador de número de diapositiva 83">
+            <a:extLst>
+              <a:ext uri="{FF2B5EF4-FFF2-40B4-BE49-F238E27FC236}">
+                <a16:creationId xmlns:a16="http://schemas.microsoft.com/office/drawing/2014/main" id="{0B06F952-20FD-3223-6AB8-83339507AFE8}"/>
+              </a:ext>
+            </a:extLst>
+          </p:cNvPr>
+          <p:cNvSpPr>
+            <a:spLocks noGrp="1"/>
+          </p:cNvSpPr>
+          <p:nvPr>
+            <p:ph type="sldNum" sz="quarter" idx="7"/>
+          </p:nvPr>
+        </p:nvSpPr>
+        <p:spPr/>
+        <p:txBody>
+          <a:bodyPr/>
+          <a:lstStyle/>
+          <a:p>
+            <a:fld id="{B6F15528-21DE-4FAA-801E-634DDDAF4B2B}" type="slidenum">
+              <a:rPr lang="es-ES" smtClean="0"/>
+              <a:t>13</a:t>
+            </a:fld>
+            <a:endParaRPr lang="es-ES"/>
+          </a:p>
+        </p:txBody>
+      </p:sp>
+      <p:sp>
+        <p:nvSpPr>
+          <p:cNvPr id="3" name="Marcador de pie de página 2">
+            <a:extLst>
+              <a:ext uri="{FF2B5EF4-FFF2-40B4-BE49-F238E27FC236}">
+                <a16:creationId xmlns:a16="http://schemas.microsoft.com/office/drawing/2014/main" id="{8B06152F-2A2C-A19B-581F-494FDFF33752}"/>
+              </a:ext>
+            </a:extLst>
+          </p:cNvPr>
+          <p:cNvSpPr>
+            <a:spLocks noGrp="1"/>
+          </p:cNvSpPr>
+          <p:nvPr>
+            <p:ph type="ftr" sz="quarter" idx="5"/>
+          </p:nvPr>
+        </p:nvSpPr>
+        <p:spPr/>
+        <p:txBody>
+          <a:bodyPr/>
+          <a:lstStyle/>
+          <a:p>
+            <a:pPr marL="12700">
+              <a:spcBef>
+                <a:spcPts val="15"/>
+              </a:spcBef>
+            </a:pPr>
+            <a:r>
+              <a:rPr lang="es-ES" spc="-5"/>
+              <a:t>LAB 2.0. COUPLERS</a:t>
+            </a:r>
+            <a:endParaRPr lang="es-ES" spc="-5" dirty="0"/>
+          </a:p>
+        </p:txBody>
+      </p:sp>
+      <p:sp>
+        <p:nvSpPr>
+          <p:cNvPr id="2" name="CuadroTexto 1">
+            <a:extLst>
+              <a:ext uri="{FF2B5EF4-FFF2-40B4-BE49-F238E27FC236}">
+                <a16:creationId xmlns:a16="http://schemas.microsoft.com/office/drawing/2014/main" id="{EF5B7948-A25A-9043-7061-DD15A9023924}"/>
+              </a:ext>
+            </a:extLst>
+          </p:cNvPr>
+          <p:cNvSpPr txBox="1"/>
+          <p:nvPr/>
+        </p:nvSpPr>
+        <p:spPr>
+          <a:xfrm>
+            <a:off x="609441" y="4819471"/>
+            <a:ext cx="11199971" cy="1384995"/>
+          </a:xfrm>
+          <a:prstGeom prst="rect">
+            <a:avLst/>
+          </a:prstGeom>
+          <a:solidFill>
+            <a:schemeClr val="bg1">
+              <a:lumMod val="95000"/>
+            </a:schemeClr>
+          </a:solidFill>
+          <a:ln w="28575">
+            <a:solidFill>
+              <a:srgbClr val="E0700D"/>
+            </a:solidFill>
+          </a:ln>
+        </p:spPr>
+        <p:txBody>
+          <a:bodyPr wrap="square" rtlCol="0">
+            <a:spAutoFit/>
+          </a:bodyPr>
+          <a:lstStyle/>
+          <a:p>
+            <a:pPr algn="just"/>
+            <a:r>
+              <a:rPr lang="en-US" sz="1200" dirty="0">
+                <a:latin typeface="Arial" panose="020B0604020202020204" pitchFamily="34" charset="0"/>
+                <a:cs typeface="Arial" panose="020B0604020202020204" pitchFamily="34" charset="0"/>
+              </a:rPr>
+              <a:t>Comment results</a:t>
+            </a:r>
+          </a:p>
+          <a:p>
+            <a:pPr algn="just"/>
+            <a:endParaRPr lang="en-US" sz="1200" dirty="0">
+              <a:latin typeface="Arial" panose="020B0604020202020204" pitchFamily="34" charset="0"/>
+              <a:cs typeface="Arial" panose="020B0604020202020204" pitchFamily="34" charset="0"/>
+            </a:endParaRPr>
+          </a:p>
+          <a:p>
+            <a:pPr algn="just"/>
+            <a:endParaRPr lang="en-US" sz="1200" dirty="0">
+              <a:latin typeface="Arial" panose="020B0604020202020204" pitchFamily="34" charset="0"/>
+              <a:cs typeface="Arial" panose="020B0604020202020204" pitchFamily="34" charset="0"/>
+            </a:endParaRPr>
+          </a:p>
+          <a:p>
+            <a:pPr algn="just"/>
+            <a:endParaRPr lang="en-US" sz="1200" dirty="0">
+              <a:latin typeface="Arial" panose="020B0604020202020204" pitchFamily="34" charset="0"/>
+              <a:cs typeface="Arial" panose="020B0604020202020204" pitchFamily="34" charset="0"/>
+            </a:endParaRPr>
+          </a:p>
+          <a:p>
+            <a:pPr algn="just"/>
+            <a:endParaRPr lang="en-US" sz="1200" dirty="0">
+              <a:latin typeface="Arial" panose="020B0604020202020204" pitchFamily="34" charset="0"/>
+              <a:cs typeface="Arial" panose="020B0604020202020204" pitchFamily="34" charset="0"/>
+            </a:endParaRPr>
+          </a:p>
+          <a:p>
+            <a:pPr algn="just"/>
+            <a:endParaRPr lang="en-US" sz="1200" dirty="0">
+              <a:latin typeface="Arial" panose="020B0604020202020204" pitchFamily="34" charset="0"/>
+              <a:cs typeface="Arial" panose="020B0604020202020204" pitchFamily="34" charset="0"/>
+            </a:endParaRPr>
+          </a:p>
+          <a:p>
+            <a:pPr algn="just"/>
+            <a:endParaRPr lang="en-US" sz="1200" dirty="0">
+              <a:latin typeface="Arial" panose="020B0604020202020204" pitchFamily="34" charset="0"/>
+              <a:cs typeface="Arial" panose="020B0604020202020204" pitchFamily="34" charset="0"/>
+            </a:endParaRPr>
+          </a:p>
+        </p:txBody>
+      </p:sp>
+      <p:sp>
+        <p:nvSpPr>
+          <p:cNvPr id="7" name="Rectángulo 6">
+            <a:extLst>
+              <a:ext uri="{FF2B5EF4-FFF2-40B4-BE49-F238E27FC236}">
+                <a16:creationId xmlns:a16="http://schemas.microsoft.com/office/drawing/2014/main" id="{C8036B97-F577-1F3C-3CE2-BD45F7D1FFC2}"/>
+              </a:ext>
+            </a:extLst>
+          </p:cNvPr>
+          <p:cNvSpPr/>
+          <p:nvPr/>
+        </p:nvSpPr>
+        <p:spPr>
+          <a:xfrm>
+            <a:off x="609441" y="1377510"/>
+            <a:ext cx="11199971" cy="3306028"/>
+          </a:xfrm>
+          <a:prstGeom prst="rect">
+            <a:avLst/>
+          </a:prstGeom>
+          <a:noFill/>
+          <a:ln w="28575">
+            <a:solidFill>
+              <a:srgbClr val="E0700D"/>
+            </a:solidFill>
+          </a:ln>
+        </p:spPr>
+        <p:style>
+          <a:lnRef idx="2">
+            <a:schemeClr val="accent1">
+              <a:shade val="15000"/>
+            </a:schemeClr>
+          </a:lnRef>
+          <a:fillRef idx="1">
+            <a:schemeClr val="accent1"/>
+          </a:fillRef>
+          <a:effectRef idx="0">
+            <a:schemeClr val="accent1"/>
+          </a:effectRef>
+          <a:fontRef idx="minor">
+            <a:schemeClr val="lt1"/>
+          </a:fontRef>
+        </p:style>
+        <p:txBody>
+          <a:bodyPr rtlCol="0" anchor="ctr"/>
+          <a:lstStyle/>
+          <a:p>
+            <a:pPr algn="ctr"/>
+            <a:endParaRPr lang="en-US"/>
+          </a:p>
+        </p:txBody>
+      </p:sp>
+      <p:sp>
+        <p:nvSpPr>
+          <p:cNvPr id="8" name="CuadroTexto 7">
+            <a:extLst>
+              <a:ext uri="{FF2B5EF4-FFF2-40B4-BE49-F238E27FC236}">
+                <a16:creationId xmlns:a16="http://schemas.microsoft.com/office/drawing/2014/main" id="{B0CFB20A-64F3-A296-71E8-F4FA17D35314}"/>
+              </a:ext>
+            </a:extLst>
+          </p:cNvPr>
+          <p:cNvSpPr txBox="1"/>
+          <p:nvPr/>
+        </p:nvSpPr>
+        <p:spPr>
+          <a:xfrm>
+            <a:off x="640245" y="1942909"/>
+            <a:ext cx="11199972" cy="2708434"/>
+          </a:xfrm>
+          <a:prstGeom prst="rect">
+            <a:avLst/>
+          </a:prstGeom>
+          <a:noFill/>
+        </p:spPr>
+        <p:txBody>
+          <a:bodyPr wrap="square" rtlCol="0">
+            <a:spAutoFit/>
+          </a:bodyPr>
+          <a:lstStyle/>
+          <a:p>
+            <a:pPr algn="ctr"/>
+            <a:r>
+              <a:rPr lang="en-US" b="1" dirty="0"/>
+              <a:t>deep</a:t>
+            </a:r>
+            <a:r>
+              <a:rPr lang="en-US" dirty="0"/>
+              <a:t> waveguide</a:t>
+            </a:r>
+          </a:p>
+          <a:p>
+            <a:pPr algn="ctr"/>
+            <a:endParaRPr lang="en-US" dirty="0"/>
+          </a:p>
+          <a:p>
+            <a:pPr algn="ctr"/>
+            <a:r>
+              <a:rPr lang="en-US" dirty="0"/>
+              <a:t>Paste propagation plot and console results</a:t>
+            </a:r>
+          </a:p>
+          <a:p>
+            <a:pPr algn="ctr"/>
+            <a:endParaRPr lang="en-US" dirty="0"/>
+          </a:p>
+          <a:p>
+            <a:pPr algn="ctr"/>
+            <a:endParaRPr lang="en-US" dirty="0"/>
+          </a:p>
+          <a:p>
+            <a:pPr algn="r"/>
+            <a:r>
+              <a:rPr lang="en-US" sz="1600" b="1" dirty="0"/>
+              <a:t>Target</a:t>
+            </a:r>
+            <a:r>
+              <a:rPr lang="en-US" sz="1600" dirty="0"/>
+              <a:t>: make ratio over outputs 0.5 + excess loss &lt; 0.1 dB</a:t>
+            </a:r>
+          </a:p>
+          <a:p>
+            <a:pPr algn="r"/>
+            <a:r>
+              <a:rPr lang="en-US" sz="1600" dirty="0"/>
+              <a:t>With same settings of previous LO, now modify the notebook so I/O waveguides have a different width. </a:t>
+            </a:r>
+          </a:p>
+          <a:p>
+            <a:pPr algn="r"/>
+            <a:r>
+              <a:rPr lang="en-US" sz="1600" u="sng" dirty="0"/>
+              <a:t>- The nominal I/O waveguide width you have been using is 1.0 µm, increase it.</a:t>
+            </a:r>
+          </a:p>
+          <a:p>
+            <a:pPr algn="r"/>
+            <a:r>
+              <a:rPr lang="en-US" sz="1600" b="1" dirty="0"/>
+              <a:t>(Warning</a:t>
+            </a:r>
+            <a:r>
+              <a:rPr lang="en-US" sz="1600" dirty="0"/>
+              <a:t>! Every time you change the I/O waveguide width you have to re-run modes calculation)</a:t>
+            </a:r>
+          </a:p>
+          <a:p>
+            <a:pPr algn="r"/>
+            <a:r>
+              <a:rPr lang="en-US" sz="1600" b="1" dirty="0"/>
+              <a:t>Hints</a:t>
+            </a:r>
+            <a:r>
+              <a:rPr lang="en-US" sz="1600" dirty="0"/>
+              <a:t>: observe the 2D EME propagation results to guide you to the best settings of a) and b).</a:t>
+            </a:r>
+          </a:p>
+        </p:txBody>
+      </p:sp>
+    </p:spTree>
+    <p:extLst>
+      <p:ext uri="{BB962C8B-B14F-4D97-AF65-F5344CB8AC3E}">
+        <p14:creationId xmlns:p14="http://schemas.microsoft.com/office/powerpoint/2010/main" val="1023731220"/>
+      </p:ext>
+    </p:extLst>
+  </p:cSld>
+  <p:clrMapOvr>
+    <a:masterClrMapping/>
+  </p:clrMapOvr>
+</p:sld>
+</file>
+
+<file path=ppt/slides/slide14.xml><?xml version="1.0" encoding="utf-8"?>
+<p:sld xmlns:a="http://schemas.openxmlformats.org/drawingml/2006/main" xmlns:r="http://schemas.openxmlformats.org/officeDocument/2006/relationships" xmlns:p="http://schemas.openxmlformats.org/presentationml/2006/main">
+  <p:cSld>
+    <p:spTree>
+      <p:nvGrpSpPr>
+        <p:cNvPr id="1" name="">
+          <a:extLst>
+            <a:ext uri="{FF2B5EF4-FFF2-40B4-BE49-F238E27FC236}">
+              <a16:creationId xmlns:a16="http://schemas.microsoft.com/office/drawing/2014/main" id="{200A1363-C83E-82B6-7BDE-AD2801F8B66D}"/>
+            </a:ext>
+          </a:extLst>
+        </p:cNvPr>
+        <p:cNvGrpSpPr/>
+        <p:nvPr/>
+      </p:nvGrpSpPr>
+      <p:grpSpPr>
+        <a:xfrm>
+          <a:off x="0" y="0"/>
+          <a:ext cx="0" cy="0"/>
+          <a:chOff x="0" y="0"/>
+          <a:chExt cx="0" cy="0"/>
+        </a:xfrm>
+      </p:grpSpPr>
+      <p:sp>
+        <p:nvSpPr>
+          <p:cNvPr id="16" name="object 16">
+            <a:extLst>
+              <a:ext uri="{FF2B5EF4-FFF2-40B4-BE49-F238E27FC236}">
+                <a16:creationId xmlns:a16="http://schemas.microsoft.com/office/drawing/2014/main" id="{1E256546-3103-104D-A87F-78AEBE5D595E}"/>
+              </a:ext>
+            </a:extLst>
+          </p:cNvPr>
+          <p:cNvSpPr txBox="1">
+            <a:spLocks noGrp="1"/>
+          </p:cNvSpPr>
+          <p:nvPr>
+            <p:ph type="title"/>
+          </p:nvPr>
+        </p:nvSpPr>
+        <p:spPr>
+          <a:xfrm>
+            <a:off x="685800" y="408883"/>
+            <a:ext cx="10994410" cy="705321"/>
+          </a:xfrm>
+          <a:prstGeom prst="rect">
+            <a:avLst/>
+          </a:prstGeom>
+        </p:spPr>
+        <p:txBody>
+          <a:bodyPr vert="horz" wrap="square" lIns="0" tIns="12700" rIns="0" bIns="0" rtlCol="0">
+            <a:spAutoFit/>
+          </a:bodyPr>
+          <a:lstStyle/>
+          <a:p>
+            <a:pPr marL="12700">
+              <a:lnSpc>
+                <a:spcPct val="100000"/>
+              </a:lnSpc>
+              <a:spcBef>
+                <a:spcPts val="100"/>
+              </a:spcBef>
+            </a:pPr>
+            <a:r>
+              <a:rPr lang="en-US" sz="2500" dirty="0"/>
+              <a:t>Learning </a:t>
+            </a:r>
+            <a:r>
+              <a:rPr lang="en-US" sz="2500"/>
+              <a:t>outcome #5 </a:t>
+            </a:r>
+            <a:r>
+              <a:rPr lang="en-US" sz="2500" dirty="0"/>
+              <a:t>– 1x4 Multimode Interference Coupler </a:t>
+            </a:r>
+            <a:br>
+              <a:rPr lang="en-US" sz="2500" dirty="0"/>
+            </a:br>
+            <a:r>
+              <a:rPr lang="en-US" b="0" dirty="0"/>
+              <a:t>Wavelength 1.55 µm, </a:t>
+            </a:r>
+            <a:r>
+              <a:rPr lang="en-US" b="0" dirty="0" err="1"/>
+              <a:t>wMMI</a:t>
+            </a:r>
+            <a:r>
+              <a:rPr lang="en-US" b="0" dirty="0"/>
+              <a:t> = ? µm</a:t>
+            </a:r>
+            <a:endParaRPr lang="en-US" sz="2500" b="0" dirty="0">
+              <a:latin typeface="+mj-lt"/>
+              <a:cs typeface="Lucida Sans"/>
+            </a:endParaRPr>
+          </a:p>
+        </p:txBody>
+      </p:sp>
+      <p:pic>
+        <p:nvPicPr>
+          <p:cNvPr id="83" name="Gráfico 82">
+            <a:extLst>
+              <a:ext uri="{FF2B5EF4-FFF2-40B4-BE49-F238E27FC236}">
+                <a16:creationId xmlns:a16="http://schemas.microsoft.com/office/drawing/2014/main" id="{4BFCA3D8-29F6-7091-7099-77888A9F863B}"/>
+              </a:ext>
+            </a:extLst>
+          </p:cNvPr>
+          <p:cNvPicPr>
+            <a:picLocks noChangeAspect="1"/>
+          </p:cNvPicPr>
+          <p:nvPr/>
+        </p:nvPicPr>
+        <p:blipFill>
+          <a:blip r:embed="rId3">
+            <a:extLst>
+              <a:ext uri="{96DAC541-7B7A-43D3-8B79-37D633B846F1}">
+                <asvg:svgBlip xmlns:asvg="http://schemas.microsoft.com/office/drawing/2016/SVG/main" r:embed="rId4"/>
+              </a:ext>
+            </a:extLst>
+          </a:blip>
+          <a:stretch>
+            <a:fillRect/>
+          </a:stretch>
+        </p:blipFill>
+        <p:spPr>
+          <a:xfrm>
+            <a:off x="5045006" y="6356057"/>
+            <a:ext cx="6409575" cy="363174"/>
+          </a:xfrm>
+          <a:prstGeom prst="rect">
+            <a:avLst/>
+          </a:prstGeom>
+        </p:spPr>
+      </p:pic>
+      <p:sp>
+        <p:nvSpPr>
+          <p:cNvPr id="84" name="Marcador de número de diapositiva 83">
+            <a:extLst>
+              <a:ext uri="{FF2B5EF4-FFF2-40B4-BE49-F238E27FC236}">
+                <a16:creationId xmlns:a16="http://schemas.microsoft.com/office/drawing/2014/main" id="{42E75535-0FBC-4C5F-9AC5-7008914FCF56}"/>
+              </a:ext>
+            </a:extLst>
+          </p:cNvPr>
+          <p:cNvSpPr>
+            <a:spLocks noGrp="1"/>
+          </p:cNvSpPr>
+          <p:nvPr>
+            <p:ph type="sldNum" sz="quarter" idx="7"/>
+          </p:nvPr>
+        </p:nvSpPr>
+        <p:spPr/>
+        <p:txBody>
+          <a:bodyPr/>
+          <a:lstStyle/>
+          <a:p>
+            <a:fld id="{B6F15528-21DE-4FAA-801E-634DDDAF4B2B}" type="slidenum">
+              <a:rPr lang="es-ES" smtClean="0"/>
+              <a:t>14</a:t>
+            </a:fld>
+            <a:endParaRPr lang="es-ES"/>
+          </a:p>
+        </p:txBody>
+      </p:sp>
+      <p:sp>
+        <p:nvSpPr>
+          <p:cNvPr id="3" name="Marcador de pie de página 2">
+            <a:extLst>
+              <a:ext uri="{FF2B5EF4-FFF2-40B4-BE49-F238E27FC236}">
+                <a16:creationId xmlns:a16="http://schemas.microsoft.com/office/drawing/2014/main" id="{07AC2AFF-A7D9-EBCD-7C5A-6CDF61B69366}"/>
+              </a:ext>
+            </a:extLst>
+          </p:cNvPr>
+          <p:cNvSpPr>
+            <a:spLocks noGrp="1"/>
+          </p:cNvSpPr>
+          <p:nvPr>
+            <p:ph type="ftr" sz="quarter" idx="5"/>
+          </p:nvPr>
+        </p:nvSpPr>
+        <p:spPr/>
+        <p:txBody>
+          <a:bodyPr/>
+          <a:lstStyle/>
+          <a:p>
+            <a:pPr marL="12700">
+              <a:spcBef>
+                <a:spcPts val="15"/>
+              </a:spcBef>
+            </a:pPr>
+            <a:r>
+              <a:rPr lang="es-ES" spc="-5"/>
+              <a:t>LAB 2.0. COUPLERS</a:t>
+            </a:r>
+            <a:endParaRPr lang="es-ES" spc="-5" dirty="0"/>
+          </a:p>
+        </p:txBody>
+      </p:sp>
+      <p:sp>
+        <p:nvSpPr>
+          <p:cNvPr id="2" name="CuadroTexto 1">
+            <a:extLst>
+              <a:ext uri="{FF2B5EF4-FFF2-40B4-BE49-F238E27FC236}">
+                <a16:creationId xmlns:a16="http://schemas.microsoft.com/office/drawing/2014/main" id="{42D73A2E-0E5A-8A39-6B70-F9E94D6DBB70}"/>
+              </a:ext>
+            </a:extLst>
+          </p:cNvPr>
+          <p:cNvSpPr txBox="1"/>
+          <p:nvPr/>
+        </p:nvSpPr>
+        <p:spPr>
+          <a:xfrm>
+            <a:off x="609441" y="4819471"/>
+            <a:ext cx="11199971" cy="1200329"/>
+          </a:xfrm>
+          <a:prstGeom prst="rect">
+            <a:avLst/>
+          </a:prstGeom>
+          <a:solidFill>
+            <a:schemeClr val="bg1">
+              <a:lumMod val="95000"/>
+            </a:schemeClr>
+          </a:solidFill>
+          <a:ln w="28575">
+            <a:solidFill>
+              <a:srgbClr val="E0700D"/>
+            </a:solidFill>
+          </a:ln>
+        </p:spPr>
+        <p:txBody>
+          <a:bodyPr wrap="square" rtlCol="0">
+            <a:spAutoFit/>
+          </a:bodyPr>
+          <a:lstStyle/>
+          <a:p>
+            <a:pPr algn="just"/>
+            <a:r>
+              <a:rPr lang="en-US" sz="1200" dirty="0">
+                <a:latin typeface="Arial" panose="020B0604020202020204" pitchFamily="34" charset="0"/>
+                <a:cs typeface="Arial" panose="020B0604020202020204" pitchFamily="34" charset="0"/>
+              </a:rPr>
+              <a:t>Repeat all the design </a:t>
+            </a:r>
+            <a:r>
+              <a:rPr lang="en-US" sz="1200">
+                <a:latin typeface="Arial" panose="020B0604020202020204" pitchFamily="34" charset="0"/>
+                <a:cs typeface="Arial" panose="020B0604020202020204" pitchFamily="34" charset="0"/>
+              </a:rPr>
+              <a:t>process for a </a:t>
+            </a:r>
+            <a:r>
+              <a:rPr lang="en-US" sz="1200" dirty="0">
+                <a:latin typeface="Arial" panose="020B0604020202020204" pitchFamily="34" charset="0"/>
+                <a:cs typeface="Arial" panose="020B0604020202020204" pitchFamily="34" charset="0"/>
+              </a:rPr>
+              <a:t>1x4 MMI Coupler.  </a:t>
+            </a:r>
+          </a:p>
+          <a:p>
+            <a:pPr algn="just"/>
+            <a:endParaRPr lang="en-US" sz="1200" dirty="0">
+              <a:latin typeface="Arial" panose="020B0604020202020204" pitchFamily="34" charset="0"/>
+              <a:cs typeface="Arial" panose="020B0604020202020204" pitchFamily="34" charset="0"/>
+            </a:endParaRPr>
+          </a:p>
+          <a:p>
+            <a:pPr algn="just"/>
+            <a:endParaRPr lang="en-US" sz="1200" dirty="0">
+              <a:latin typeface="Arial" panose="020B0604020202020204" pitchFamily="34" charset="0"/>
+              <a:cs typeface="Arial" panose="020B0604020202020204" pitchFamily="34" charset="0"/>
+            </a:endParaRPr>
+          </a:p>
+          <a:p>
+            <a:pPr algn="just"/>
+            <a:endParaRPr lang="en-US" sz="1200" dirty="0">
+              <a:latin typeface="Arial" panose="020B0604020202020204" pitchFamily="34" charset="0"/>
+              <a:cs typeface="Arial" panose="020B0604020202020204" pitchFamily="34" charset="0"/>
+            </a:endParaRPr>
+          </a:p>
+          <a:p>
+            <a:pPr algn="just"/>
+            <a:endParaRPr lang="en-US" sz="1200" dirty="0">
+              <a:latin typeface="Arial" panose="020B0604020202020204" pitchFamily="34" charset="0"/>
+              <a:cs typeface="Arial" panose="020B0604020202020204" pitchFamily="34" charset="0"/>
+            </a:endParaRPr>
+          </a:p>
+          <a:p>
+            <a:pPr algn="just"/>
+            <a:endParaRPr lang="en-US" sz="1200" dirty="0">
+              <a:latin typeface="Arial" panose="020B0604020202020204" pitchFamily="34" charset="0"/>
+              <a:cs typeface="Arial" panose="020B0604020202020204" pitchFamily="34" charset="0"/>
+            </a:endParaRPr>
+          </a:p>
+        </p:txBody>
+      </p:sp>
+      <p:sp>
+        <p:nvSpPr>
+          <p:cNvPr id="7" name="Rectángulo 6">
+            <a:extLst>
+              <a:ext uri="{FF2B5EF4-FFF2-40B4-BE49-F238E27FC236}">
+                <a16:creationId xmlns:a16="http://schemas.microsoft.com/office/drawing/2014/main" id="{AFB86587-21D4-5A33-7D00-DDF170C919BA}"/>
+              </a:ext>
+            </a:extLst>
+          </p:cNvPr>
+          <p:cNvSpPr/>
+          <p:nvPr/>
+        </p:nvSpPr>
+        <p:spPr>
+          <a:xfrm>
+            <a:off x="609441" y="1377510"/>
+            <a:ext cx="11199971" cy="3306028"/>
+          </a:xfrm>
+          <a:prstGeom prst="rect">
+            <a:avLst/>
+          </a:prstGeom>
+          <a:noFill/>
+          <a:ln w="28575">
+            <a:solidFill>
+              <a:srgbClr val="E0700D"/>
+            </a:solidFill>
+          </a:ln>
+        </p:spPr>
+        <p:style>
+          <a:lnRef idx="2">
+            <a:schemeClr val="accent1">
+              <a:shade val="15000"/>
+            </a:schemeClr>
+          </a:lnRef>
+          <a:fillRef idx="1">
+            <a:schemeClr val="accent1"/>
+          </a:fillRef>
+          <a:effectRef idx="0">
+            <a:schemeClr val="accent1"/>
+          </a:effectRef>
+          <a:fontRef idx="minor">
+            <a:schemeClr val="lt1"/>
+          </a:fontRef>
+        </p:style>
+        <p:txBody>
+          <a:bodyPr rtlCol="0" anchor="ctr"/>
+          <a:lstStyle/>
+          <a:p>
+            <a:pPr algn="ctr"/>
+            <a:endParaRPr lang="en-US"/>
+          </a:p>
+        </p:txBody>
+      </p:sp>
+      <p:sp>
+        <p:nvSpPr>
+          <p:cNvPr id="8" name="CuadroTexto 7">
+            <a:extLst>
+              <a:ext uri="{FF2B5EF4-FFF2-40B4-BE49-F238E27FC236}">
                 <a16:creationId xmlns:a16="http://schemas.microsoft.com/office/drawing/2014/main" id="{C3506757-32B7-9151-DA89-AADDB7F7D093}"/>
               </a:ext>
             </a:extLst>
@@ -4873,7 +6195,7 @@
 </p:sld>
 </file>
 
-<file path=ppt/slides/slide12.xml><?xml version="1.0" encoding="utf-8"?>
+<file path=ppt/slides/slide15.xml><?xml version="1.0" encoding="utf-8"?>
 <p:sld xmlns:a="http://schemas.openxmlformats.org/drawingml/2006/main" xmlns:r="http://schemas.openxmlformats.org/officeDocument/2006/relationships" xmlns:p="http://schemas.openxmlformats.org/presentationml/2006/main">
   <p:cSld>
     <p:spTree>
@@ -5029,7 +6351,7 @@
           <a:p>
             <a:fld id="{B6F15528-21DE-4FAA-801E-634DDDAF4B2B}" type="slidenum">
               <a:rPr lang="es-ES" smtClean="0"/>
-              <a:t>12</a:t>
+              <a:t>15</a:t>
             </a:fld>
             <a:endParaRPr lang="es-ES"/>
           </a:p>
@@ -5585,7 +6907,7 @@
 </p:sld>
 </file>
 
-<file path=ppt/slides/slide13.xml><?xml version="1.0" encoding="utf-8"?>
+<file path=ppt/slides/slide16.xml><?xml version="1.0" encoding="utf-8"?>
 <p:sld xmlns:a="http://schemas.openxmlformats.org/drawingml/2006/main" xmlns:r="http://schemas.openxmlformats.org/officeDocument/2006/relationships" xmlns:p="http://schemas.openxmlformats.org/presentationml/2006/main">
   <p:cSld>
     <p:spTree>
@@ -5738,7 +7060,7 @@
           <a:p>
             <a:fld id="{B6F15528-21DE-4FAA-801E-634DDDAF4B2B}" type="slidenum">
               <a:rPr lang="es-ES" smtClean="0"/>
-              <a:t>13</a:t>
+              <a:t>16</a:t>
             </a:fld>
             <a:endParaRPr lang="es-ES"/>
           </a:p>
@@ -6271,7 +7593,7 @@
 </p:sld>
 </file>
 
-<file path=ppt/slides/slide14.xml><?xml version="1.0" encoding="utf-8"?>
+<file path=ppt/slides/slide17.xml><?xml version="1.0" encoding="utf-8"?>
 <p:sld xmlns:a="http://schemas.openxmlformats.org/drawingml/2006/main" xmlns:r="http://schemas.openxmlformats.org/officeDocument/2006/relationships" xmlns:p="http://schemas.openxmlformats.org/presentationml/2006/main">
   <p:cSld>
     <p:spTree>
@@ -6421,7 +7743,7 @@
           <a:p>
             <a:fld id="{B6F15528-21DE-4FAA-801E-634DDDAF4B2B}" type="slidenum">
               <a:rPr lang="es-ES" smtClean="0"/>
-              <a:t>14</a:t>
+              <a:t>17</a:t>
             </a:fld>
             <a:endParaRPr lang="es-ES"/>
           </a:p>
@@ -6977,7 +8299,7 @@
 </p:sld>
 </file>
 
-<file path=ppt/slides/slide15.xml><?xml version="1.0" encoding="utf-8"?>
+<file path=ppt/slides/slide18.xml><?xml version="1.0" encoding="utf-8"?>
 <p:sld xmlns:a="http://schemas.openxmlformats.org/drawingml/2006/main" xmlns:r="http://schemas.openxmlformats.org/officeDocument/2006/relationships" xmlns:p="http://schemas.openxmlformats.org/presentationml/2006/main">
   <p:cSld>
     <p:spTree>
@@ -7127,7 +8449,7 @@
           <a:p>
             <a:fld id="{B6F15528-21DE-4FAA-801E-634DDDAF4B2B}" type="slidenum">
               <a:rPr lang="es-ES" smtClean="0"/>
-              <a:t>15</a:t>
+              <a:t>18</a:t>
             </a:fld>
             <a:endParaRPr lang="es-ES"/>
           </a:p>
@@ -7674,7 +8996,7 @@
 </p:sld>
 </file>
 
-<file path=ppt/slides/slide16.xml><?xml version="1.0" encoding="utf-8"?>
+<file path=ppt/slides/slide19.xml><?xml version="1.0" encoding="utf-8"?>
 <p:sld xmlns:a="http://schemas.openxmlformats.org/drawingml/2006/main" xmlns:r="http://schemas.openxmlformats.org/officeDocument/2006/relationships" xmlns:p="http://schemas.openxmlformats.org/presentationml/2006/main">
   <p:cSld>
     <p:spTree>
@@ -7813,7 +9135,7 @@
           <a:p>
             <a:fld id="{B6F15528-21DE-4FAA-801E-634DDDAF4B2B}" type="slidenum">
               <a:rPr lang="es-ES" smtClean="0"/>
-              <a:t>16</a:t>
+              <a:t>19</a:t>
             </a:fld>
             <a:endParaRPr lang="es-ES"/>
           </a:p>
@@ -10226,7 +11548,7 @@
                 <a:latin typeface="Arial" panose="020B0604020202020204" pitchFamily="34" charset="0"/>
                 <a:cs typeface="Arial" panose="020B0604020202020204" pitchFamily="34" charset="0"/>
               </a:rPr>
-              <a:t>In the following the coupling coefficient in terms of the proportion L/</a:t>
+              <a:t>In the graph above, the coupling coefficient in terms of the proportion L/</a:t>
             </a:r>
             <a:r>
               <a:rPr lang="en-US" sz="1200" dirty="0" err="1">
@@ -10240,7 +11562,7 @@
                 <a:latin typeface="Arial" panose="020B0604020202020204" pitchFamily="34" charset="0"/>
                 <a:cs typeface="Arial" panose="020B0604020202020204" pitchFamily="34" charset="0"/>
               </a:rPr>
-              <a:t> is represented. This parameter indicates the proportion of energy transferred from one port to another depending on the distance of the directional coupler.</a:t>
+              <a:t> is represented. This parameter indicates the proportion of energy transferred from one port to another in terms of the length of the directional coupler.</a:t>
             </a:r>
           </a:p>
           <a:p>
@@ -10288,7 +11610,7 @@
                 <a:latin typeface="Arial" panose="020B0604020202020204" pitchFamily="34" charset="0"/>
                 <a:cs typeface="Arial" panose="020B0604020202020204" pitchFamily="34" charset="0"/>
               </a:rPr>
-              <a:t>=1.5, which means a distance of 1.5 times </a:t>
+              <a:t>=1.5, which means a length of 1.5 times </a:t>
             </a:r>
             <a:r>
               <a:rPr lang="en-US" sz="1200" dirty="0" err="1">
@@ -10578,7 +11900,7 @@
             </a:br>
             <a:r>
               <a:rPr lang="en-US" b="0" dirty="0"/>
-              <a:t>Width 0.6 - 1.6 µm (step 0.1 µm) – Wavelength 1.55 µm </a:t>
+              <a:t>Width 1.2 um – Wavelength 1.55 µm </a:t>
             </a:r>
             <a:endParaRPr lang="en-US" sz="2500" b="0" dirty="0">
               <a:latin typeface="+mj-lt"/>
@@ -10701,7 +12023,7 @@
         <p:spPr>
           <a:xfrm>
             <a:off x="609441" y="4860334"/>
-            <a:ext cx="11199971" cy="1200329"/>
+            <a:ext cx="11199971" cy="1384995"/>
           </a:xfrm>
           <a:prstGeom prst="rect">
             <a:avLst/>
@@ -10748,10 +12070,27 @@
           </a:p>
           <a:p>
             <a:pPr algn="just"/>
-            <a:endParaRPr lang="en-US" sz="1200" dirty="0">
-              <a:latin typeface="Arial" panose="020B0604020202020204" pitchFamily="34" charset="0"/>
-              <a:cs typeface="Arial" panose="020B0604020202020204" pitchFamily="34" charset="0"/>
-            </a:endParaRPr>
+            <a:r>
+              <a:rPr lang="en-US" sz="1200" dirty="0">
+                <a:latin typeface="Arial" panose="020B0604020202020204" pitchFamily="34" charset="0"/>
+                <a:cs typeface="Arial" panose="020B0604020202020204" pitchFamily="34" charset="0"/>
+              </a:rPr>
+              <a:t>The coupling relationship ratio is shown in the printed data as 0.0013 and 0.9987 for the respective outputs. This results are coherent with the input parameters, since the DC length corresponds to </a:t>
+            </a:r>
+            <a:r>
+              <a:rPr lang="en-US" sz="1200" dirty="0" err="1">
+                <a:latin typeface="Arial" panose="020B0604020202020204" pitchFamily="34" charset="0"/>
+                <a:cs typeface="Arial" panose="020B0604020202020204" pitchFamily="34" charset="0"/>
+              </a:rPr>
+              <a:t>L_pi</a:t>
+            </a:r>
+            <a:r>
+              <a:rPr lang="en-US" sz="1200" dirty="0">
+                <a:latin typeface="Arial" panose="020B0604020202020204" pitchFamily="34" charset="0"/>
+                <a:cs typeface="Arial" panose="020B0604020202020204" pitchFamily="34" charset="0"/>
+              </a:rPr>
+              <a:t>, thus obtaining a quasi-complete energy transfer from the lower to the upper port.  </a:t>
+            </a:r>
           </a:p>
           <a:p>
             <a:pPr algn="just"/>
@@ -10762,10 +12101,27 @@
           </a:p>
           <a:p>
             <a:pPr algn="just"/>
-            <a:endParaRPr lang="en-US" sz="1200" dirty="0">
-              <a:latin typeface="Arial" panose="020B0604020202020204" pitchFamily="34" charset="0"/>
-              <a:cs typeface="Arial" panose="020B0604020202020204" pitchFamily="34" charset="0"/>
-            </a:endParaRPr>
+            <a:r>
+              <a:rPr lang="en-US" sz="1200" dirty="0">
+                <a:latin typeface="Arial" panose="020B0604020202020204" pitchFamily="34" charset="0"/>
+                <a:cs typeface="Arial" panose="020B0604020202020204" pitchFamily="34" charset="0"/>
+              </a:rPr>
+              <a:t>The solver also provides the calculation of </a:t>
+            </a:r>
+            <a:r>
+              <a:rPr lang="en-US" sz="1200" dirty="0" err="1">
+                <a:latin typeface="Arial" panose="020B0604020202020204" pitchFamily="34" charset="0"/>
+                <a:cs typeface="Arial" panose="020B0604020202020204" pitchFamily="34" charset="0"/>
+              </a:rPr>
+              <a:t>L_pi</a:t>
+            </a:r>
+            <a:r>
+              <a:rPr lang="en-US" sz="1200" dirty="0">
+                <a:latin typeface="Arial" panose="020B0604020202020204" pitchFamily="34" charset="0"/>
+                <a:cs typeface="Arial" panose="020B0604020202020204" pitchFamily="34" charset="0"/>
+              </a:rPr>
+              <a:t> for the given waveguide and gap dimensions, which is 94.0274 um.</a:t>
+            </a:r>
           </a:p>
           <a:p>
             <a:pPr algn="just"/>
@@ -10776,6 +12132,20 @@
           </a:p>
           <a:p>
             <a:pPr algn="just"/>
+            <a:r>
+              <a:rPr lang="en-US" sz="1200" dirty="0">
+                <a:latin typeface="Arial" panose="020B0604020202020204" pitchFamily="34" charset="0"/>
+                <a:cs typeface="Arial" panose="020B0604020202020204" pitchFamily="34" charset="0"/>
+              </a:rPr>
+              <a:t>Finally, a difference between the input and output optical powers is observed, resulting in an excess loss of 0.1851 </a:t>
+            </a:r>
+            <a:r>
+              <a:rPr lang="en-US" sz="1200" dirty="0" err="1">
+                <a:latin typeface="Arial" panose="020B0604020202020204" pitchFamily="34" charset="0"/>
+                <a:cs typeface="Arial" panose="020B0604020202020204" pitchFamily="34" charset="0"/>
+              </a:rPr>
+              <a:t>dB.</a:t>
+            </a:r>
             <a:endParaRPr lang="en-US" sz="1200" dirty="0">
               <a:latin typeface="Arial" panose="020B0604020202020204" pitchFamily="34" charset="0"/>
               <a:cs typeface="Arial" panose="020B0604020202020204" pitchFamily="34" charset="0"/>
@@ -10886,6 +12256,76 @@
           </a:p>
         </p:txBody>
       </p:sp>
+      <p:pic>
+        <p:nvPicPr>
+          <p:cNvPr id="5" name="Picture 4" descr="A screenshot of a computer&#10;&#10;AI-generated content may be incorrect.">
+            <a:extLst>
+              <a:ext uri="{FF2B5EF4-FFF2-40B4-BE49-F238E27FC236}">
+                <a16:creationId xmlns:a16="http://schemas.microsoft.com/office/drawing/2014/main" id="{14D5B803-F932-B81A-2687-7A07915CE350}"/>
+              </a:ext>
+            </a:extLst>
+          </p:cNvPr>
+          <p:cNvPicPr>
+            <a:picLocks noChangeAspect="1"/>
+          </p:cNvPicPr>
+          <p:nvPr/>
+        </p:nvPicPr>
+        <p:blipFill>
+          <a:blip r:embed="rId5"/>
+          <a:stretch>
+            <a:fillRect/>
+          </a:stretch>
+        </p:blipFill>
+        <p:spPr>
+          <a:xfrm>
+            <a:off x="3142992" y="1487922"/>
+            <a:ext cx="5296416" cy="3166929"/>
+          </a:xfrm>
+          <a:prstGeom prst="rect">
+            <a:avLst/>
+          </a:prstGeom>
+        </p:spPr>
+      </p:pic>
+      <p:sp>
+        <p:nvSpPr>
+          <p:cNvPr id="6" name="TextBox 5">
+            <a:extLst>
+              <a:ext uri="{FF2B5EF4-FFF2-40B4-BE49-F238E27FC236}">
+                <a16:creationId xmlns:a16="http://schemas.microsoft.com/office/drawing/2014/main" id="{2B77231A-F7C6-C229-0C6C-AE70E6DAD40A}"/>
+              </a:ext>
+            </a:extLst>
+          </p:cNvPr>
+          <p:cNvSpPr txBox="1"/>
+          <p:nvPr/>
+        </p:nvSpPr>
+        <p:spPr>
+          <a:xfrm>
+            <a:off x="1577820" y="1710268"/>
+            <a:ext cx="914400" cy="369332"/>
+          </a:xfrm>
+          <a:prstGeom prst="rect">
+            <a:avLst/>
+          </a:prstGeom>
+          <a:noFill/>
+        </p:spPr>
+        <p:txBody>
+          <a:bodyPr wrap="square" rtlCol="0">
+            <a:spAutoFit/>
+          </a:bodyPr>
+          <a:lstStyle/>
+          <a:p>
+            <a:r>
+              <a:rPr lang="en-GB" dirty="0"/>
+              <a:t>L = </a:t>
+            </a:r>
+            <a:r>
+              <a:rPr lang="en-GB" dirty="0" err="1"/>
+              <a:t>L_pi</a:t>
+            </a:r>
+            <a:endParaRPr lang="en-GB" dirty="0"/>
+          </a:p>
+        </p:txBody>
+      </p:sp>
     </p:spTree>
     <p:extLst>
       <p:ext uri="{BB962C8B-B14F-4D97-AF65-F5344CB8AC3E}">
@@ -10900,6 +12340,1119 @@
 </file>
 
 <file path=ppt/slides/slide6.xml><?xml version="1.0" encoding="utf-8"?>
+<p:sld xmlns:a="http://schemas.openxmlformats.org/drawingml/2006/main" xmlns:r="http://schemas.openxmlformats.org/officeDocument/2006/relationships" xmlns:p="http://schemas.openxmlformats.org/presentationml/2006/main">
+  <p:cSld>
+    <p:spTree>
+      <p:nvGrpSpPr>
+        <p:cNvPr id="1" name="">
+          <a:extLst>
+            <a:ext uri="{FF2B5EF4-FFF2-40B4-BE49-F238E27FC236}">
+              <a16:creationId xmlns:a16="http://schemas.microsoft.com/office/drawing/2014/main" id="{2C09930F-24B2-796B-071C-7A7CC043A260}"/>
+            </a:ext>
+          </a:extLst>
+        </p:cNvPr>
+        <p:cNvGrpSpPr/>
+        <p:nvPr/>
+      </p:nvGrpSpPr>
+      <p:grpSpPr>
+        <a:xfrm>
+          <a:off x="0" y="0"/>
+          <a:ext cx="0" cy="0"/>
+          <a:chOff x="0" y="0"/>
+          <a:chExt cx="0" cy="0"/>
+        </a:xfrm>
+      </p:grpSpPr>
+      <p:sp>
+        <p:nvSpPr>
+          <p:cNvPr id="16" name="object 16">
+            <a:extLst>
+              <a:ext uri="{FF2B5EF4-FFF2-40B4-BE49-F238E27FC236}">
+                <a16:creationId xmlns:a16="http://schemas.microsoft.com/office/drawing/2014/main" id="{72D11695-E050-3D3C-D85C-C16107B79770}"/>
+              </a:ext>
+            </a:extLst>
+          </p:cNvPr>
+          <p:cNvSpPr txBox="1">
+            <a:spLocks noGrp="1"/>
+          </p:cNvSpPr>
+          <p:nvPr>
+            <p:ph type="title"/>
+          </p:nvPr>
+        </p:nvSpPr>
+        <p:spPr>
+          <a:xfrm>
+            <a:off x="685800" y="408883"/>
+            <a:ext cx="10994410" cy="705321"/>
+          </a:xfrm>
+          <a:prstGeom prst="rect">
+            <a:avLst/>
+          </a:prstGeom>
+        </p:spPr>
+        <p:txBody>
+          <a:bodyPr vert="horz" wrap="square" lIns="0" tIns="12700" rIns="0" bIns="0" rtlCol="0">
+            <a:spAutoFit/>
+          </a:bodyPr>
+          <a:lstStyle/>
+          <a:p>
+            <a:pPr marL="12700">
+              <a:lnSpc>
+                <a:spcPct val="100000"/>
+              </a:lnSpc>
+              <a:spcBef>
+                <a:spcPts val="100"/>
+              </a:spcBef>
+            </a:pPr>
+            <a:r>
+              <a:rPr lang="en-US" sz="2500" dirty="0"/>
+              <a:t>Learning outcome #2 – 2x2 Directional Coupler</a:t>
+            </a:r>
+            <a:br>
+              <a:rPr lang="en-US" sz="2500" spc="-5" dirty="0">
+                <a:latin typeface="+mj-lt"/>
+                <a:cs typeface="Lucida Sans"/>
+              </a:rPr>
+            </a:br>
+            <a:r>
+              <a:rPr lang="en-US" dirty="0"/>
+              <a:t>Gap sweep </a:t>
+            </a:r>
+            <a:r>
+              <a:rPr lang="en-US" b="0" dirty="0"/>
+              <a:t>0.6 - 1.6 µm (step 0.1 µm) – Wavelength 1.55 µm </a:t>
+            </a:r>
+            <a:endParaRPr lang="en-US" sz="2500" b="0" dirty="0">
+              <a:latin typeface="+mj-lt"/>
+              <a:cs typeface="Lucida Sans"/>
+            </a:endParaRPr>
+          </a:p>
+        </p:txBody>
+      </p:sp>
+      <p:pic>
+        <p:nvPicPr>
+          <p:cNvPr id="83" name="Gráfico 82">
+            <a:extLst>
+              <a:ext uri="{FF2B5EF4-FFF2-40B4-BE49-F238E27FC236}">
+                <a16:creationId xmlns:a16="http://schemas.microsoft.com/office/drawing/2014/main" id="{8E237BD4-2147-FEE9-F257-A2A755C25F2E}"/>
+              </a:ext>
+            </a:extLst>
+          </p:cNvPr>
+          <p:cNvPicPr>
+            <a:picLocks noChangeAspect="1"/>
+          </p:cNvPicPr>
+          <p:nvPr/>
+        </p:nvPicPr>
+        <p:blipFill>
+          <a:blip r:embed="rId3">
+            <a:extLst>
+              <a:ext uri="{96DAC541-7B7A-43D3-8B79-37D633B846F1}">
+                <asvg:svgBlip xmlns:asvg="http://schemas.microsoft.com/office/drawing/2016/SVG/main" r:embed="rId4"/>
+              </a:ext>
+            </a:extLst>
+          </a:blip>
+          <a:stretch>
+            <a:fillRect/>
+          </a:stretch>
+        </p:blipFill>
+        <p:spPr>
+          <a:xfrm>
+            <a:off x="5045006" y="6356057"/>
+            <a:ext cx="6409575" cy="363174"/>
+          </a:xfrm>
+          <a:prstGeom prst="rect">
+            <a:avLst/>
+          </a:prstGeom>
+        </p:spPr>
+      </p:pic>
+      <p:sp>
+        <p:nvSpPr>
+          <p:cNvPr id="84" name="Marcador de número de diapositiva 83">
+            <a:extLst>
+              <a:ext uri="{FF2B5EF4-FFF2-40B4-BE49-F238E27FC236}">
+                <a16:creationId xmlns:a16="http://schemas.microsoft.com/office/drawing/2014/main" id="{77B836F2-3288-F895-8D72-8902E13AF630}"/>
+              </a:ext>
+            </a:extLst>
+          </p:cNvPr>
+          <p:cNvSpPr>
+            <a:spLocks noGrp="1"/>
+          </p:cNvSpPr>
+          <p:nvPr>
+            <p:ph type="sldNum" sz="quarter" idx="7"/>
+          </p:nvPr>
+        </p:nvSpPr>
+        <p:spPr/>
+        <p:txBody>
+          <a:bodyPr/>
+          <a:lstStyle/>
+          <a:p>
+            <a:fld id="{B6F15528-21DE-4FAA-801E-634DDDAF4B2B}" type="slidenum">
+              <a:rPr lang="es-ES" smtClean="0"/>
+              <a:t>6</a:t>
+            </a:fld>
+            <a:endParaRPr lang="es-ES"/>
+          </a:p>
+        </p:txBody>
+      </p:sp>
+      <p:sp>
+        <p:nvSpPr>
+          <p:cNvPr id="3" name="Marcador de pie de página 2">
+            <a:extLst>
+              <a:ext uri="{FF2B5EF4-FFF2-40B4-BE49-F238E27FC236}">
+                <a16:creationId xmlns:a16="http://schemas.microsoft.com/office/drawing/2014/main" id="{21475591-9C54-D9B6-DFBA-BF28195A2F6B}"/>
+              </a:ext>
+            </a:extLst>
+          </p:cNvPr>
+          <p:cNvSpPr>
+            <a:spLocks noGrp="1"/>
+          </p:cNvSpPr>
+          <p:nvPr>
+            <p:ph type="ftr" sz="quarter" idx="5"/>
+          </p:nvPr>
+        </p:nvSpPr>
+        <p:spPr/>
+        <p:txBody>
+          <a:bodyPr/>
+          <a:lstStyle/>
+          <a:p>
+            <a:pPr marL="12700">
+              <a:spcBef>
+                <a:spcPts val="15"/>
+              </a:spcBef>
+            </a:pPr>
+            <a:r>
+              <a:rPr lang="es-ES" spc="-5"/>
+              <a:t>LAB 2.0. COUPLERS</a:t>
+            </a:r>
+            <a:endParaRPr lang="es-ES" spc="-5" dirty="0"/>
+          </a:p>
+        </p:txBody>
+      </p:sp>
+      <p:sp>
+        <p:nvSpPr>
+          <p:cNvPr id="2" name="CuadroTexto 1">
+            <a:extLst>
+              <a:ext uri="{FF2B5EF4-FFF2-40B4-BE49-F238E27FC236}">
+                <a16:creationId xmlns:a16="http://schemas.microsoft.com/office/drawing/2014/main" id="{70560732-BAD1-1028-775F-695382A8F601}"/>
+              </a:ext>
+            </a:extLst>
+          </p:cNvPr>
+          <p:cNvSpPr txBox="1"/>
+          <p:nvPr/>
+        </p:nvSpPr>
+        <p:spPr>
+          <a:xfrm>
+            <a:off x="609441" y="4860334"/>
+            <a:ext cx="11199971" cy="1200329"/>
+          </a:xfrm>
+          <a:prstGeom prst="rect">
+            <a:avLst/>
+          </a:prstGeom>
+          <a:solidFill>
+            <a:schemeClr val="bg1">
+              <a:lumMod val="95000"/>
+            </a:schemeClr>
+          </a:solidFill>
+          <a:ln w="28575">
+            <a:solidFill>
+              <a:srgbClr val="E0700D"/>
+            </a:solidFill>
+          </a:ln>
+        </p:spPr>
+        <p:txBody>
+          <a:bodyPr wrap="square" rtlCol="0">
+            <a:spAutoFit/>
+          </a:bodyPr>
+          <a:lstStyle/>
+          <a:p>
+            <a:pPr algn="just"/>
+            <a:r>
+              <a:rPr lang="en-US" sz="1200" dirty="0">
+                <a:latin typeface="Arial" panose="020B0604020202020204" pitchFamily="34" charset="0"/>
+                <a:cs typeface="Arial" panose="020B0604020202020204" pitchFamily="34" charset="0"/>
+              </a:rPr>
+              <a:t>Comment results (Coupling relationship, </a:t>
+            </a:r>
+            <a:r>
+              <a:rPr lang="en-US" sz="1200" dirty="0" err="1">
+                <a:latin typeface="Arial" panose="020B0604020202020204" pitchFamily="34" charset="0"/>
+                <a:cs typeface="Arial" panose="020B0604020202020204" pitchFamily="34" charset="0"/>
+              </a:rPr>
+              <a:t>Lpi</a:t>
+            </a:r>
+            <a:r>
+              <a:rPr lang="en-US" sz="1200" dirty="0">
+                <a:latin typeface="Arial" panose="020B0604020202020204" pitchFamily="34" charset="0"/>
+                <a:cs typeface="Arial" panose="020B0604020202020204" pitchFamily="34" charset="0"/>
+              </a:rPr>
+              <a:t>, losses, … )</a:t>
+            </a:r>
+          </a:p>
+          <a:p>
+            <a:pPr algn="just"/>
+            <a:endParaRPr lang="en-US" sz="1200" dirty="0">
+              <a:latin typeface="Arial" panose="020B0604020202020204" pitchFamily="34" charset="0"/>
+              <a:cs typeface="Arial" panose="020B0604020202020204" pitchFamily="34" charset="0"/>
+            </a:endParaRPr>
+          </a:p>
+          <a:p>
+            <a:pPr algn="just"/>
+            <a:r>
+              <a:rPr lang="en-US" sz="1200" dirty="0">
+                <a:latin typeface="Arial" panose="020B0604020202020204" pitchFamily="34" charset="0"/>
+                <a:cs typeface="Arial" panose="020B0604020202020204" pitchFamily="34" charset="0"/>
+              </a:rPr>
+              <a:t>In the graphs above, the power distribution in the longitudinal plane of the directional coupler has been simulated for a gap sweep of 0.6 – 1.6 um, but only the first six have been pasted for lack of space.</a:t>
+            </a:r>
+          </a:p>
+          <a:p>
+            <a:pPr algn="just"/>
+            <a:r>
+              <a:rPr lang="en-US" sz="1200" dirty="0">
+                <a:latin typeface="Arial" panose="020B0604020202020204" pitchFamily="34" charset="0"/>
+                <a:cs typeface="Arial" panose="020B0604020202020204" pitchFamily="34" charset="0"/>
+              </a:rPr>
+              <a:t>Then, a length of </a:t>
+            </a:r>
+            <a:r>
+              <a:rPr lang="en-US" sz="1200" dirty="0" err="1">
+                <a:latin typeface="Arial" panose="020B0604020202020204" pitchFamily="34" charset="0"/>
+                <a:cs typeface="Arial" panose="020B0604020202020204" pitchFamily="34" charset="0"/>
+              </a:rPr>
+              <a:t>L_pi</a:t>
+            </a:r>
+            <a:r>
+              <a:rPr lang="en-US" sz="1200" dirty="0">
+                <a:latin typeface="Arial" panose="020B0604020202020204" pitchFamily="34" charset="0"/>
+                <a:cs typeface="Arial" panose="020B0604020202020204" pitchFamily="34" charset="0"/>
+              </a:rPr>
+              <a:t>/2 was selected for the simulation of the device, obtaining the expected 50:50 power splitting for every configuration.</a:t>
+            </a:r>
+          </a:p>
+          <a:p>
+            <a:pPr algn="just"/>
+            <a:endParaRPr lang="en-US" sz="1200" dirty="0">
+              <a:latin typeface="Arial" panose="020B0604020202020204" pitchFamily="34" charset="0"/>
+              <a:cs typeface="Arial" panose="020B0604020202020204" pitchFamily="34" charset="0"/>
+            </a:endParaRPr>
+          </a:p>
+        </p:txBody>
+      </p:sp>
+      <p:sp>
+        <p:nvSpPr>
+          <p:cNvPr id="7" name="Rectángulo 6">
+            <a:extLst>
+              <a:ext uri="{FF2B5EF4-FFF2-40B4-BE49-F238E27FC236}">
+                <a16:creationId xmlns:a16="http://schemas.microsoft.com/office/drawing/2014/main" id="{7EB7C9AB-76D3-596E-0485-F4615E610583}"/>
+              </a:ext>
+            </a:extLst>
+          </p:cNvPr>
+          <p:cNvSpPr/>
+          <p:nvPr/>
+        </p:nvSpPr>
+        <p:spPr>
+          <a:xfrm>
+            <a:off x="609441" y="1418373"/>
+            <a:ext cx="11199971" cy="3306028"/>
+          </a:xfrm>
+          <a:prstGeom prst="rect">
+            <a:avLst/>
+          </a:prstGeom>
+          <a:noFill/>
+          <a:ln w="28575">
+            <a:solidFill>
+              <a:srgbClr val="E0700D"/>
+            </a:solidFill>
+          </a:ln>
+        </p:spPr>
+        <p:style>
+          <a:lnRef idx="2">
+            <a:schemeClr val="accent1">
+              <a:shade val="15000"/>
+            </a:schemeClr>
+          </a:lnRef>
+          <a:fillRef idx="1">
+            <a:schemeClr val="accent1"/>
+          </a:fillRef>
+          <a:effectRef idx="0">
+            <a:schemeClr val="accent1"/>
+          </a:effectRef>
+          <a:fontRef idx="minor">
+            <a:schemeClr val="lt1"/>
+          </a:fontRef>
+        </p:style>
+        <p:txBody>
+          <a:bodyPr rtlCol="0" anchor="ctr"/>
+          <a:lstStyle/>
+          <a:p>
+            <a:pPr algn="ctr"/>
+            <a:endParaRPr lang="en-US"/>
+          </a:p>
+        </p:txBody>
+      </p:sp>
+      <p:pic>
+        <p:nvPicPr>
+          <p:cNvPr id="9" name="Picture 8">
+            <a:extLst>
+              <a:ext uri="{FF2B5EF4-FFF2-40B4-BE49-F238E27FC236}">
+                <a16:creationId xmlns:a16="http://schemas.microsoft.com/office/drawing/2014/main" id="{3079B6A3-81B5-658B-53CD-B2F9F8BE1D7A}"/>
+              </a:ext>
+            </a:extLst>
+          </p:cNvPr>
+          <p:cNvPicPr>
+            <a:picLocks noChangeAspect="1"/>
+          </p:cNvPicPr>
+          <p:nvPr/>
+        </p:nvPicPr>
+        <p:blipFill>
+          <a:blip r:embed="rId5"/>
+          <a:stretch>
+            <a:fillRect/>
+          </a:stretch>
+        </p:blipFill>
+        <p:spPr>
+          <a:xfrm>
+            <a:off x="998057" y="1738692"/>
+            <a:ext cx="3396919" cy="863923"/>
+          </a:xfrm>
+          <a:prstGeom prst="rect">
+            <a:avLst/>
+          </a:prstGeom>
+        </p:spPr>
+      </p:pic>
+      <p:pic>
+        <p:nvPicPr>
+          <p:cNvPr id="11" name="Picture 10">
+            <a:extLst>
+              <a:ext uri="{FF2B5EF4-FFF2-40B4-BE49-F238E27FC236}">
+                <a16:creationId xmlns:a16="http://schemas.microsoft.com/office/drawing/2014/main" id="{3CE1EC12-8B0C-CEC3-125F-129B2E10798B}"/>
+              </a:ext>
+            </a:extLst>
+          </p:cNvPr>
+          <p:cNvPicPr>
+            <a:picLocks noChangeAspect="1"/>
+          </p:cNvPicPr>
+          <p:nvPr/>
+        </p:nvPicPr>
+        <p:blipFill>
+          <a:blip r:embed="rId6"/>
+          <a:stretch>
+            <a:fillRect/>
+          </a:stretch>
+        </p:blipFill>
+        <p:spPr>
+          <a:xfrm>
+            <a:off x="817214" y="2684043"/>
+            <a:ext cx="3758603" cy="864869"/>
+          </a:xfrm>
+          <a:prstGeom prst="rect">
+            <a:avLst/>
+          </a:prstGeom>
+        </p:spPr>
+      </p:pic>
+      <p:pic>
+        <p:nvPicPr>
+          <p:cNvPr id="13" name="Picture 12">
+            <a:extLst>
+              <a:ext uri="{FF2B5EF4-FFF2-40B4-BE49-F238E27FC236}">
+                <a16:creationId xmlns:a16="http://schemas.microsoft.com/office/drawing/2014/main" id="{E6A78A7A-FFBD-B106-B1B6-AA5A9E2716BD}"/>
+              </a:ext>
+            </a:extLst>
+          </p:cNvPr>
+          <p:cNvPicPr>
+            <a:picLocks noChangeAspect="1"/>
+          </p:cNvPicPr>
+          <p:nvPr/>
+        </p:nvPicPr>
+        <p:blipFill>
+          <a:blip r:embed="rId7"/>
+          <a:stretch>
+            <a:fillRect/>
+          </a:stretch>
+        </p:blipFill>
+        <p:spPr>
+          <a:xfrm>
+            <a:off x="914400" y="3728820"/>
+            <a:ext cx="3758603" cy="793338"/>
+          </a:xfrm>
+          <a:prstGeom prst="rect">
+            <a:avLst/>
+          </a:prstGeom>
+        </p:spPr>
+      </p:pic>
+      <p:pic>
+        <p:nvPicPr>
+          <p:cNvPr id="15" name="Picture 14">
+            <a:extLst>
+              <a:ext uri="{FF2B5EF4-FFF2-40B4-BE49-F238E27FC236}">
+                <a16:creationId xmlns:a16="http://schemas.microsoft.com/office/drawing/2014/main" id="{1B83349D-C6B7-7291-9F44-4C32A950C94A}"/>
+              </a:ext>
+            </a:extLst>
+          </p:cNvPr>
+          <p:cNvPicPr>
+            <a:picLocks noChangeAspect="1"/>
+          </p:cNvPicPr>
+          <p:nvPr/>
+        </p:nvPicPr>
+        <p:blipFill>
+          <a:blip r:embed="rId8"/>
+          <a:stretch>
+            <a:fillRect/>
+          </a:stretch>
+        </p:blipFill>
+        <p:spPr>
+          <a:xfrm>
+            <a:off x="5775899" y="1682180"/>
+            <a:ext cx="4666767" cy="920435"/>
+          </a:xfrm>
+          <a:prstGeom prst="rect">
+            <a:avLst/>
+          </a:prstGeom>
+        </p:spPr>
+      </p:pic>
+      <p:pic>
+        <p:nvPicPr>
+          <p:cNvPr id="18" name="Picture 17">
+            <a:extLst>
+              <a:ext uri="{FF2B5EF4-FFF2-40B4-BE49-F238E27FC236}">
+                <a16:creationId xmlns:a16="http://schemas.microsoft.com/office/drawing/2014/main" id="{80D1D729-A210-3B69-4B9B-2E476E857192}"/>
+              </a:ext>
+            </a:extLst>
+          </p:cNvPr>
+          <p:cNvPicPr>
+            <a:picLocks noChangeAspect="1"/>
+          </p:cNvPicPr>
+          <p:nvPr/>
+        </p:nvPicPr>
+        <p:blipFill>
+          <a:blip r:embed="rId9"/>
+          <a:stretch>
+            <a:fillRect/>
+          </a:stretch>
+        </p:blipFill>
+        <p:spPr>
+          <a:xfrm>
+            <a:off x="5775899" y="2713343"/>
+            <a:ext cx="4753164" cy="879911"/>
+          </a:xfrm>
+          <a:prstGeom prst="rect">
+            <a:avLst/>
+          </a:prstGeom>
+        </p:spPr>
+      </p:pic>
+      <p:pic>
+        <p:nvPicPr>
+          <p:cNvPr id="20" name="Picture 19">
+            <a:extLst>
+              <a:ext uri="{FF2B5EF4-FFF2-40B4-BE49-F238E27FC236}">
+                <a16:creationId xmlns:a16="http://schemas.microsoft.com/office/drawing/2014/main" id="{8D1B76AB-FD89-3441-8B07-D4B7E51315DC}"/>
+              </a:ext>
+            </a:extLst>
+          </p:cNvPr>
+          <p:cNvPicPr>
+            <a:picLocks noChangeAspect="1"/>
+          </p:cNvPicPr>
+          <p:nvPr/>
+        </p:nvPicPr>
+        <p:blipFill>
+          <a:blip r:embed="rId10"/>
+          <a:stretch>
+            <a:fillRect/>
+          </a:stretch>
+        </p:blipFill>
+        <p:spPr>
+          <a:xfrm>
+            <a:off x="5947084" y="3734108"/>
+            <a:ext cx="4495582" cy="793338"/>
+          </a:xfrm>
+          <a:prstGeom prst="rect">
+            <a:avLst/>
+          </a:prstGeom>
+        </p:spPr>
+      </p:pic>
+    </p:spTree>
+    <p:extLst>
+      <p:ext uri="{BB962C8B-B14F-4D97-AF65-F5344CB8AC3E}">
+        <p14:creationId xmlns:p14="http://schemas.microsoft.com/office/powerpoint/2010/main" val="3053267259"/>
+      </p:ext>
+    </p:extLst>
+  </p:cSld>
+  <p:clrMapOvr>
+    <a:masterClrMapping/>
+  </p:clrMapOvr>
+</p:sld>
+</file>
+
+<file path=ppt/slides/slide7.xml><?xml version="1.0" encoding="utf-8"?>
+<p:sld xmlns:a="http://schemas.openxmlformats.org/drawingml/2006/main" xmlns:r="http://schemas.openxmlformats.org/officeDocument/2006/relationships" xmlns:p="http://schemas.openxmlformats.org/presentationml/2006/main">
+  <p:cSld>
+    <p:spTree>
+      <p:nvGrpSpPr>
+        <p:cNvPr id="1" name="">
+          <a:extLst>
+            <a:ext uri="{FF2B5EF4-FFF2-40B4-BE49-F238E27FC236}">
+              <a16:creationId xmlns:a16="http://schemas.microsoft.com/office/drawing/2014/main" id="{5973DF7A-49A7-1E9D-C94D-3F00553A93CD}"/>
+            </a:ext>
+          </a:extLst>
+        </p:cNvPr>
+        <p:cNvGrpSpPr/>
+        <p:nvPr/>
+      </p:nvGrpSpPr>
+      <p:grpSpPr>
+        <a:xfrm>
+          <a:off x="0" y="0"/>
+          <a:ext cx="0" cy="0"/>
+          <a:chOff x="0" y="0"/>
+          <a:chExt cx="0" cy="0"/>
+        </a:xfrm>
+      </p:grpSpPr>
+      <p:sp>
+        <p:nvSpPr>
+          <p:cNvPr id="16" name="object 16">
+            <a:extLst>
+              <a:ext uri="{FF2B5EF4-FFF2-40B4-BE49-F238E27FC236}">
+                <a16:creationId xmlns:a16="http://schemas.microsoft.com/office/drawing/2014/main" id="{C2E839C9-D37D-C91C-A429-94B1FE2884CC}"/>
+              </a:ext>
+            </a:extLst>
+          </p:cNvPr>
+          <p:cNvSpPr txBox="1">
+            <a:spLocks noGrp="1"/>
+          </p:cNvSpPr>
+          <p:nvPr>
+            <p:ph type="title"/>
+          </p:nvPr>
+        </p:nvSpPr>
+        <p:spPr>
+          <a:xfrm>
+            <a:off x="685800" y="408883"/>
+            <a:ext cx="10994410" cy="705321"/>
+          </a:xfrm>
+          <a:prstGeom prst="rect">
+            <a:avLst/>
+          </a:prstGeom>
+        </p:spPr>
+        <p:txBody>
+          <a:bodyPr vert="horz" wrap="square" lIns="0" tIns="12700" rIns="0" bIns="0" rtlCol="0">
+            <a:spAutoFit/>
+          </a:bodyPr>
+          <a:lstStyle/>
+          <a:p>
+            <a:pPr marL="12700">
+              <a:lnSpc>
+                <a:spcPct val="100000"/>
+              </a:lnSpc>
+              <a:spcBef>
+                <a:spcPts val="100"/>
+              </a:spcBef>
+            </a:pPr>
+            <a:r>
+              <a:rPr lang="en-US" sz="2500" dirty="0"/>
+              <a:t>Learning outcome #2 – 2x2 Directional Coupler</a:t>
+            </a:r>
+            <a:br>
+              <a:rPr lang="en-US" sz="2500" spc="-5" dirty="0">
+                <a:latin typeface="+mj-lt"/>
+                <a:cs typeface="Lucida Sans"/>
+              </a:rPr>
+            </a:br>
+            <a:r>
+              <a:rPr lang="en-US" dirty="0"/>
+              <a:t>Gap sweep </a:t>
+            </a:r>
+            <a:r>
+              <a:rPr lang="en-US" b="0" dirty="0"/>
+              <a:t>0.6 - 1.6 µm (step 0.1 µm) – Wavelength 1.55 µm </a:t>
+            </a:r>
+            <a:endParaRPr lang="en-US" sz="2500" b="0" dirty="0">
+              <a:latin typeface="+mj-lt"/>
+              <a:cs typeface="Lucida Sans"/>
+            </a:endParaRPr>
+          </a:p>
+        </p:txBody>
+      </p:sp>
+      <p:pic>
+        <p:nvPicPr>
+          <p:cNvPr id="83" name="Gráfico 82">
+            <a:extLst>
+              <a:ext uri="{FF2B5EF4-FFF2-40B4-BE49-F238E27FC236}">
+                <a16:creationId xmlns:a16="http://schemas.microsoft.com/office/drawing/2014/main" id="{781BA13D-6CCE-78C7-0D56-F6600B4CE5AA}"/>
+              </a:ext>
+            </a:extLst>
+          </p:cNvPr>
+          <p:cNvPicPr>
+            <a:picLocks noChangeAspect="1"/>
+          </p:cNvPicPr>
+          <p:nvPr/>
+        </p:nvPicPr>
+        <p:blipFill>
+          <a:blip r:embed="rId3">
+            <a:extLst>
+              <a:ext uri="{96DAC541-7B7A-43D3-8B79-37D633B846F1}">
+                <asvg:svgBlip xmlns:asvg="http://schemas.microsoft.com/office/drawing/2016/SVG/main" r:embed="rId4"/>
+              </a:ext>
+            </a:extLst>
+          </a:blip>
+          <a:stretch>
+            <a:fillRect/>
+          </a:stretch>
+        </p:blipFill>
+        <p:spPr>
+          <a:xfrm>
+            <a:off x="5045006" y="6356057"/>
+            <a:ext cx="6409575" cy="363174"/>
+          </a:xfrm>
+          <a:prstGeom prst="rect">
+            <a:avLst/>
+          </a:prstGeom>
+        </p:spPr>
+      </p:pic>
+      <p:sp>
+        <p:nvSpPr>
+          <p:cNvPr id="84" name="Marcador de número de diapositiva 83">
+            <a:extLst>
+              <a:ext uri="{FF2B5EF4-FFF2-40B4-BE49-F238E27FC236}">
+                <a16:creationId xmlns:a16="http://schemas.microsoft.com/office/drawing/2014/main" id="{46F99651-2D23-8E62-623F-474374489F6C}"/>
+              </a:ext>
+            </a:extLst>
+          </p:cNvPr>
+          <p:cNvSpPr>
+            <a:spLocks noGrp="1"/>
+          </p:cNvSpPr>
+          <p:nvPr>
+            <p:ph type="sldNum" sz="quarter" idx="7"/>
+          </p:nvPr>
+        </p:nvSpPr>
+        <p:spPr/>
+        <p:txBody>
+          <a:bodyPr/>
+          <a:lstStyle/>
+          <a:p>
+            <a:fld id="{B6F15528-21DE-4FAA-801E-634DDDAF4B2B}" type="slidenum">
+              <a:rPr lang="es-ES" smtClean="0"/>
+              <a:t>7</a:t>
+            </a:fld>
+            <a:endParaRPr lang="es-ES"/>
+          </a:p>
+        </p:txBody>
+      </p:sp>
+      <p:sp>
+        <p:nvSpPr>
+          <p:cNvPr id="3" name="Marcador de pie de página 2">
+            <a:extLst>
+              <a:ext uri="{FF2B5EF4-FFF2-40B4-BE49-F238E27FC236}">
+                <a16:creationId xmlns:a16="http://schemas.microsoft.com/office/drawing/2014/main" id="{DCFE3CDF-5FCC-98CC-FB41-96B8AAA7FE18}"/>
+              </a:ext>
+            </a:extLst>
+          </p:cNvPr>
+          <p:cNvSpPr>
+            <a:spLocks noGrp="1"/>
+          </p:cNvSpPr>
+          <p:nvPr>
+            <p:ph type="ftr" sz="quarter" idx="5"/>
+          </p:nvPr>
+        </p:nvSpPr>
+        <p:spPr/>
+        <p:txBody>
+          <a:bodyPr/>
+          <a:lstStyle/>
+          <a:p>
+            <a:pPr marL="12700">
+              <a:spcBef>
+                <a:spcPts val="15"/>
+              </a:spcBef>
+            </a:pPr>
+            <a:r>
+              <a:rPr lang="es-ES" spc="-5"/>
+              <a:t>LAB 2.0. COUPLERS</a:t>
+            </a:r>
+            <a:endParaRPr lang="es-ES" spc="-5" dirty="0"/>
+          </a:p>
+        </p:txBody>
+      </p:sp>
+      <p:sp>
+        <p:nvSpPr>
+          <p:cNvPr id="2" name="CuadroTexto 1">
+            <a:extLst>
+              <a:ext uri="{FF2B5EF4-FFF2-40B4-BE49-F238E27FC236}">
+                <a16:creationId xmlns:a16="http://schemas.microsoft.com/office/drawing/2014/main" id="{BEABE9DC-4E8C-46E2-AC70-24A39A45B136}"/>
+              </a:ext>
+            </a:extLst>
+          </p:cNvPr>
+          <p:cNvSpPr txBox="1"/>
+          <p:nvPr/>
+        </p:nvSpPr>
+        <p:spPr>
+          <a:xfrm>
+            <a:off x="609441" y="4860334"/>
+            <a:ext cx="11199971" cy="1015663"/>
+          </a:xfrm>
+          <a:prstGeom prst="rect">
+            <a:avLst/>
+          </a:prstGeom>
+          <a:solidFill>
+            <a:schemeClr val="bg1">
+              <a:lumMod val="95000"/>
+            </a:schemeClr>
+          </a:solidFill>
+          <a:ln w="28575">
+            <a:solidFill>
+              <a:srgbClr val="E0700D"/>
+            </a:solidFill>
+          </a:ln>
+        </p:spPr>
+        <p:txBody>
+          <a:bodyPr wrap="square" rtlCol="0">
+            <a:spAutoFit/>
+          </a:bodyPr>
+          <a:lstStyle/>
+          <a:p>
+            <a:pPr algn="just"/>
+            <a:r>
+              <a:rPr lang="en-US" sz="1200" dirty="0">
+                <a:latin typeface="Arial" panose="020B0604020202020204" pitchFamily="34" charset="0"/>
+                <a:cs typeface="Arial" panose="020B0604020202020204" pitchFamily="34" charset="0"/>
+              </a:rPr>
+              <a:t>Comment results (Coupling relationship, </a:t>
+            </a:r>
+            <a:r>
+              <a:rPr lang="en-US" sz="1200" dirty="0" err="1">
+                <a:latin typeface="Arial" panose="020B0604020202020204" pitchFamily="34" charset="0"/>
+                <a:cs typeface="Arial" panose="020B0604020202020204" pitchFamily="34" charset="0"/>
+              </a:rPr>
+              <a:t>Lpi</a:t>
+            </a:r>
+            <a:r>
+              <a:rPr lang="en-US" sz="1200" dirty="0">
+                <a:latin typeface="Arial" panose="020B0604020202020204" pitchFamily="34" charset="0"/>
+                <a:cs typeface="Arial" panose="020B0604020202020204" pitchFamily="34" charset="0"/>
+              </a:rPr>
+              <a:t>, losses, … )</a:t>
+            </a:r>
+          </a:p>
+          <a:p>
+            <a:pPr algn="just"/>
+            <a:endParaRPr lang="en-US" sz="1200" dirty="0">
+              <a:latin typeface="Arial" panose="020B0604020202020204" pitchFamily="34" charset="0"/>
+              <a:cs typeface="Arial" panose="020B0604020202020204" pitchFamily="34" charset="0"/>
+            </a:endParaRPr>
+          </a:p>
+          <a:p>
+            <a:pPr algn="just"/>
+            <a:r>
+              <a:rPr lang="en-US" sz="1200" dirty="0">
+                <a:latin typeface="Arial" panose="020B0604020202020204" pitchFamily="34" charset="0"/>
+                <a:cs typeface="Arial" panose="020B0604020202020204" pitchFamily="34" charset="0"/>
+              </a:rPr>
+              <a:t>#El Código </a:t>
+            </a:r>
+            <a:r>
+              <a:rPr lang="en-US" sz="1200" dirty="0" err="1">
+                <a:latin typeface="Arial" panose="020B0604020202020204" pitchFamily="34" charset="0"/>
+                <a:cs typeface="Arial" panose="020B0604020202020204" pitchFamily="34" charset="0"/>
+              </a:rPr>
+              <a:t>está</a:t>
+            </a:r>
+            <a:r>
+              <a:rPr lang="en-US" sz="1200" dirty="0">
+                <a:latin typeface="Arial" panose="020B0604020202020204" pitchFamily="34" charset="0"/>
+                <a:cs typeface="Arial" panose="020B0604020202020204" pitchFamily="34" charset="0"/>
+              </a:rPr>
+              <a:t> </a:t>
+            </a:r>
+            <a:r>
+              <a:rPr lang="en-US" sz="1200" dirty="0" err="1">
+                <a:latin typeface="Arial" panose="020B0604020202020204" pitchFamily="34" charset="0"/>
+                <a:cs typeface="Arial" panose="020B0604020202020204" pitchFamily="34" charset="0"/>
+              </a:rPr>
+              <a:t>preparado</a:t>
+            </a:r>
+            <a:r>
+              <a:rPr lang="en-US" sz="1200" dirty="0">
+                <a:latin typeface="Arial" panose="020B0604020202020204" pitchFamily="34" charset="0"/>
+                <a:cs typeface="Arial" panose="020B0604020202020204" pitchFamily="34" charset="0"/>
+              </a:rPr>
+              <a:t> </a:t>
+            </a:r>
+            <a:r>
+              <a:rPr lang="en-US" sz="1200" dirty="0" err="1">
+                <a:latin typeface="Arial" panose="020B0604020202020204" pitchFamily="34" charset="0"/>
+                <a:cs typeface="Arial" panose="020B0604020202020204" pitchFamily="34" charset="0"/>
+              </a:rPr>
+              <a:t>ya</a:t>
+            </a:r>
+            <a:r>
+              <a:rPr lang="en-US" sz="1200" dirty="0">
+                <a:latin typeface="Arial" panose="020B0604020202020204" pitchFamily="34" charset="0"/>
+                <a:cs typeface="Arial" panose="020B0604020202020204" pitchFamily="34" charset="0"/>
+              </a:rPr>
+              <a:t> para </a:t>
+            </a:r>
+            <a:r>
+              <a:rPr lang="en-US" sz="1200" dirty="0" err="1">
+                <a:latin typeface="Arial" panose="020B0604020202020204" pitchFamily="34" charset="0"/>
+                <a:cs typeface="Arial" panose="020B0604020202020204" pitchFamily="34" charset="0"/>
+              </a:rPr>
+              <a:t>reunir</a:t>
+            </a:r>
+            <a:r>
+              <a:rPr lang="en-US" sz="1200" dirty="0">
+                <a:latin typeface="Arial" panose="020B0604020202020204" pitchFamily="34" charset="0"/>
+                <a:cs typeface="Arial" panose="020B0604020202020204" pitchFamily="34" charset="0"/>
+              </a:rPr>
+              <a:t> </a:t>
+            </a:r>
+            <a:r>
+              <a:rPr lang="en-US" sz="1200" dirty="0" err="1">
+                <a:latin typeface="Arial" panose="020B0604020202020204" pitchFamily="34" charset="0"/>
+                <a:cs typeface="Arial" panose="020B0604020202020204" pitchFamily="34" charset="0"/>
+              </a:rPr>
+              <a:t>los</a:t>
+            </a:r>
+            <a:r>
+              <a:rPr lang="en-US" sz="1200" dirty="0">
+                <a:latin typeface="Arial" panose="020B0604020202020204" pitchFamily="34" charset="0"/>
+                <a:cs typeface="Arial" panose="020B0604020202020204" pitchFamily="34" charset="0"/>
+              </a:rPr>
+              <a:t> </a:t>
+            </a:r>
+            <a:r>
+              <a:rPr lang="en-US" sz="1200" dirty="0" err="1">
+                <a:latin typeface="Arial" panose="020B0604020202020204" pitchFamily="34" charset="0"/>
+                <a:cs typeface="Arial" panose="020B0604020202020204" pitchFamily="34" charset="0"/>
+              </a:rPr>
+              <a:t>datos</a:t>
+            </a:r>
+            <a:r>
+              <a:rPr lang="en-US" sz="1200" dirty="0">
+                <a:latin typeface="Arial" panose="020B0604020202020204" pitchFamily="34" charset="0"/>
+                <a:cs typeface="Arial" panose="020B0604020202020204" pitchFamily="34" charset="0"/>
+              </a:rPr>
+              <a:t> del gap y </a:t>
+            </a:r>
+            <a:r>
+              <a:rPr lang="en-US" sz="1200" dirty="0" err="1">
+                <a:latin typeface="Arial" panose="020B0604020202020204" pitchFamily="34" charset="0"/>
+                <a:cs typeface="Arial" panose="020B0604020202020204" pitchFamily="34" charset="0"/>
+              </a:rPr>
+              <a:t>el</a:t>
+            </a:r>
+            <a:r>
+              <a:rPr lang="en-US" sz="1200" dirty="0">
+                <a:latin typeface="Arial" panose="020B0604020202020204" pitchFamily="34" charset="0"/>
+                <a:cs typeface="Arial" panose="020B0604020202020204" pitchFamily="34" charset="0"/>
+              </a:rPr>
+              <a:t> </a:t>
+            </a:r>
+            <a:r>
+              <a:rPr lang="en-US" sz="1200" dirty="0" err="1">
+                <a:latin typeface="Arial" panose="020B0604020202020204" pitchFamily="34" charset="0"/>
+                <a:cs typeface="Arial" panose="020B0604020202020204" pitchFamily="34" charset="0"/>
+              </a:rPr>
+              <a:t>Lpi</a:t>
+            </a:r>
+            <a:r>
+              <a:rPr lang="en-US" sz="1200" dirty="0">
+                <a:latin typeface="Arial" panose="020B0604020202020204" pitchFamily="34" charset="0"/>
+                <a:cs typeface="Arial" panose="020B0604020202020204" pitchFamily="34" charset="0"/>
+              </a:rPr>
+              <a:t> </a:t>
+            </a:r>
+            <a:r>
+              <a:rPr lang="en-US" sz="1200" dirty="0" err="1">
+                <a:latin typeface="Arial" panose="020B0604020202020204" pitchFamily="34" charset="0"/>
+                <a:cs typeface="Arial" panose="020B0604020202020204" pitchFamily="34" charset="0"/>
+              </a:rPr>
+              <a:t>en</a:t>
+            </a:r>
+            <a:r>
+              <a:rPr lang="en-US" sz="1200" dirty="0">
+                <a:latin typeface="Arial" panose="020B0604020202020204" pitchFamily="34" charset="0"/>
+                <a:cs typeface="Arial" panose="020B0604020202020204" pitchFamily="34" charset="0"/>
+              </a:rPr>
+              <a:t> dos arrays para </a:t>
+            </a:r>
+            <a:r>
+              <a:rPr lang="en-US" sz="1200" dirty="0" err="1">
+                <a:latin typeface="Arial" panose="020B0604020202020204" pitchFamily="34" charset="0"/>
+                <a:cs typeface="Arial" panose="020B0604020202020204" pitchFamily="34" charset="0"/>
+              </a:rPr>
+              <a:t>representarlos</a:t>
+            </a:r>
+            <a:r>
+              <a:rPr lang="en-US" sz="1200" dirty="0">
+                <a:latin typeface="Arial" panose="020B0604020202020204" pitchFamily="34" charset="0"/>
+                <a:cs typeface="Arial" panose="020B0604020202020204" pitchFamily="34" charset="0"/>
+              </a:rPr>
+              <a:t>, solo </a:t>
+            </a:r>
+            <a:r>
+              <a:rPr lang="en-US" sz="1200" dirty="0" err="1">
+                <a:latin typeface="Arial" panose="020B0604020202020204" pitchFamily="34" charset="0"/>
+                <a:cs typeface="Arial" panose="020B0604020202020204" pitchFamily="34" charset="0"/>
+              </a:rPr>
+              <a:t>falta</a:t>
+            </a:r>
+            <a:r>
+              <a:rPr lang="en-US" sz="1200" dirty="0">
+                <a:latin typeface="Arial" panose="020B0604020202020204" pitchFamily="34" charset="0"/>
+                <a:cs typeface="Arial" panose="020B0604020202020204" pitchFamily="34" charset="0"/>
+              </a:rPr>
+              <a:t> </a:t>
+            </a:r>
+            <a:r>
+              <a:rPr lang="en-US" sz="1200" dirty="0" err="1">
+                <a:latin typeface="Arial" panose="020B0604020202020204" pitchFamily="34" charset="0"/>
+                <a:cs typeface="Arial" panose="020B0604020202020204" pitchFamily="34" charset="0"/>
+              </a:rPr>
+              <a:t>correrlo</a:t>
+            </a:r>
+            <a:r>
+              <a:rPr lang="en-US" sz="1200" dirty="0">
+                <a:latin typeface="Arial" panose="020B0604020202020204" pitchFamily="34" charset="0"/>
+                <a:cs typeface="Arial" panose="020B0604020202020204" pitchFamily="34" charset="0"/>
+              </a:rPr>
+              <a:t> y </a:t>
+            </a:r>
+            <a:r>
+              <a:rPr lang="en-US" sz="1200" dirty="0" err="1">
+                <a:latin typeface="Arial" panose="020B0604020202020204" pitchFamily="34" charset="0"/>
+                <a:cs typeface="Arial" panose="020B0604020202020204" pitchFamily="34" charset="0"/>
+              </a:rPr>
+              <a:t>poner</a:t>
+            </a:r>
+            <a:r>
+              <a:rPr lang="en-US" sz="1200" dirty="0">
+                <a:latin typeface="Arial" panose="020B0604020202020204" pitchFamily="34" charset="0"/>
+                <a:cs typeface="Arial" panose="020B0604020202020204" pitchFamily="34" charset="0"/>
+              </a:rPr>
+              <a:t> la </a:t>
+            </a:r>
+            <a:r>
+              <a:rPr lang="en-US" sz="1200" dirty="0" err="1">
+                <a:latin typeface="Arial" panose="020B0604020202020204" pitchFamily="34" charset="0"/>
+                <a:cs typeface="Arial" panose="020B0604020202020204" pitchFamily="34" charset="0"/>
+              </a:rPr>
+              <a:t>gráfica</a:t>
+            </a:r>
+            <a:r>
+              <a:rPr lang="en-US" sz="1200" dirty="0">
+                <a:latin typeface="Arial" panose="020B0604020202020204" pitchFamily="34" charset="0"/>
+                <a:cs typeface="Arial" panose="020B0604020202020204" pitchFamily="34" charset="0"/>
+              </a:rPr>
+              <a:t> </a:t>
+            </a:r>
+            <a:r>
+              <a:rPr lang="en-US" sz="1200" dirty="0" err="1">
+                <a:latin typeface="Arial" panose="020B0604020202020204" pitchFamily="34" charset="0"/>
+                <a:cs typeface="Arial" panose="020B0604020202020204" pitchFamily="34" charset="0"/>
+              </a:rPr>
+              <a:t>aquí</a:t>
+            </a:r>
+            <a:r>
+              <a:rPr lang="en-US" sz="1200" dirty="0">
+                <a:latin typeface="Arial" panose="020B0604020202020204" pitchFamily="34" charset="0"/>
+                <a:cs typeface="Arial" panose="020B0604020202020204" pitchFamily="34" charset="0"/>
+              </a:rPr>
+              <a:t> para pasar al </a:t>
+            </a:r>
+            <a:r>
+              <a:rPr lang="en-US" sz="1200" dirty="0" err="1">
+                <a:latin typeface="Arial" panose="020B0604020202020204" pitchFamily="34" charset="0"/>
+                <a:cs typeface="Arial" panose="020B0604020202020204" pitchFamily="34" charset="0"/>
+              </a:rPr>
+              <a:t>siguiente</a:t>
+            </a:r>
+            <a:r>
+              <a:rPr lang="en-US" sz="1200" dirty="0">
+                <a:latin typeface="Arial" panose="020B0604020202020204" pitchFamily="34" charset="0"/>
+                <a:cs typeface="Arial" panose="020B0604020202020204" pitchFamily="34" charset="0"/>
+              </a:rPr>
+              <a:t> </a:t>
+            </a:r>
+            <a:r>
+              <a:rPr lang="en-US" sz="1200">
+                <a:latin typeface="Arial" panose="020B0604020202020204" pitchFamily="34" charset="0"/>
+                <a:cs typeface="Arial" panose="020B0604020202020204" pitchFamily="34" charset="0"/>
+              </a:rPr>
+              <a:t>ejercicio</a:t>
+            </a:r>
+            <a:endParaRPr lang="en-US" sz="1200" dirty="0">
+              <a:latin typeface="Arial" panose="020B0604020202020204" pitchFamily="34" charset="0"/>
+              <a:cs typeface="Arial" panose="020B0604020202020204" pitchFamily="34" charset="0"/>
+            </a:endParaRPr>
+          </a:p>
+          <a:p>
+            <a:pPr algn="just"/>
+            <a:endParaRPr lang="en-US" sz="1200" dirty="0">
+              <a:latin typeface="Arial" panose="020B0604020202020204" pitchFamily="34" charset="0"/>
+              <a:cs typeface="Arial" panose="020B0604020202020204" pitchFamily="34" charset="0"/>
+            </a:endParaRPr>
+          </a:p>
+        </p:txBody>
+      </p:sp>
+      <p:sp>
+        <p:nvSpPr>
+          <p:cNvPr id="7" name="Rectángulo 6">
+            <a:extLst>
+              <a:ext uri="{FF2B5EF4-FFF2-40B4-BE49-F238E27FC236}">
+                <a16:creationId xmlns:a16="http://schemas.microsoft.com/office/drawing/2014/main" id="{E9DF101A-6659-E716-D296-A769BFC8113E}"/>
+              </a:ext>
+            </a:extLst>
+          </p:cNvPr>
+          <p:cNvSpPr/>
+          <p:nvPr/>
+        </p:nvSpPr>
+        <p:spPr>
+          <a:xfrm>
+            <a:off x="609441" y="1418373"/>
+            <a:ext cx="11199971" cy="3306028"/>
+          </a:xfrm>
+          <a:prstGeom prst="rect">
+            <a:avLst/>
+          </a:prstGeom>
+          <a:noFill/>
+          <a:ln w="28575">
+            <a:solidFill>
+              <a:srgbClr val="E0700D"/>
+            </a:solidFill>
+          </a:ln>
+        </p:spPr>
+        <p:style>
+          <a:lnRef idx="2">
+            <a:schemeClr val="accent1">
+              <a:shade val="15000"/>
+            </a:schemeClr>
+          </a:lnRef>
+          <a:fillRef idx="1">
+            <a:schemeClr val="accent1"/>
+          </a:fillRef>
+          <a:effectRef idx="0">
+            <a:schemeClr val="accent1"/>
+          </a:effectRef>
+          <a:fontRef idx="minor">
+            <a:schemeClr val="lt1"/>
+          </a:fontRef>
+        </p:style>
+        <p:txBody>
+          <a:bodyPr rtlCol="0" anchor="ctr"/>
+          <a:lstStyle/>
+          <a:p>
+            <a:pPr algn="ctr"/>
+            <a:endParaRPr lang="en-US"/>
+          </a:p>
+        </p:txBody>
+      </p:sp>
+    </p:spTree>
+    <p:extLst>
+      <p:ext uri="{BB962C8B-B14F-4D97-AF65-F5344CB8AC3E}">
+        <p14:creationId xmlns:p14="http://schemas.microsoft.com/office/powerpoint/2010/main" val="3675702927"/>
+      </p:ext>
+    </p:extLst>
+  </p:cSld>
+  <p:clrMapOvr>
+    <a:masterClrMapping/>
+  </p:clrMapOvr>
+</p:sld>
+</file>
+
+<file path=ppt/slides/slide8.xml><?xml version="1.0" encoding="utf-8"?>
 <p:sld xmlns:a="http://schemas.openxmlformats.org/drawingml/2006/main" xmlns:r="http://schemas.openxmlformats.org/officeDocument/2006/relationships" xmlns:p="http://schemas.openxmlformats.org/presentationml/2006/main">
   <p:cSld>
     <p:spTree>
@@ -11045,7 +13598,7 @@
           <a:p>
             <a:fld id="{B6F15528-21DE-4FAA-801E-634DDDAF4B2B}" type="slidenum">
               <a:rPr lang="es-ES" smtClean="0"/>
-              <a:t>6</a:t>
+              <a:t>8</a:t>
             </a:fld>
             <a:endParaRPr lang="es-ES"/>
           </a:p>
@@ -11326,7 +13879,7 @@
             </p:nvSpPr>
             <p:spPr>
               <a:xfrm>
-                <a:off x="1079403" y="2480496"/>
+                <a:off x="990600" y="1466737"/>
                 <a:ext cx="4546634" cy="1477328"/>
               </a:xfrm>
               <a:prstGeom prst="rect">
@@ -11407,7 +13960,7 @@
             </p:nvSpPr>
             <p:spPr>
               <a:xfrm>
-                <a:off x="1079403" y="2480496"/>
+                <a:off x="990600" y="1466737"/>
                 <a:ext cx="4546634" cy="1477328"/>
               </a:xfrm>
               <a:prstGeom prst="rect">
@@ -11425,7 +13978,7 @@
               <a:lstStyle/>
               <a:p>
                 <a:r>
-                  <a:rPr lang="es-ES">
+                  <a:rPr lang="en-GB">
                     <a:noFill/>
                   </a:rPr>
                   <a:t> </a:t>
@@ -11569,7 +14122,7 @@
 </p:sld>
 </file>
 
-<file path=ppt/slides/slide7.xml><?xml version="1.0" encoding="utf-8"?>
+<file path=ppt/slides/slide9.xml><?xml version="1.0" encoding="utf-8"?>
 <p:sld xmlns:a="http://schemas.openxmlformats.org/drawingml/2006/main" xmlns:r="http://schemas.openxmlformats.org/officeDocument/2006/relationships" xmlns:p="http://schemas.openxmlformats.org/presentationml/2006/main">
   <p:cSld>
     <p:spTree>
@@ -11577,7 +14130,7 @@
         <p:cNvPr id="1" name="">
           <a:extLst>
             <a:ext uri="{FF2B5EF4-FFF2-40B4-BE49-F238E27FC236}">
-              <a16:creationId xmlns:a16="http://schemas.microsoft.com/office/drawing/2014/main" id="{E43D4982-2E99-3EE0-CEBE-CEF54821C335}"/>
+              <a16:creationId xmlns:a16="http://schemas.microsoft.com/office/drawing/2014/main" id="{EC681E68-1A35-1388-F79A-6FA472032254}"/>
             </a:ext>
           </a:extLst>
         </p:cNvPr>
@@ -11594,151 +14147,10 @@
       </p:grpSpPr>
       <p:sp>
         <p:nvSpPr>
-          <p:cNvPr id="4" name="Marcador de pie de página 3">
-            <a:extLst>
-              <a:ext uri="{FF2B5EF4-FFF2-40B4-BE49-F238E27FC236}">
-                <a16:creationId xmlns:a16="http://schemas.microsoft.com/office/drawing/2014/main" id="{A60D29C4-F13C-8947-EF1D-2CBDDD14AC5C}"/>
-              </a:ext>
-            </a:extLst>
-          </p:cNvPr>
-          <p:cNvSpPr>
-            <a:spLocks noGrp="1"/>
-          </p:cNvSpPr>
-          <p:nvPr>
-            <p:ph type="ftr" sz="quarter" idx="5"/>
-          </p:nvPr>
-        </p:nvSpPr>
-        <p:spPr/>
-        <p:txBody>
-          <a:bodyPr/>
-          <a:lstStyle/>
-          <a:p>
-            <a:pPr marL="12700">
-              <a:spcBef>
-                <a:spcPts val="15"/>
-              </a:spcBef>
-            </a:pPr>
-            <a:r>
-              <a:rPr lang="es-ES" spc="-5"/>
-              <a:t>LAB 2.0. COUPLERS</a:t>
-            </a:r>
-            <a:endParaRPr lang="es-ES" spc="-5" dirty="0"/>
-          </a:p>
-        </p:txBody>
-      </p:sp>
-      <p:sp>
-        <p:nvSpPr>
-          <p:cNvPr id="5" name="Marcador de número de diapositiva 4">
-            <a:extLst>
-              <a:ext uri="{FF2B5EF4-FFF2-40B4-BE49-F238E27FC236}">
-                <a16:creationId xmlns:a16="http://schemas.microsoft.com/office/drawing/2014/main" id="{28A4EFD1-1AF6-F17D-1B27-5115800F99B0}"/>
-              </a:ext>
-            </a:extLst>
-          </p:cNvPr>
-          <p:cNvSpPr>
-            <a:spLocks noGrp="1"/>
-          </p:cNvSpPr>
-          <p:nvPr>
-            <p:ph type="sldNum" sz="quarter" idx="7"/>
-          </p:nvPr>
-        </p:nvSpPr>
-        <p:spPr/>
-        <p:txBody>
-          <a:bodyPr/>
-          <a:lstStyle/>
-          <a:p>
-            <a:fld id="{B6F15528-21DE-4FAA-801E-634DDDAF4B2B}" type="slidenum">
-              <a:rPr lang="es-ES" smtClean="0"/>
-              <a:t>7</a:t>
-            </a:fld>
-            <a:endParaRPr lang="es-ES"/>
-          </a:p>
-        </p:txBody>
-      </p:sp>
-      <p:sp>
-        <p:nvSpPr>
-          <p:cNvPr id="6" name="Título 4">
-            <a:extLst>
-              <a:ext uri="{FF2B5EF4-FFF2-40B4-BE49-F238E27FC236}">
-                <a16:creationId xmlns:a16="http://schemas.microsoft.com/office/drawing/2014/main" id="{8111062F-F9A0-241E-6CCB-6E8BE4D8C60A}"/>
-              </a:ext>
-            </a:extLst>
-          </p:cNvPr>
-          <p:cNvSpPr>
-            <a:spLocks noGrp="1"/>
-          </p:cNvSpPr>
-          <p:nvPr>
-            <p:ph type="body" idx="1"/>
-          </p:nvPr>
-        </p:nvSpPr>
-        <p:spPr>
-          <a:xfrm>
-            <a:off x="609600" y="2152650"/>
-            <a:ext cx="10972800" cy="430887"/>
-          </a:xfrm>
-        </p:spPr>
-        <p:txBody>
-          <a:bodyPr/>
-          <a:lstStyle/>
-          <a:p>
-            <a:pPr algn="ctr"/>
-            <a:r>
-              <a:rPr lang="en-US" sz="2800" b="1" dirty="0">
-                <a:effectLst>
-                  <a:outerShdw blurRad="38100" dist="38100" dir="2700000" algn="tl">
-                    <a:srgbClr val="000000">
-                      <a:alpha val="43137"/>
-                    </a:srgbClr>
-                  </a:outerShdw>
-                </a:effectLst>
-              </a:rPr>
-              <a:t>Multimode Interferometer (MMI) Coupler</a:t>
-            </a:r>
-          </a:p>
-        </p:txBody>
-      </p:sp>
-    </p:spTree>
-    <p:extLst>
-      <p:ext uri="{BB962C8B-B14F-4D97-AF65-F5344CB8AC3E}">
-        <p14:creationId xmlns:p14="http://schemas.microsoft.com/office/powerpoint/2010/main" val="3873318961"/>
-      </p:ext>
-    </p:extLst>
-  </p:cSld>
-  <p:clrMapOvr>
-    <a:masterClrMapping/>
-  </p:clrMapOvr>
-</p:sld>
-</file>
-
-<file path=ppt/slides/slide8.xml><?xml version="1.0" encoding="utf-8"?>
-<p:sld xmlns:a="http://schemas.openxmlformats.org/drawingml/2006/main" xmlns:r="http://schemas.openxmlformats.org/officeDocument/2006/relationships" xmlns:p="http://schemas.openxmlformats.org/presentationml/2006/main">
-  <p:cSld>
-    <p:spTree>
-      <p:nvGrpSpPr>
-        <p:cNvPr id="1" name="">
-          <a:extLst>
-            <a:ext uri="{FF2B5EF4-FFF2-40B4-BE49-F238E27FC236}">
-              <a16:creationId xmlns:a16="http://schemas.microsoft.com/office/drawing/2014/main" id="{91BF7C0E-2677-BADF-D636-6F9B71E665FA}"/>
-            </a:ext>
-          </a:extLst>
-        </p:cNvPr>
-        <p:cNvGrpSpPr/>
-        <p:nvPr/>
-      </p:nvGrpSpPr>
-      <p:grpSpPr>
-        <a:xfrm>
-          <a:off x="0" y="0"/>
-          <a:ext cx="0" cy="0"/>
-          <a:chOff x="0" y="0"/>
-          <a:chExt cx="0" cy="0"/>
-        </a:xfrm>
-      </p:grpSpPr>
-      <p:sp>
-        <p:nvSpPr>
           <p:cNvPr id="16" name="object 16">
             <a:extLst>
               <a:ext uri="{FF2B5EF4-FFF2-40B4-BE49-F238E27FC236}">
-                <a16:creationId xmlns:a16="http://schemas.microsoft.com/office/drawing/2014/main" id="{2B8D44BF-A3B5-6BED-C39C-FA8260E83536}"/>
+                <a16:creationId xmlns:a16="http://schemas.microsoft.com/office/drawing/2014/main" id="{58330A44-AEE0-FFBE-CB0D-5F57A190B9B2}"/>
               </a:ext>
             </a:extLst>
           </p:cNvPr>
@@ -11774,22 +14186,21 @@
             </a:pPr>
             <a:r>
               <a:rPr lang="en-US" sz="2500" dirty="0"/>
-              <a:t>Learning outcome #4 – 4.1 2x2 Multimode Interference Coupler </a:t>
+              <a:t>Learning outcome #3 – Parallel uncoupled waveguides</a:t>
             </a:r>
             <a:br>
-              <a:rPr lang="en-US" sz="2500" dirty="0"/>
+              <a:rPr lang="en-US" sz="2500" spc="-5" dirty="0">
+                <a:latin typeface="+mj-lt"/>
+                <a:cs typeface="Lucida Sans"/>
+              </a:rPr>
             </a:br>
             <a:r>
               <a:rPr lang="en-US" b="0" dirty="0"/>
-              <a:t>Wavelength 1.55 µm, </a:t>
+              <a:t>Wavelength 1.55 µm, width 1.0 µm, gap to be found for uncoupled </a:t>
             </a:r>
             <a:r>
               <a:rPr lang="en-US" b="0" dirty="0" err="1"/>
-              <a:t>wMMI</a:t>
-            </a:r>
-            <a:r>
-              <a:rPr lang="en-US" b="0" dirty="0"/>
-              <a:t> = 6.6 µm</a:t>
+              <a:t>wvgs</a:t>
             </a:r>
             <a:endParaRPr lang="en-US" sz="2500" b="0" dirty="0">
               <a:latin typeface="+mj-lt"/>
@@ -11803,7 +14214,7 @@
           <p:cNvPr id="83" name="Gráfico 82">
             <a:extLst>
               <a:ext uri="{FF2B5EF4-FFF2-40B4-BE49-F238E27FC236}">
-                <a16:creationId xmlns:a16="http://schemas.microsoft.com/office/drawing/2014/main" id="{5DFCF1AD-6B06-F914-AC0B-80F0ED838EF9}"/>
+                <a16:creationId xmlns:a16="http://schemas.microsoft.com/office/drawing/2014/main" id="{34A50EFB-2FE5-EDFD-B150-6B05AB421C48}"/>
               </a:ext>
             </a:extLst>
           </p:cNvPr>
@@ -11839,7 +14250,7 @@
           <p:cNvPr id="84" name="Marcador de número de diapositiva 83">
             <a:extLst>
               <a:ext uri="{FF2B5EF4-FFF2-40B4-BE49-F238E27FC236}">
-                <a16:creationId xmlns:a16="http://schemas.microsoft.com/office/drawing/2014/main" id="{4A656CCE-66E0-EAE0-5C63-DF1315DF6299}"/>
+                <a16:creationId xmlns:a16="http://schemas.microsoft.com/office/drawing/2014/main" id="{6BD76E3F-37F2-38EC-D6FE-C2BEF7C09674}"/>
               </a:ext>
             </a:extLst>
           </p:cNvPr>
@@ -11857,7 +14268,7 @@
           <a:p>
             <a:fld id="{B6F15528-21DE-4FAA-801E-634DDDAF4B2B}" type="slidenum">
               <a:rPr lang="es-ES" smtClean="0"/>
-              <a:t>8</a:t>
+              <a:t>9</a:t>
             </a:fld>
             <a:endParaRPr lang="es-ES"/>
           </a:p>
@@ -11868,7 +14279,7 @@
           <p:cNvPr id="3" name="Marcador de pie de página 2">
             <a:extLst>
               <a:ext uri="{FF2B5EF4-FFF2-40B4-BE49-F238E27FC236}">
-                <a16:creationId xmlns:a16="http://schemas.microsoft.com/office/drawing/2014/main" id="{D3AB6581-C493-80EB-A67F-5289454DAA28}"/>
+                <a16:creationId xmlns:a16="http://schemas.microsoft.com/office/drawing/2014/main" id="{C289D1F4-DBB6-F9A6-E8C8-98E5368CDFF6}"/>
               </a:ext>
             </a:extLst>
           </p:cNvPr>
@@ -11902,7 +14313,7 @@
           <p:cNvPr id="2" name="CuadroTexto 1">
             <a:extLst>
               <a:ext uri="{FF2B5EF4-FFF2-40B4-BE49-F238E27FC236}">
-                <a16:creationId xmlns:a16="http://schemas.microsoft.com/office/drawing/2014/main" id="{B5029729-ADF3-3B30-4FF9-83BE1DB82BD7}"/>
+                <a16:creationId xmlns:a16="http://schemas.microsoft.com/office/drawing/2014/main" id="{E4B7BB18-AD02-4CCF-A693-6D173C9A8B51}"/>
               </a:ext>
             </a:extLst>
           </p:cNvPr>
@@ -11911,8 +14322,8 @@
         </p:nvSpPr>
         <p:spPr>
           <a:xfrm>
-            <a:off x="609441" y="4819471"/>
-            <a:ext cx="11199971" cy="1200329"/>
+            <a:off x="609441" y="4627196"/>
+            <a:ext cx="11199971" cy="2123658"/>
           </a:xfrm>
           <a:prstGeom prst="rect">
             <a:avLst/>
@@ -11936,25 +14347,35 @@
           <a:p>
             <a:pPr algn="just"/>
             <a:r>
+              <a:rPr lang="en-US" sz="1200" b="1" dirty="0">
+                <a:latin typeface="Arial" panose="020B0604020202020204" pitchFamily="34" charset="0"/>
+                <a:cs typeface="Arial" panose="020B0604020202020204" pitchFamily="34" charset="0"/>
+              </a:rPr>
+              <a:t>Hints:</a:t>
+            </a:r>
+          </a:p>
+          <a:p>
+            <a:pPr algn="just"/>
+            <a:r>
               <a:rPr lang="en-US" sz="1200" dirty="0">
                 <a:latin typeface="Arial" panose="020B0604020202020204" pitchFamily="34" charset="0"/>
                 <a:cs typeface="Arial" panose="020B0604020202020204" pitchFamily="34" charset="0"/>
               </a:rPr>
-              <a:t>Comment results (Coupling relationship, </a:t>
+              <a:t>All waveguides running in parallel are coupled somehow. Controlling the degree of coupling is key for those waveguides you don’t want coupling over certain level (i.e. uncoupled waveguides). Uncoupled waveguide definition, we will use K&lt;0.01. Parallel waveguide length = 10 mm (typical length of a chip). Find minimum gap shallow / deep w=1.0µm </a:t>
             </a:r>
             <a:r>
               <a:rPr lang="en-US" sz="1200" dirty="0" err="1">
                 <a:latin typeface="Arial" panose="020B0604020202020204" pitchFamily="34" charset="0"/>
                 <a:cs typeface="Arial" panose="020B0604020202020204" pitchFamily="34" charset="0"/>
               </a:rPr>
-              <a:t>Lpi</a:t>
+              <a:t>wvl</a:t>
             </a:r>
             <a:r>
               <a:rPr lang="en-US" sz="1200" dirty="0">
                 <a:latin typeface="Arial" panose="020B0604020202020204" pitchFamily="34" charset="0"/>
                 <a:cs typeface="Arial" panose="020B0604020202020204" pitchFamily="34" charset="0"/>
               </a:rPr>
-              <a:t>,  losses, comparison with Directional Coupler… )</a:t>
+              <a:t> 1.55 µm.</a:t>
             </a:r>
           </a:p>
           <a:p>
@@ -11992,14 +14413,28 @@
               <a:cs typeface="Arial" panose="020B0604020202020204" pitchFamily="34" charset="0"/>
             </a:endParaRPr>
           </a:p>
-        </p:txBody>
-      </p:sp>
-      <p:sp>
-        <p:nvSpPr>
-          <p:cNvPr id="7" name="Rectángulo 6">
-            <a:extLst>
-              <a:ext uri="{FF2B5EF4-FFF2-40B4-BE49-F238E27FC236}">
-                <a16:creationId xmlns:a16="http://schemas.microsoft.com/office/drawing/2014/main" id="{98DE5FDA-4E91-E843-E84A-1467BFAA9986}"/>
+          <a:p>
+            <a:pPr algn="just"/>
+            <a:endParaRPr lang="en-US" sz="1200" dirty="0">
+              <a:latin typeface="Arial" panose="020B0604020202020204" pitchFamily="34" charset="0"/>
+              <a:cs typeface="Arial" panose="020B0604020202020204" pitchFamily="34" charset="0"/>
+            </a:endParaRPr>
+          </a:p>
+          <a:p>
+            <a:pPr algn="just"/>
+            <a:endParaRPr lang="en-US" sz="1200" dirty="0">
+              <a:latin typeface="Arial" panose="020B0604020202020204" pitchFamily="34" charset="0"/>
+              <a:cs typeface="Arial" panose="020B0604020202020204" pitchFamily="34" charset="0"/>
+            </a:endParaRPr>
+          </a:p>
+        </p:txBody>
+      </p:sp>
+      <p:sp>
+        <p:nvSpPr>
+          <p:cNvPr id="4" name="Rectángulo 3">
+            <a:extLst>
+              <a:ext uri="{FF2B5EF4-FFF2-40B4-BE49-F238E27FC236}">
+                <a16:creationId xmlns:a16="http://schemas.microsoft.com/office/drawing/2014/main" id="{8DCAF4C7-578C-5EC8-83BF-F12963623FB6}"/>
               </a:ext>
             </a:extLst>
           </p:cNvPr>
@@ -12008,8 +14443,8 @@
         </p:nvSpPr>
         <p:spPr>
           <a:xfrm>
-            <a:off x="609441" y="1377510"/>
-            <a:ext cx="11199971" cy="3306028"/>
+            <a:off x="609441" y="1219200"/>
+            <a:ext cx="5486559" cy="3306028"/>
           </a:xfrm>
           <a:prstGeom prst="rect">
             <a:avLst/>
@@ -12048,361 +14483,20 @@
       </p:sp>
       <p:sp>
         <p:nvSpPr>
-          <p:cNvPr id="8" name="CuadroTexto 7">
-            <a:extLst>
-              <a:ext uri="{FF2B5EF4-FFF2-40B4-BE49-F238E27FC236}">
-                <a16:creationId xmlns:a16="http://schemas.microsoft.com/office/drawing/2014/main" id="{0DA14DBA-172E-DA2C-0573-6A00BF18F4A5}"/>
-              </a:ext>
-            </a:extLst>
-          </p:cNvPr>
-          <p:cNvSpPr txBox="1"/>
+          <p:cNvPr id="5" name="Rectángulo 4">
+            <a:extLst>
+              <a:ext uri="{FF2B5EF4-FFF2-40B4-BE49-F238E27FC236}">
+                <a16:creationId xmlns:a16="http://schemas.microsoft.com/office/drawing/2014/main" id="{5C7F69A1-057F-D511-9DDA-E8B25BB2493F}"/>
+              </a:ext>
+            </a:extLst>
+          </p:cNvPr>
+          <p:cNvSpPr/>
           <p:nvPr/>
         </p:nvSpPr>
         <p:spPr>
           <a:xfrm>
-            <a:off x="2286000" y="2630415"/>
-            <a:ext cx="7718580" cy="923330"/>
-          </a:xfrm>
-          <a:prstGeom prst="rect">
-            <a:avLst/>
-          </a:prstGeom>
-          <a:noFill/>
-        </p:spPr>
-        <p:txBody>
-          <a:bodyPr wrap="square" rtlCol="0">
-            <a:spAutoFit/>
-          </a:bodyPr>
-          <a:lstStyle/>
-          <a:p>
-            <a:pPr algn="ctr"/>
-            <a:r>
-              <a:rPr lang="en-US" b="1" dirty="0"/>
-              <a:t>deep</a:t>
-            </a:r>
-            <a:r>
-              <a:rPr lang="en-US" dirty="0"/>
-              <a:t> waveguide</a:t>
-            </a:r>
-          </a:p>
-          <a:p>
-            <a:pPr algn="ctr"/>
-            <a:endParaRPr lang="en-US" dirty="0"/>
-          </a:p>
-          <a:p>
-            <a:pPr algn="ctr"/>
-            <a:r>
-              <a:rPr lang="en-US" dirty="0"/>
-              <a:t>Paste propagation plots and console results</a:t>
-            </a:r>
-          </a:p>
-        </p:txBody>
-      </p:sp>
-    </p:spTree>
-    <p:extLst>
-      <p:ext uri="{BB962C8B-B14F-4D97-AF65-F5344CB8AC3E}">
-        <p14:creationId xmlns:p14="http://schemas.microsoft.com/office/powerpoint/2010/main" val="2815679427"/>
-      </p:ext>
-    </p:extLst>
-  </p:cSld>
-  <p:clrMapOvr>
-    <a:masterClrMapping/>
-  </p:clrMapOvr>
-</p:sld>
-</file>
-
-<file path=ppt/slides/slide9.xml><?xml version="1.0" encoding="utf-8"?>
-<p:sld xmlns:a="http://schemas.openxmlformats.org/drawingml/2006/main" xmlns:r="http://schemas.openxmlformats.org/officeDocument/2006/relationships" xmlns:p="http://schemas.openxmlformats.org/presentationml/2006/main">
-  <p:cSld>
-    <p:spTree>
-      <p:nvGrpSpPr>
-        <p:cNvPr id="1" name="">
-          <a:extLst>
-            <a:ext uri="{FF2B5EF4-FFF2-40B4-BE49-F238E27FC236}">
-              <a16:creationId xmlns:a16="http://schemas.microsoft.com/office/drawing/2014/main" id="{D1F11DBE-A482-7036-60B2-70B7E2318F46}"/>
-            </a:ext>
-          </a:extLst>
-        </p:cNvPr>
-        <p:cNvGrpSpPr/>
-        <p:nvPr/>
-      </p:nvGrpSpPr>
-      <p:grpSpPr>
-        <a:xfrm>
-          <a:off x="0" y="0"/>
-          <a:ext cx="0" cy="0"/>
-          <a:chOff x="0" y="0"/>
-          <a:chExt cx="0" cy="0"/>
-        </a:xfrm>
-      </p:grpSpPr>
-      <p:sp>
-        <p:nvSpPr>
-          <p:cNvPr id="16" name="object 16">
-            <a:extLst>
-              <a:ext uri="{FF2B5EF4-FFF2-40B4-BE49-F238E27FC236}">
-                <a16:creationId xmlns:a16="http://schemas.microsoft.com/office/drawing/2014/main" id="{C096193E-AB86-E3CD-BDAC-0F9156C1A3F0}"/>
-              </a:ext>
-            </a:extLst>
-          </p:cNvPr>
-          <p:cNvSpPr txBox="1">
-            <a:spLocks noGrp="1"/>
-          </p:cNvSpPr>
-          <p:nvPr>
-            <p:ph type="title"/>
-          </p:nvPr>
-        </p:nvSpPr>
-        <p:spPr>
-          <a:xfrm>
-            <a:off x="685800" y="408883"/>
-            <a:ext cx="10994410" cy="705321"/>
-          </a:xfrm>
-          <a:prstGeom prst="rect">
-            <a:avLst/>
-          </a:prstGeom>
-        </p:spPr>
-        <p:txBody>
-          <a:bodyPr vert="horz" wrap="square" lIns="0" tIns="12700" rIns="0" bIns="0" rtlCol="0">
-            <a:spAutoFit/>
-          </a:bodyPr>
-          <a:lstStyle/>
-          <a:p>
-            <a:pPr marL="12700">
-              <a:lnSpc>
-                <a:spcPct val="100000"/>
-              </a:lnSpc>
-              <a:spcBef>
-                <a:spcPts val="100"/>
-              </a:spcBef>
-            </a:pPr>
-            <a:r>
-              <a:rPr lang="en-US" sz="2500" dirty="0"/>
-              <a:t>Learning outcome #4.2 – 2x2 Multimode Interference Coupler - Optimization</a:t>
-            </a:r>
-            <a:br>
-              <a:rPr lang="en-US" sz="2500" dirty="0"/>
-            </a:br>
-            <a:r>
-              <a:rPr lang="en-US" b="0" dirty="0"/>
-              <a:t>Wavelength 1.55 µm, </a:t>
-            </a:r>
-            <a:r>
-              <a:rPr lang="en-US" b="0" dirty="0" err="1"/>
-              <a:t>wMMI</a:t>
-            </a:r>
-            <a:r>
-              <a:rPr lang="en-US" b="0" dirty="0"/>
-              <a:t> = 6.6 µm</a:t>
-            </a:r>
-            <a:endParaRPr lang="en-US" sz="2500" b="0" dirty="0">
-              <a:latin typeface="+mj-lt"/>
-              <a:cs typeface="Lucida Sans"/>
-            </a:endParaRPr>
-          </a:p>
-        </p:txBody>
-      </p:sp>
-      <p:pic>
-        <p:nvPicPr>
-          <p:cNvPr id="83" name="Gráfico 82">
-            <a:extLst>
-              <a:ext uri="{FF2B5EF4-FFF2-40B4-BE49-F238E27FC236}">
-                <a16:creationId xmlns:a16="http://schemas.microsoft.com/office/drawing/2014/main" id="{2D17DCD6-D851-E62D-D95C-A9F9954602DE}"/>
-              </a:ext>
-            </a:extLst>
-          </p:cNvPr>
-          <p:cNvPicPr>
-            <a:picLocks noChangeAspect="1"/>
-          </p:cNvPicPr>
-          <p:nvPr/>
-        </p:nvPicPr>
-        <p:blipFill>
-          <a:blip r:embed="rId3">
-            <a:extLst>
-              <a:ext uri="{96DAC541-7B7A-43D3-8B79-37D633B846F1}">
-                <asvg:svgBlip xmlns:asvg="http://schemas.microsoft.com/office/drawing/2016/SVG/main" r:embed="rId4"/>
-              </a:ext>
-            </a:extLst>
-          </a:blip>
-          <a:stretch>
-            <a:fillRect/>
-          </a:stretch>
-        </p:blipFill>
-        <p:spPr>
-          <a:xfrm>
-            <a:off x="5045006" y="6356057"/>
-            <a:ext cx="6409575" cy="363174"/>
-          </a:xfrm>
-          <a:prstGeom prst="rect">
-            <a:avLst/>
-          </a:prstGeom>
-        </p:spPr>
-      </p:pic>
-      <p:sp>
-        <p:nvSpPr>
-          <p:cNvPr id="84" name="Marcador de número de diapositiva 83">
-            <a:extLst>
-              <a:ext uri="{FF2B5EF4-FFF2-40B4-BE49-F238E27FC236}">
-                <a16:creationId xmlns:a16="http://schemas.microsoft.com/office/drawing/2014/main" id="{4891046F-11DC-B7FC-54F7-9583E688DC0E}"/>
-              </a:ext>
-            </a:extLst>
-          </p:cNvPr>
-          <p:cNvSpPr>
-            <a:spLocks noGrp="1"/>
-          </p:cNvSpPr>
-          <p:nvPr>
-            <p:ph type="sldNum" sz="quarter" idx="7"/>
-          </p:nvPr>
-        </p:nvSpPr>
-        <p:spPr/>
-        <p:txBody>
-          <a:bodyPr/>
-          <a:lstStyle/>
-          <a:p>
-            <a:fld id="{B6F15528-21DE-4FAA-801E-634DDDAF4B2B}" type="slidenum">
-              <a:rPr lang="es-ES" smtClean="0"/>
-              <a:t>9</a:t>
-            </a:fld>
-            <a:endParaRPr lang="es-ES"/>
-          </a:p>
-        </p:txBody>
-      </p:sp>
-      <p:sp>
-        <p:nvSpPr>
-          <p:cNvPr id="3" name="Marcador de pie de página 2">
-            <a:extLst>
-              <a:ext uri="{FF2B5EF4-FFF2-40B4-BE49-F238E27FC236}">
-                <a16:creationId xmlns:a16="http://schemas.microsoft.com/office/drawing/2014/main" id="{4C9BAA39-017F-D602-6705-A6CF44830139}"/>
-              </a:ext>
-            </a:extLst>
-          </p:cNvPr>
-          <p:cNvSpPr>
-            <a:spLocks noGrp="1"/>
-          </p:cNvSpPr>
-          <p:nvPr>
-            <p:ph type="ftr" sz="quarter" idx="5"/>
-          </p:nvPr>
-        </p:nvSpPr>
-        <p:spPr/>
-        <p:txBody>
-          <a:bodyPr/>
-          <a:lstStyle/>
-          <a:p>
-            <a:pPr marL="12700">
-              <a:spcBef>
-                <a:spcPts val="15"/>
-              </a:spcBef>
-            </a:pPr>
-            <a:r>
-              <a:rPr lang="es-ES" spc="-5"/>
-              <a:t>LAB 2.0. COUPLERS</a:t>
-            </a:r>
-            <a:endParaRPr lang="es-ES" spc="-5" dirty="0"/>
-          </a:p>
-        </p:txBody>
-      </p:sp>
-      <p:sp>
-        <p:nvSpPr>
-          <p:cNvPr id="2" name="CuadroTexto 1">
-            <a:extLst>
-              <a:ext uri="{FF2B5EF4-FFF2-40B4-BE49-F238E27FC236}">
-                <a16:creationId xmlns:a16="http://schemas.microsoft.com/office/drawing/2014/main" id="{43D7D9E5-DAC3-2BB8-7377-826863CBAD4E}"/>
-              </a:ext>
-            </a:extLst>
-          </p:cNvPr>
-          <p:cNvSpPr txBox="1"/>
-          <p:nvPr/>
-        </p:nvSpPr>
-        <p:spPr>
-          <a:xfrm>
-            <a:off x="609441" y="4819471"/>
-            <a:ext cx="11199971" cy="1384995"/>
-          </a:xfrm>
-          <a:prstGeom prst="rect">
-            <a:avLst/>
-          </a:prstGeom>
-          <a:solidFill>
-            <a:schemeClr val="bg1">
-              <a:lumMod val="95000"/>
-            </a:schemeClr>
-          </a:solidFill>
-          <a:ln w="28575">
-            <a:solidFill>
-              <a:srgbClr val="E0700D"/>
-            </a:solidFill>
-          </a:ln>
-        </p:spPr>
-        <p:txBody>
-          <a:bodyPr wrap="square" rtlCol="0">
-            <a:spAutoFit/>
-          </a:bodyPr>
-          <a:lstStyle/>
-          <a:p>
-            <a:pPr algn="just"/>
-            <a:r>
-              <a:rPr lang="en-US" sz="1200" dirty="0">
-                <a:latin typeface="Arial" panose="020B0604020202020204" pitchFamily="34" charset="0"/>
-                <a:cs typeface="Arial" panose="020B0604020202020204" pitchFamily="34" charset="0"/>
-              </a:rPr>
-              <a:t>Comment results</a:t>
-            </a:r>
-          </a:p>
-          <a:p>
-            <a:pPr algn="just"/>
-            <a:endParaRPr lang="en-US" sz="1200" dirty="0">
-              <a:latin typeface="Arial" panose="020B0604020202020204" pitchFamily="34" charset="0"/>
-              <a:cs typeface="Arial" panose="020B0604020202020204" pitchFamily="34" charset="0"/>
-            </a:endParaRPr>
-          </a:p>
-          <a:p>
-            <a:pPr algn="just"/>
-            <a:endParaRPr lang="en-US" sz="1200" dirty="0">
-              <a:latin typeface="Arial" panose="020B0604020202020204" pitchFamily="34" charset="0"/>
-              <a:cs typeface="Arial" panose="020B0604020202020204" pitchFamily="34" charset="0"/>
-            </a:endParaRPr>
-          </a:p>
-          <a:p>
-            <a:pPr algn="just"/>
-            <a:endParaRPr lang="en-US" sz="1200" dirty="0">
-              <a:latin typeface="Arial" panose="020B0604020202020204" pitchFamily="34" charset="0"/>
-              <a:cs typeface="Arial" panose="020B0604020202020204" pitchFamily="34" charset="0"/>
-            </a:endParaRPr>
-          </a:p>
-          <a:p>
-            <a:pPr algn="just"/>
-            <a:endParaRPr lang="en-US" sz="1200" dirty="0">
-              <a:latin typeface="Arial" panose="020B0604020202020204" pitchFamily="34" charset="0"/>
-              <a:cs typeface="Arial" panose="020B0604020202020204" pitchFamily="34" charset="0"/>
-            </a:endParaRPr>
-          </a:p>
-          <a:p>
-            <a:pPr algn="just"/>
-            <a:endParaRPr lang="en-US" sz="1200" dirty="0">
-              <a:latin typeface="Arial" panose="020B0604020202020204" pitchFamily="34" charset="0"/>
-              <a:cs typeface="Arial" panose="020B0604020202020204" pitchFamily="34" charset="0"/>
-            </a:endParaRPr>
-          </a:p>
-          <a:p>
-            <a:pPr algn="just"/>
-            <a:endParaRPr lang="en-US" sz="1200" dirty="0">
-              <a:latin typeface="Arial" panose="020B0604020202020204" pitchFamily="34" charset="0"/>
-              <a:cs typeface="Arial" panose="020B0604020202020204" pitchFamily="34" charset="0"/>
-            </a:endParaRPr>
-          </a:p>
-        </p:txBody>
-      </p:sp>
-      <p:sp>
-        <p:nvSpPr>
-          <p:cNvPr id="7" name="Rectángulo 6">
-            <a:extLst>
-              <a:ext uri="{FF2B5EF4-FFF2-40B4-BE49-F238E27FC236}">
-                <a16:creationId xmlns:a16="http://schemas.microsoft.com/office/drawing/2014/main" id="{9772491E-4FFB-FFC3-C855-72A4B15F3E73}"/>
-              </a:ext>
-            </a:extLst>
-          </p:cNvPr>
-          <p:cNvSpPr/>
-          <p:nvPr/>
-        </p:nvSpPr>
-        <p:spPr>
-          <a:xfrm>
-            <a:off x="609441" y="1377510"/>
-            <a:ext cx="11199971" cy="3306028"/>
+            <a:off x="6321424" y="1219200"/>
+            <a:ext cx="5486559" cy="3306028"/>
           </a:xfrm>
           <a:prstGeom prst="rect">
             <a:avLst/>
@@ -12439,122 +14533,256 @@
           </a:p>
         </p:txBody>
       </p:sp>
-      <p:sp>
-        <p:nvSpPr>
-          <p:cNvPr id="8" name="CuadroTexto 7">
-            <a:extLst>
-              <a:ext uri="{FF2B5EF4-FFF2-40B4-BE49-F238E27FC236}">
-                <a16:creationId xmlns:a16="http://schemas.microsoft.com/office/drawing/2014/main" id="{643565A9-7DB6-D6EE-152F-2852C8BA7986}"/>
-              </a:ext>
-            </a:extLst>
-          </p:cNvPr>
-          <p:cNvSpPr txBox="1"/>
-          <p:nvPr/>
-        </p:nvSpPr>
-        <p:spPr>
-          <a:xfrm>
-            <a:off x="640245" y="1942909"/>
-            <a:ext cx="11199972" cy="2708434"/>
-          </a:xfrm>
-          <a:prstGeom prst="rect">
-            <a:avLst/>
-          </a:prstGeom>
-          <a:noFill/>
-        </p:spPr>
-        <p:txBody>
-          <a:bodyPr wrap="square" rtlCol="0">
-            <a:spAutoFit/>
-          </a:bodyPr>
-          <a:lstStyle/>
-          <a:p>
-            <a:pPr algn="ctr"/>
-            <a:r>
-              <a:rPr lang="en-US" b="1" dirty="0"/>
-              <a:t>deep</a:t>
-            </a:r>
-            <a:r>
-              <a:rPr lang="en-US" dirty="0"/>
-              <a:t> waveguide</a:t>
-            </a:r>
-          </a:p>
-          <a:p>
-            <a:pPr algn="ctr"/>
-            <a:endParaRPr lang="en-US" dirty="0"/>
-          </a:p>
-          <a:p>
-            <a:pPr algn="ctr"/>
-            <a:r>
-              <a:rPr lang="en-US" dirty="0"/>
-              <a:t>Paste propagation plot and console results</a:t>
-            </a:r>
-          </a:p>
-          <a:p>
-            <a:pPr algn="ctr"/>
-            <a:endParaRPr lang="en-US" dirty="0"/>
-          </a:p>
-          <a:p>
-            <a:pPr algn="ctr"/>
-            <a:endParaRPr lang="en-US" dirty="0"/>
-          </a:p>
-          <a:p>
-            <a:pPr algn="r"/>
-            <a:r>
-              <a:rPr lang="en-US" sz="1600" b="1" dirty="0"/>
-              <a:t>Target</a:t>
-            </a:r>
-            <a:r>
-              <a:rPr lang="en-US" sz="1600" dirty="0"/>
-              <a:t>: make equal ratio over outputs (even if not 0.5) and minimize excess loss (even if not 0.0 dB)</a:t>
-            </a:r>
-          </a:p>
-          <a:p>
-            <a:pPr algn="r"/>
-            <a:r>
-              <a:rPr lang="en-US" sz="1600" dirty="0"/>
-              <a:t>With same settings of previous LO, now adjust try to manually optimize the MMI by changing iteratively:</a:t>
-            </a:r>
-          </a:p>
-          <a:p>
-            <a:pPr algn="r"/>
-            <a:r>
-              <a:rPr lang="en-US" sz="1600" dirty="0"/>
-              <a:t>- Change </a:t>
-            </a:r>
-            <a:r>
-              <a:rPr lang="en-US" sz="1600" dirty="0" err="1"/>
-              <a:t>dL_MMI</a:t>
-            </a:r>
-            <a:endParaRPr lang="en-US" sz="1600" dirty="0"/>
-          </a:p>
-          <a:p>
-            <a:pPr algn="r"/>
-            <a:r>
-              <a:rPr lang="en-US" sz="1600" dirty="0"/>
-              <a:t>- Change I/O waveguide position +/- </a:t>
-            </a:r>
-            <a:r>
-              <a:rPr lang="en-US" sz="1600" dirty="0" err="1"/>
-              <a:t>dy</a:t>
-            </a:r>
-            <a:endParaRPr lang="en-US" sz="1600" dirty="0"/>
-          </a:p>
-          <a:p>
-            <a:pPr algn="r"/>
-            <a:r>
-              <a:rPr lang="en-US" sz="1600" b="1" dirty="0"/>
-              <a:t>Hints</a:t>
-            </a:r>
-            <a:r>
-              <a:rPr lang="en-US" sz="1600" dirty="0"/>
-              <a:t>: observe the 2D EME propagation results to guide you to the best settings of a) and b).</a:t>
-            </a:r>
-          </a:p>
-        </p:txBody>
-      </p:sp>
+      <mc:AlternateContent xmlns:mc="http://schemas.openxmlformats.org/markup-compatibility/2006" xmlns:a14="http://schemas.microsoft.com/office/drawing/2010/main">
+        <mc:Choice Requires="a14">
+          <p:sp>
+            <p:nvSpPr>
+              <p:cNvPr id="9" name="CuadroTexto 8">
+                <a:extLst>
+                  <a:ext uri="{FF2B5EF4-FFF2-40B4-BE49-F238E27FC236}">
+                    <a16:creationId xmlns:a16="http://schemas.microsoft.com/office/drawing/2014/main" id="{44B0684C-9030-741C-DDCA-AD8BF4ADF59B}"/>
+                  </a:ext>
+                </a:extLst>
+              </p:cNvPr>
+              <p:cNvSpPr txBox="1"/>
+              <p:nvPr/>
+            </p:nvSpPr>
+            <p:spPr>
+              <a:xfrm>
+                <a:off x="1079403" y="2480496"/>
+                <a:ext cx="4546634" cy="1477328"/>
+              </a:xfrm>
+              <a:prstGeom prst="rect">
+                <a:avLst/>
+              </a:prstGeom>
+              <a:noFill/>
+            </p:spPr>
+            <p:txBody>
+              <a:bodyPr wrap="square" rtlCol="0">
+                <a:spAutoFit/>
+              </a:bodyPr>
+              <a:lstStyle/>
+              <a:p>
+                <a:pPr algn="ctr"/>
+                <a:r>
+                  <a:rPr lang="en-US" b="1" dirty="0"/>
+                  <a:t>deep</a:t>
+                </a:r>
+                <a:r>
+                  <a:rPr lang="en-US" dirty="0"/>
+                  <a:t> waveguide</a:t>
+                </a:r>
+              </a:p>
+              <a:p>
+                <a:pPr algn="ctr"/>
+                <a:endParaRPr lang="en-US" dirty="0"/>
+              </a:p>
+              <a:p>
+                <a:pPr algn="ctr"/>
+                <a:r>
+                  <a:rPr lang="en-US" dirty="0"/>
+                  <a:t>Paste </a:t>
+                </a:r>
+                <a14:m>
+                  <m:oMath xmlns:m="http://schemas.openxmlformats.org/officeDocument/2006/math">
+                    <m:r>
+                      <a:rPr lang="es-ES" b="0" i="1" smtClean="0">
+                        <a:latin typeface="Cambria Math" panose="02040503050406030204" pitchFamily="18" charset="0"/>
+                      </a:rPr>
+                      <m:t>𝐾</m:t>
+                    </m:r>
+                  </m:oMath>
+                </a14:m>
+                <a:r>
+                  <a:rPr lang="en-US" dirty="0"/>
+                  <a:t> vs gap for 10 mm </a:t>
+                </a:r>
+                <a:r>
+                  <a:rPr lang="en-US" dirty="0" err="1"/>
+                  <a:t>wvgs</a:t>
+                </a:r>
+                <a:r>
+                  <a:rPr lang="en-US" dirty="0"/>
+                  <a:t> to be uncoupled</a:t>
+                </a:r>
+              </a:p>
+              <a:p>
+                <a:pPr algn="ctr"/>
+                <a:endParaRPr lang="en-US" dirty="0"/>
+              </a:p>
+            </p:txBody>
+          </p:sp>
+        </mc:Choice>
+        <mc:Fallback xmlns="">
+          <p:sp>
+            <p:nvSpPr>
+              <p:cNvPr id="9" name="CuadroTexto 8">
+                <a:extLst>
+                  <a:ext uri="{FF2B5EF4-FFF2-40B4-BE49-F238E27FC236}">
+                    <a16:creationId xmlns:a16="http://schemas.microsoft.com/office/drawing/2014/main" id="{C1467207-8D05-D4C6-EBD2-209F796AE977}"/>
+                  </a:ext>
+                </a:extLst>
+              </p:cNvPr>
+              <p:cNvSpPr txBox="1">
+                <a:spLocks noRot="1" noChangeAspect="1" noMove="1" noResize="1" noEditPoints="1" noAdjustHandles="1" noChangeArrowheads="1" noChangeShapeType="1" noTextEdit="1"/>
+              </p:cNvSpPr>
+              <p:nvPr/>
+            </p:nvSpPr>
+            <p:spPr>
+              <a:xfrm>
+                <a:off x="1079403" y="2480496"/>
+                <a:ext cx="4546634" cy="1477328"/>
+              </a:xfrm>
+              <a:prstGeom prst="rect">
+                <a:avLst/>
+              </a:prstGeom>
+              <a:blipFill>
+                <a:blip r:embed="rId5"/>
+                <a:stretch>
+                  <a:fillRect t="-2479"/>
+                </a:stretch>
+              </a:blipFill>
+            </p:spPr>
+            <p:txBody>
+              <a:bodyPr/>
+              <a:lstStyle/>
+              <a:p>
+                <a:r>
+                  <a:rPr lang="es-ES">
+                    <a:noFill/>
+                  </a:rPr>
+                  <a:t> </a:t>
+                </a:r>
+              </a:p>
+            </p:txBody>
+          </p:sp>
+        </mc:Fallback>
+      </mc:AlternateContent>
+      <mc:AlternateContent xmlns:mc="http://schemas.openxmlformats.org/markup-compatibility/2006" xmlns:a14="http://schemas.microsoft.com/office/drawing/2010/main">
+        <mc:Choice Requires="a14">
+          <p:sp>
+            <p:nvSpPr>
+              <p:cNvPr id="10" name="CuadroTexto 9">
+                <a:extLst>
+                  <a:ext uri="{FF2B5EF4-FFF2-40B4-BE49-F238E27FC236}">
+                    <a16:creationId xmlns:a16="http://schemas.microsoft.com/office/drawing/2014/main" id="{983D59C5-DF5D-56DC-21FA-F198D117E891}"/>
+                  </a:ext>
+                </a:extLst>
+              </p:cNvPr>
+              <p:cNvSpPr txBox="1"/>
+              <p:nvPr/>
+            </p:nvSpPr>
+            <p:spPr>
+              <a:xfrm>
+                <a:off x="6883366" y="2480496"/>
+                <a:ext cx="4546634" cy="1200329"/>
+              </a:xfrm>
+              <a:prstGeom prst="rect">
+                <a:avLst/>
+              </a:prstGeom>
+              <a:noFill/>
+            </p:spPr>
+            <p:txBody>
+              <a:bodyPr wrap="square" rtlCol="0">
+                <a:spAutoFit/>
+              </a:bodyPr>
+              <a:lstStyle/>
+              <a:p>
+                <a:pPr algn="ctr"/>
+                <a:r>
+                  <a:rPr lang="en-US" b="1" dirty="0"/>
+                  <a:t>shallow</a:t>
+                </a:r>
+                <a:r>
+                  <a:rPr lang="en-US" dirty="0"/>
+                  <a:t> waveguide</a:t>
+                </a:r>
+              </a:p>
+              <a:p>
+                <a:pPr algn="ctr"/>
+                <a:endParaRPr lang="en-US" dirty="0"/>
+              </a:p>
+              <a:p>
+                <a:pPr algn="ctr"/>
+                <a:r>
+                  <a:rPr lang="en-US" dirty="0"/>
+                  <a:t>Paste </a:t>
+                </a:r>
+                <a14:m>
+                  <m:oMath xmlns:m="http://schemas.openxmlformats.org/officeDocument/2006/math">
+                    <m:r>
+                      <a:rPr lang="es-ES" i="1">
+                        <a:latin typeface="Cambria Math" panose="02040503050406030204" pitchFamily="18" charset="0"/>
+                      </a:rPr>
+                      <m:t>𝐾</m:t>
+                    </m:r>
+                  </m:oMath>
+                </a14:m>
+                <a:r>
+                  <a:rPr lang="en-US" dirty="0"/>
+                  <a:t> vs gap for 10 mm </a:t>
+                </a:r>
+                <a:r>
+                  <a:rPr lang="en-US" dirty="0" err="1"/>
+                  <a:t>wvgs</a:t>
+                </a:r>
+                <a:r>
+                  <a:rPr lang="en-US" dirty="0"/>
+                  <a:t> to be uncoupled</a:t>
+                </a:r>
+              </a:p>
+            </p:txBody>
+          </p:sp>
+        </mc:Choice>
+        <mc:Fallback xmlns="">
+          <p:sp>
+            <p:nvSpPr>
+              <p:cNvPr id="10" name="CuadroTexto 9">
+                <a:extLst>
+                  <a:ext uri="{FF2B5EF4-FFF2-40B4-BE49-F238E27FC236}">
+                    <a16:creationId xmlns:a16="http://schemas.microsoft.com/office/drawing/2014/main" id="{32E39C0C-95E1-ED90-891A-5D634D9DB76B}"/>
+                  </a:ext>
+                </a:extLst>
+              </p:cNvPr>
+              <p:cNvSpPr txBox="1">
+                <a:spLocks noRot="1" noChangeAspect="1" noMove="1" noResize="1" noEditPoints="1" noAdjustHandles="1" noChangeArrowheads="1" noChangeShapeType="1" noTextEdit="1"/>
+              </p:cNvSpPr>
+              <p:nvPr/>
+            </p:nvSpPr>
+            <p:spPr>
+              <a:xfrm>
+                <a:off x="6883366" y="2480496"/>
+                <a:ext cx="4546634" cy="1200329"/>
+              </a:xfrm>
+              <a:prstGeom prst="rect">
+                <a:avLst/>
+              </a:prstGeom>
+              <a:blipFill>
+                <a:blip r:embed="rId6"/>
+                <a:stretch>
+                  <a:fillRect t="-3046" b="-7107"/>
+                </a:stretch>
+              </a:blipFill>
+            </p:spPr>
+            <p:txBody>
+              <a:bodyPr/>
+              <a:lstStyle/>
+              <a:p>
+                <a:r>
+                  <a:rPr lang="es-ES">
+                    <a:noFill/>
+                  </a:rPr>
+                  <a:t> </a:t>
+                </a:r>
+              </a:p>
+            </p:txBody>
+          </p:sp>
+        </mc:Fallback>
+      </mc:AlternateContent>
     </p:spTree>
     <p:extLst>
       <p:ext uri="{BB962C8B-B14F-4D97-AF65-F5344CB8AC3E}">
-        <p14:creationId xmlns:p14="http://schemas.microsoft.com/office/powerpoint/2010/main" val="2685215753"/>
+        <p14:creationId xmlns:p14="http://schemas.microsoft.com/office/powerpoint/2010/main" val="1605964771"/>
       </p:ext>
     </p:extLst>
   </p:cSld>

--- a/LabBook_20.pptx
+++ b/LabBook_20.pptx
@@ -820,7 +820,7 @@
           <a:p>
             <a:fld id="{8438F8DC-35B0-48E6-A86E-42F1F08DD00F}" type="datetimeFigureOut">
               <a:rPr lang="es-ES" smtClean="0"/>
-              <a:t>09/03/2026</a:t>
+              <a:t>10/03/2026</a:t>
             </a:fld>
             <a:endParaRPr lang="es-ES"/>
           </a:p>
@@ -997,7 +997,7 @@
           <a:p>
             <a:fld id="{FACBDC12-F39B-4B97-8F4D-6734F9D366FF}" type="datetimeFigureOut">
               <a:rPr lang="es-ES" smtClean="0"/>
-              <a:t>09/03/2026</a:t>
+              <a:t>10/03/2026</a:t>
             </a:fld>
             <a:endParaRPr lang="es-ES"/>
           </a:p>
@@ -13081,7 +13081,7 @@
         <p:spPr>
           <a:xfrm>
             <a:off x="609441" y="4860334"/>
-            <a:ext cx="11199971" cy="1015663"/>
+            <a:ext cx="11199971" cy="1200329"/>
           </a:xfrm>
           <a:prstGeom prst="rect">
             <a:avLst/>
@@ -13140,239 +13140,39 @@
                 <a:latin typeface="Arial" panose="020B0604020202020204" pitchFamily="34" charset="0"/>
                 <a:cs typeface="Arial" panose="020B0604020202020204" pitchFamily="34" charset="0"/>
               </a:rPr>
-              <a:t>#El Código </a:t>
+              <a:t>The graph above represents the </a:t>
             </a:r>
             <a:r>
               <a:rPr lang="en-US" sz="1200" dirty="0" err="1">
                 <a:latin typeface="Arial" panose="020B0604020202020204" pitchFamily="34" charset="0"/>
                 <a:cs typeface="Arial" panose="020B0604020202020204" pitchFamily="34" charset="0"/>
               </a:rPr>
-              <a:t>está</a:t>
+              <a:t>L_pi</a:t>
             </a:r>
             <a:r>
               <a:rPr lang="en-US" sz="1200" dirty="0">
                 <a:latin typeface="Arial" panose="020B0604020202020204" pitchFamily="34" charset="0"/>
                 <a:cs typeface="Arial" panose="020B0604020202020204" pitchFamily="34" charset="0"/>
               </a:rPr>
-              <a:t> </a:t>
+              <a:t> parameter in terms of the gap between two waveguides that conform a directional coupling. As expected, the bigger the gap, the bigger the </a:t>
             </a:r>
             <a:r>
               <a:rPr lang="en-US" sz="1200" dirty="0" err="1">
                 <a:latin typeface="Arial" panose="020B0604020202020204" pitchFamily="34" charset="0"/>
                 <a:cs typeface="Arial" panose="020B0604020202020204" pitchFamily="34" charset="0"/>
               </a:rPr>
-              <a:t>preparado</a:t>
+              <a:t>L_pi</a:t>
             </a:r>
             <a:r>
               <a:rPr lang="en-US" sz="1200" dirty="0">
                 <a:latin typeface="Arial" panose="020B0604020202020204" pitchFamily="34" charset="0"/>
                 <a:cs typeface="Arial" panose="020B0604020202020204" pitchFamily="34" charset="0"/>
               </a:rPr>
-              <a:t> </a:t>
-            </a:r>
-            <a:r>
-              <a:rPr lang="en-US" sz="1200" dirty="0" err="1">
-                <a:latin typeface="Arial" panose="020B0604020202020204" pitchFamily="34" charset="0"/>
-                <a:cs typeface="Arial" panose="020B0604020202020204" pitchFamily="34" charset="0"/>
-              </a:rPr>
-              <a:t>ya</a:t>
-            </a:r>
-            <a:r>
-              <a:rPr lang="en-US" sz="1200" dirty="0">
-                <a:latin typeface="Arial" panose="020B0604020202020204" pitchFamily="34" charset="0"/>
-                <a:cs typeface="Arial" panose="020B0604020202020204" pitchFamily="34" charset="0"/>
-              </a:rPr>
-              <a:t> para </a:t>
-            </a:r>
-            <a:r>
-              <a:rPr lang="en-US" sz="1200" dirty="0" err="1">
-                <a:latin typeface="Arial" panose="020B0604020202020204" pitchFamily="34" charset="0"/>
-                <a:cs typeface="Arial" panose="020B0604020202020204" pitchFamily="34" charset="0"/>
-              </a:rPr>
-              <a:t>reunir</a:t>
-            </a:r>
-            <a:r>
-              <a:rPr lang="en-US" sz="1200" dirty="0">
-                <a:latin typeface="Arial" panose="020B0604020202020204" pitchFamily="34" charset="0"/>
-                <a:cs typeface="Arial" panose="020B0604020202020204" pitchFamily="34" charset="0"/>
-              </a:rPr>
-              <a:t> </a:t>
-            </a:r>
-            <a:r>
-              <a:rPr lang="en-US" sz="1200" dirty="0" err="1">
-                <a:latin typeface="Arial" panose="020B0604020202020204" pitchFamily="34" charset="0"/>
-                <a:cs typeface="Arial" panose="020B0604020202020204" pitchFamily="34" charset="0"/>
-              </a:rPr>
-              <a:t>los</a:t>
-            </a:r>
-            <a:r>
-              <a:rPr lang="en-US" sz="1200" dirty="0">
-                <a:latin typeface="Arial" panose="020B0604020202020204" pitchFamily="34" charset="0"/>
-                <a:cs typeface="Arial" panose="020B0604020202020204" pitchFamily="34" charset="0"/>
-              </a:rPr>
-              <a:t> </a:t>
-            </a:r>
-            <a:r>
-              <a:rPr lang="en-US" sz="1200" dirty="0" err="1">
-                <a:latin typeface="Arial" panose="020B0604020202020204" pitchFamily="34" charset="0"/>
-                <a:cs typeface="Arial" panose="020B0604020202020204" pitchFamily="34" charset="0"/>
-              </a:rPr>
-              <a:t>datos</a:t>
-            </a:r>
-            <a:r>
-              <a:rPr lang="en-US" sz="1200" dirty="0">
-                <a:latin typeface="Arial" panose="020B0604020202020204" pitchFamily="34" charset="0"/>
-                <a:cs typeface="Arial" panose="020B0604020202020204" pitchFamily="34" charset="0"/>
-              </a:rPr>
-              <a:t> del gap y </a:t>
-            </a:r>
-            <a:r>
-              <a:rPr lang="en-US" sz="1200" dirty="0" err="1">
-                <a:latin typeface="Arial" panose="020B0604020202020204" pitchFamily="34" charset="0"/>
-                <a:cs typeface="Arial" panose="020B0604020202020204" pitchFamily="34" charset="0"/>
-              </a:rPr>
-              <a:t>el</a:t>
-            </a:r>
-            <a:r>
-              <a:rPr lang="en-US" sz="1200" dirty="0">
-                <a:latin typeface="Arial" panose="020B0604020202020204" pitchFamily="34" charset="0"/>
-                <a:cs typeface="Arial" panose="020B0604020202020204" pitchFamily="34" charset="0"/>
-              </a:rPr>
-              <a:t> </a:t>
-            </a:r>
-            <a:r>
-              <a:rPr lang="en-US" sz="1200" dirty="0" err="1">
-                <a:latin typeface="Arial" panose="020B0604020202020204" pitchFamily="34" charset="0"/>
-                <a:cs typeface="Arial" panose="020B0604020202020204" pitchFamily="34" charset="0"/>
-              </a:rPr>
-              <a:t>Lpi</a:t>
-            </a:r>
-            <a:r>
-              <a:rPr lang="en-US" sz="1200" dirty="0">
-                <a:latin typeface="Arial" panose="020B0604020202020204" pitchFamily="34" charset="0"/>
-                <a:cs typeface="Arial" panose="020B0604020202020204" pitchFamily="34" charset="0"/>
-              </a:rPr>
-              <a:t> </a:t>
-            </a:r>
-            <a:r>
-              <a:rPr lang="en-US" sz="1200" dirty="0" err="1">
-                <a:latin typeface="Arial" panose="020B0604020202020204" pitchFamily="34" charset="0"/>
-                <a:cs typeface="Arial" panose="020B0604020202020204" pitchFamily="34" charset="0"/>
-              </a:rPr>
-              <a:t>en</a:t>
-            </a:r>
-            <a:r>
-              <a:rPr lang="en-US" sz="1200" dirty="0">
-                <a:latin typeface="Arial" panose="020B0604020202020204" pitchFamily="34" charset="0"/>
-                <a:cs typeface="Arial" panose="020B0604020202020204" pitchFamily="34" charset="0"/>
-              </a:rPr>
-              <a:t> dos arrays para </a:t>
-            </a:r>
-            <a:r>
-              <a:rPr lang="en-US" sz="1200" dirty="0" err="1">
-                <a:latin typeface="Arial" panose="020B0604020202020204" pitchFamily="34" charset="0"/>
-                <a:cs typeface="Arial" panose="020B0604020202020204" pitchFamily="34" charset="0"/>
-              </a:rPr>
-              <a:t>representarlos</a:t>
-            </a:r>
-            <a:r>
-              <a:rPr lang="en-US" sz="1200" dirty="0">
-                <a:latin typeface="Arial" panose="020B0604020202020204" pitchFamily="34" charset="0"/>
-                <a:cs typeface="Arial" panose="020B0604020202020204" pitchFamily="34" charset="0"/>
-              </a:rPr>
-              <a:t>, solo </a:t>
-            </a:r>
-            <a:r>
-              <a:rPr lang="en-US" sz="1200" dirty="0" err="1">
-                <a:latin typeface="Arial" panose="020B0604020202020204" pitchFamily="34" charset="0"/>
-                <a:cs typeface="Arial" panose="020B0604020202020204" pitchFamily="34" charset="0"/>
-              </a:rPr>
-              <a:t>falta</a:t>
-            </a:r>
-            <a:r>
-              <a:rPr lang="en-US" sz="1200" dirty="0">
-                <a:latin typeface="Arial" panose="020B0604020202020204" pitchFamily="34" charset="0"/>
-                <a:cs typeface="Arial" panose="020B0604020202020204" pitchFamily="34" charset="0"/>
-              </a:rPr>
-              <a:t> </a:t>
-            </a:r>
-            <a:r>
-              <a:rPr lang="en-US" sz="1200" dirty="0" err="1">
-                <a:latin typeface="Arial" panose="020B0604020202020204" pitchFamily="34" charset="0"/>
-                <a:cs typeface="Arial" panose="020B0604020202020204" pitchFamily="34" charset="0"/>
-              </a:rPr>
-              <a:t>correrlo</a:t>
-            </a:r>
-            <a:r>
-              <a:rPr lang="en-US" sz="1200" dirty="0">
-                <a:latin typeface="Arial" panose="020B0604020202020204" pitchFamily="34" charset="0"/>
-                <a:cs typeface="Arial" panose="020B0604020202020204" pitchFamily="34" charset="0"/>
-              </a:rPr>
-              <a:t> y </a:t>
-            </a:r>
-            <a:r>
-              <a:rPr lang="en-US" sz="1200" dirty="0" err="1">
-                <a:latin typeface="Arial" panose="020B0604020202020204" pitchFamily="34" charset="0"/>
-                <a:cs typeface="Arial" panose="020B0604020202020204" pitchFamily="34" charset="0"/>
-              </a:rPr>
-              <a:t>poner</a:t>
-            </a:r>
-            <a:r>
-              <a:rPr lang="en-US" sz="1200" dirty="0">
-                <a:latin typeface="Arial" panose="020B0604020202020204" pitchFamily="34" charset="0"/>
-                <a:cs typeface="Arial" panose="020B0604020202020204" pitchFamily="34" charset="0"/>
-              </a:rPr>
-              <a:t> la </a:t>
-            </a:r>
-            <a:r>
-              <a:rPr lang="en-US" sz="1200" dirty="0" err="1">
-                <a:latin typeface="Arial" panose="020B0604020202020204" pitchFamily="34" charset="0"/>
-                <a:cs typeface="Arial" panose="020B0604020202020204" pitchFamily="34" charset="0"/>
-              </a:rPr>
-              <a:t>gráfica</a:t>
-            </a:r>
-            <a:r>
-              <a:rPr lang="en-US" sz="1200" dirty="0">
-                <a:latin typeface="Arial" panose="020B0604020202020204" pitchFamily="34" charset="0"/>
-                <a:cs typeface="Arial" panose="020B0604020202020204" pitchFamily="34" charset="0"/>
-              </a:rPr>
-              <a:t> </a:t>
-            </a:r>
-            <a:r>
-              <a:rPr lang="en-US" sz="1200" dirty="0" err="1">
-                <a:latin typeface="Arial" panose="020B0604020202020204" pitchFamily="34" charset="0"/>
-                <a:cs typeface="Arial" panose="020B0604020202020204" pitchFamily="34" charset="0"/>
-              </a:rPr>
-              <a:t>aquí</a:t>
-            </a:r>
-            <a:r>
-              <a:rPr lang="en-US" sz="1200" dirty="0">
-                <a:latin typeface="Arial" panose="020B0604020202020204" pitchFamily="34" charset="0"/>
-                <a:cs typeface="Arial" panose="020B0604020202020204" pitchFamily="34" charset="0"/>
-              </a:rPr>
-              <a:t> para pasar al </a:t>
-            </a:r>
-            <a:r>
-              <a:rPr lang="en-US" sz="1200" dirty="0" err="1">
-                <a:latin typeface="Arial" panose="020B0604020202020204" pitchFamily="34" charset="0"/>
-                <a:cs typeface="Arial" panose="020B0604020202020204" pitchFamily="34" charset="0"/>
-              </a:rPr>
-              <a:t>siguiente</a:t>
-            </a:r>
-            <a:r>
-              <a:rPr lang="en-US" sz="1200" dirty="0">
-                <a:latin typeface="Arial" panose="020B0604020202020204" pitchFamily="34" charset="0"/>
-                <a:cs typeface="Arial" panose="020B0604020202020204" pitchFamily="34" charset="0"/>
-              </a:rPr>
-              <a:t> </a:t>
-            </a:r>
-            <a:r>
-              <a:rPr lang="en-US" sz="1200">
-                <a:latin typeface="Arial" panose="020B0604020202020204" pitchFamily="34" charset="0"/>
-                <a:cs typeface="Arial" panose="020B0604020202020204" pitchFamily="34" charset="0"/>
-              </a:rPr>
-              <a:t>ejercicio</a:t>
-            </a:r>
+              <a:t>, since the energy transfer ratio is smaller and, thus, more time (i.e. distance) is required to transfer all optical power from one port to the other.</a:t>
+            </a:r>
+          </a:p>
+          <a:p>
+            <a:pPr algn="just"/>
             <a:endParaRPr lang="en-US" sz="1200" dirty="0">
               <a:latin typeface="Arial" panose="020B0604020202020204" pitchFamily="34" charset="0"/>
               <a:cs typeface="Arial" panose="020B0604020202020204" pitchFamily="34" charset="0"/>
@@ -13439,6 +13239,36 @@
           </a:p>
         </p:txBody>
       </p:sp>
+      <p:pic>
+        <p:nvPicPr>
+          <p:cNvPr id="5" name="Picture 4">
+            <a:extLst>
+              <a:ext uri="{FF2B5EF4-FFF2-40B4-BE49-F238E27FC236}">
+                <a16:creationId xmlns:a16="http://schemas.microsoft.com/office/drawing/2014/main" id="{B2E66881-9DED-9BC2-9573-5D10B137B13A}"/>
+              </a:ext>
+            </a:extLst>
+          </p:cNvPr>
+          <p:cNvPicPr>
+            <a:picLocks noChangeAspect="1"/>
+          </p:cNvPicPr>
+          <p:nvPr/>
+        </p:nvPicPr>
+        <p:blipFill>
+          <a:blip r:embed="rId5"/>
+          <a:stretch>
+            <a:fillRect/>
+          </a:stretch>
+        </p:blipFill>
+        <p:spPr>
+          <a:xfrm>
+            <a:off x="3505200" y="1509697"/>
+            <a:ext cx="3981450" cy="3123379"/>
+          </a:xfrm>
+          <a:prstGeom prst="rect">
+            <a:avLst/>
+          </a:prstGeom>
+        </p:spPr>
+      </p:pic>
     </p:spTree>
     <p:extLst>
       <p:ext uri="{BB962C8B-B14F-4D97-AF65-F5344CB8AC3E}">
